--- a/docs/enginesEvolutionAnalysis.pptx
+++ b/docs/enginesEvolutionAnalysis.pptx
@@ -8,8 +8,9 @@
     <p:sldId id="260" r:id="rId2"/>
     <p:sldId id="262" r:id="rId3"/>
     <p:sldId id="263" r:id="rId4"/>
-    <p:sldId id="256" r:id="rId5"/>
-    <p:sldId id="261" r:id="rId6"/>
+    <p:sldId id="264" r:id="rId5"/>
+    <p:sldId id="256" r:id="rId6"/>
+    <p:sldId id="261" r:id="rId7"/>
   </p:sldIdLst>
   <p:sldSz cx="10691813" cy="7561263"/>
   <p:notesSz cx="6858000" cy="9144000"/>
@@ -247,7 +248,7 @@
           <a:p>
             <a:fld id="{9412F206-934A-4AEB-8CDD-488D750A95A8}" type="datetimeFigureOut">
               <a:rPr lang="ru-RU" smtClean="0"/>
-              <a:t>13.04.2026</a:t>
+              <a:t>14.04.2026</a:t>
             </a:fld>
             <a:endParaRPr lang="ru-RU"/>
           </a:p>
@@ -417,7 +418,7 @@
           <a:p>
             <a:fld id="{9412F206-934A-4AEB-8CDD-488D750A95A8}" type="datetimeFigureOut">
               <a:rPr lang="ru-RU" smtClean="0"/>
-              <a:t>13.04.2026</a:t>
+              <a:t>14.04.2026</a:t>
             </a:fld>
             <a:endParaRPr lang="ru-RU"/>
           </a:p>
@@ -597,7 +598,7 @@
           <a:p>
             <a:fld id="{9412F206-934A-4AEB-8CDD-488D750A95A8}" type="datetimeFigureOut">
               <a:rPr lang="ru-RU" smtClean="0"/>
-              <a:t>13.04.2026</a:t>
+              <a:t>14.04.2026</a:t>
             </a:fld>
             <a:endParaRPr lang="ru-RU"/>
           </a:p>
@@ -767,7 +768,7 @@
           <a:p>
             <a:fld id="{9412F206-934A-4AEB-8CDD-488D750A95A8}" type="datetimeFigureOut">
               <a:rPr lang="ru-RU" smtClean="0"/>
-              <a:t>13.04.2026</a:t>
+              <a:t>14.04.2026</a:t>
             </a:fld>
             <a:endParaRPr lang="ru-RU"/>
           </a:p>
@@ -1011,7 +1012,7 @@
           <a:p>
             <a:fld id="{9412F206-934A-4AEB-8CDD-488D750A95A8}" type="datetimeFigureOut">
               <a:rPr lang="ru-RU" smtClean="0"/>
-              <a:t>13.04.2026</a:t>
+              <a:t>14.04.2026</a:t>
             </a:fld>
             <a:endParaRPr lang="ru-RU"/>
           </a:p>
@@ -1243,7 +1244,7 @@
           <a:p>
             <a:fld id="{9412F206-934A-4AEB-8CDD-488D750A95A8}" type="datetimeFigureOut">
               <a:rPr lang="ru-RU" smtClean="0"/>
-              <a:t>13.04.2026</a:t>
+              <a:t>14.04.2026</a:t>
             </a:fld>
             <a:endParaRPr lang="ru-RU"/>
           </a:p>
@@ -1610,7 +1611,7 @@
           <a:p>
             <a:fld id="{9412F206-934A-4AEB-8CDD-488D750A95A8}" type="datetimeFigureOut">
               <a:rPr lang="ru-RU" smtClean="0"/>
-              <a:t>13.04.2026</a:t>
+              <a:t>14.04.2026</a:t>
             </a:fld>
             <a:endParaRPr lang="ru-RU"/>
           </a:p>
@@ -1728,7 +1729,7 @@
           <a:p>
             <a:fld id="{9412F206-934A-4AEB-8CDD-488D750A95A8}" type="datetimeFigureOut">
               <a:rPr lang="ru-RU" smtClean="0"/>
-              <a:t>13.04.2026</a:t>
+              <a:t>14.04.2026</a:t>
             </a:fld>
             <a:endParaRPr lang="ru-RU"/>
           </a:p>
@@ -1823,7 +1824,7 @@
           <a:p>
             <a:fld id="{9412F206-934A-4AEB-8CDD-488D750A95A8}" type="datetimeFigureOut">
               <a:rPr lang="ru-RU" smtClean="0"/>
-              <a:t>13.04.2026</a:t>
+              <a:t>14.04.2026</a:t>
             </a:fld>
             <a:endParaRPr lang="ru-RU"/>
           </a:p>
@@ -2100,7 +2101,7 @@
           <a:p>
             <a:fld id="{9412F206-934A-4AEB-8CDD-488D750A95A8}" type="datetimeFigureOut">
               <a:rPr lang="ru-RU" smtClean="0"/>
-              <a:t>13.04.2026</a:t>
+              <a:t>14.04.2026</a:t>
             </a:fld>
             <a:endParaRPr lang="ru-RU"/>
           </a:p>
@@ -2357,7 +2358,7 @@
           <a:p>
             <a:fld id="{9412F206-934A-4AEB-8CDD-488D750A95A8}" type="datetimeFigureOut">
               <a:rPr lang="ru-RU" smtClean="0"/>
-              <a:t>13.04.2026</a:t>
+              <a:t>14.04.2026</a:t>
             </a:fld>
             <a:endParaRPr lang="ru-RU"/>
           </a:p>
@@ -2570,7 +2571,7 @@
           <a:p>
             <a:fld id="{9412F206-934A-4AEB-8CDD-488D750A95A8}" type="datetimeFigureOut">
               <a:rPr lang="ru-RU" smtClean="0"/>
-              <a:t>13.04.2026</a:t>
+              <a:t>14.04.2026</a:t>
             </a:fld>
             <a:endParaRPr lang="ru-RU"/>
           </a:p>
@@ -9259,6 +9260,4567 @@
           <a:chExt cx="0" cy="0"/>
         </a:xfrm>
       </p:grpSpPr>
+      <mc:AlternateContent xmlns:mc="http://schemas.openxmlformats.org/markup-compatibility/2006">
+        <mc:Choice xmlns:a14="http://schemas.microsoft.com/office/drawing/2010/main" Requires="a14">
+          <p:sp>
+            <p:nvSpPr>
+              <p:cNvPr id="8" name="TextBox 7">
+                <a:extLst>
+                  <a:ext uri="{FF2B5EF4-FFF2-40B4-BE49-F238E27FC236}">
+                    <a16:creationId xmlns:a16="http://schemas.microsoft.com/office/drawing/2014/main" id="{F8CFBDAA-B845-4C53-8511-67F56157498B}"/>
+                  </a:ext>
+                </a:extLst>
+              </p:cNvPr>
+              <p:cNvSpPr txBox="1"/>
+              <p:nvPr/>
+            </p:nvSpPr>
+            <p:spPr>
+              <a:xfrm>
+                <a:off x="4953836" y="311973"/>
+                <a:ext cx="5546691" cy="5775620"/>
+              </a:xfrm>
+              <a:prstGeom prst="rect">
+                <a:avLst/>
+              </a:prstGeom>
+              <a:noFill/>
+              <a:ln>
+                <a:solidFill>
+                  <a:schemeClr val="tx1">
+                    <a:lumMod val="50000"/>
+                    <a:lumOff val="50000"/>
+                  </a:schemeClr>
+                </a:solidFill>
+              </a:ln>
+            </p:spPr>
+            <p:txBody>
+              <a:bodyPr wrap="square">
+                <a:spAutoFit/>
+              </a:bodyPr>
+              <a:lstStyle/>
+              <a:p>
+                <a:pPr>
+                  <a:spcAft>
+                    <a:spcPts val="600"/>
+                  </a:spcAft>
+                </a:pPr>
+                <a:r>
+                  <a:rPr lang="ru-RU" sz="1800" b="1" dirty="0">
+                    <a:effectLst/>
+                    <a:latin typeface="Calibri" panose="020F0502020204030204" pitchFamily="34" charset="0"/>
+                    <a:ea typeface="Times New Roman" panose="02020603050405020304" pitchFamily="18" charset="0"/>
+                  </a:rPr>
+                  <a:t>Численное интегрирование Рунге-Кутты 4-го порядка</a:t>
+                </a:r>
+                <a:r>
+                  <a:rPr lang="ru-RU" sz="1800" dirty="0">
+                    <a:effectLst/>
+                    <a:latin typeface="Calibri" panose="020F0502020204030204" pitchFamily="34" charset="0"/>
+                    <a:ea typeface="Times New Roman" panose="02020603050405020304" pitchFamily="18" charset="0"/>
+                  </a:rPr>
+                  <a:t> </a:t>
+                </a:r>
+                <a:endParaRPr lang="ru-RU" sz="1800" dirty="0">
+                  <a:effectLst/>
+                  <a:latin typeface="Times New Roman" panose="02020603050405020304" pitchFamily="18" charset="0"/>
+                  <a:ea typeface="Times New Roman" panose="02020603050405020304" pitchFamily="18" charset="0"/>
+                </a:endParaRPr>
+              </a:p>
+              <a:p>
+                <a:pPr>
+                  <a:spcAft>
+                    <a:spcPts val="600"/>
+                  </a:spcAft>
+                </a:pPr>
+                <a14:m>
+                  <m:oMathPara xmlns:m="http://schemas.openxmlformats.org/officeDocument/2006/math">
+                    <m:oMathParaPr>
+                      <m:jc m:val="centerGroup"/>
+                    </m:oMathParaPr>
+                    <m:oMath xmlns:m="http://schemas.openxmlformats.org/officeDocument/2006/math">
+                      <m:sSubSup>
+                        <m:sSubSupPr>
+                          <m:ctrlPr>
+                            <a:rPr lang="ru-RU" sz="1800" i="1">
+                              <a:effectLst/>
+                              <a:latin typeface="Cambria Math" panose="02040503050406030204" pitchFamily="18" charset="0"/>
+                              <a:ea typeface="Times New Roman" panose="02020603050405020304" pitchFamily="18" charset="0"/>
+                              <a:cs typeface="Calibri" panose="020F0502020204030204" pitchFamily="34" charset="0"/>
+                            </a:rPr>
+                          </m:ctrlPr>
+                        </m:sSubSupPr>
+                        <m:e>
+                          <m:r>
+                            <a:rPr lang="en-US" sz="1800" i="1">
+                              <a:effectLst/>
+                              <a:latin typeface="Cambria Math" panose="02040503050406030204" pitchFamily="18" charset="0"/>
+                              <a:ea typeface="Times New Roman" panose="02020603050405020304" pitchFamily="18" charset="0"/>
+                              <a:cs typeface="Calibri" panose="020F0502020204030204" pitchFamily="34" charset="0"/>
+                            </a:rPr>
+                            <m:t>𝑘</m:t>
+                          </m:r>
+                        </m:e>
+                        <m:sub>
+                          <m:r>
+                            <a:rPr lang="en-US" sz="1800" i="1">
+                              <a:effectLst/>
+                              <a:latin typeface="Cambria Math" panose="02040503050406030204" pitchFamily="18" charset="0"/>
+                              <a:ea typeface="Times New Roman" panose="02020603050405020304" pitchFamily="18" charset="0"/>
+                              <a:cs typeface="Calibri" panose="020F0502020204030204" pitchFamily="34" charset="0"/>
+                            </a:rPr>
+                            <m:t>1</m:t>
+                          </m:r>
+                        </m:sub>
+                        <m:sup>
+                          <m:r>
+                            <a:rPr lang="en-US" sz="1800" i="1">
+                              <a:effectLst/>
+                              <a:latin typeface="Cambria Math" panose="02040503050406030204" pitchFamily="18" charset="0"/>
+                              <a:ea typeface="Times New Roman" panose="02020603050405020304" pitchFamily="18" charset="0"/>
+                              <a:cs typeface="Calibri" panose="020F0502020204030204" pitchFamily="34" charset="0"/>
+                            </a:rPr>
+                            <m:t>h</m:t>
+                          </m:r>
+                        </m:sup>
+                      </m:sSubSup>
+                      <m:r>
+                        <a:rPr lang="en-US" sz="1800" i="1">
+                          <a:effectLst/>
+                          <a:latin typeface="Cambria Math" panose="02040503050406030204" pitchFamily="18" charset="0"/>
+                          <a:ea typeface="Times New Roman" panose="02020603050405020304" pitchFamily="18" charset="0"/>
+                          <a:cs typeface="Calibri" panose="020F0502020204030204" pitchFamily="34" charset="0"/>
+                        </a:rPr>
+                        <m:t>=</m:t>
+                      </m:r>
+                      <m:r>
+                        <a:rPr lang="en-US" sz="1800" i="1">
+                          <a:effectLst/>
+                          <a:latin typeface="Cambria Math" panose="02040503050406030204" pitchFamily="18" charset="0"/>
+                          <a:ea typeface="Times New Roman" panose="02020603050405020304" pitchFamily="18" charset="0"/>
+                          <a:cs typeface="Calibri" panose="020F0502020204030204" pitchFamily="34" charset="0"/>
+                        </a:rPr>
+                        <m:t>𝑣</m:t>
+                      </m:r>
+                      <m:r>
+                        <a:rPr lang="en-US" sz="1800" i="1">
+                          <a:effectLst/>
+                          <a:latin typeface="Cambria Math" panose="02040503050406030204" pitchFamily="18" charset="0"/>
+                          <a:ea typeface="Times New Roman" panose="02020603050405020304" pitchFamily="18" charset="0"/>
+                          <a:cs typeface="Calibri" panose="020F0502020204030204" pitchFamily="34" charset="0"/>
+                        </a:rPr>
+                        <m:t>,</m:t>
+                      </m:r>
+                    </m:oMath>
+                  </m:oMathPara>
+                </a14:m>
+                <a:endParaRPr lang="ru-RU" sz="1800" dirty="0">
+                  <a:effectLst/>
+                  <a:latin typeface="Times New Roman" panose="02020603050405020304" pitchFamily="18" charset="0"/>
+                  <a:ea typeface="Times New Roman" panose="02020603050405020304" pitchFamily="18" charset="0"/>
+                </a:endParaRPr>
+              </a:p>
+              <a:p>
+                <a:pPr>
+                  <a:spcAft>
+                    <a:spcPts val="600"/>
+                  </a:spcAft>
+                </a:pPr>
+                <a14:m>
+                  <m:oMathPara xmlns:m="http://schemas.openxmlformats.org/officeDocument/2006/math">
+                    <m:oMathParaPr>
+                      <m:jc m:val="centerGroup"/>
+                    </m:oMathParaPr>
+                    <m:oMath xmlns:m="http://schemas.openxmlformats.org/officeDocument/2006/math">
+                      <m:sSub>
+                        <m:sSubPr>
+                          <m:ctrlPr>
+                            <a:rPr lang="ru-RU" sz="1800" i="1">
+                              <a:effectLst/>
+                              <a:latin typeface="Cambria Math" panose="02040503050406030204" pitchFamily="18" charset="0"/>
+                              <a:ea typeface="Times New Roman" panose="02020603050405020304" pitchFamily="18" charset="0"/>
+                              <a:cs typeface="Calibri" panose="020F0502020204030204" pitchFamily="34" charset="0"/>
+                            </a:rPr>
+                          </m:ctrlPr>
+                        </m:sSubPr>
+                        <m:e>
+                          <m:r>
+                            <a:rPr lang="en-US" sz="1800" i="1">
+                              <a:effectLst/>
+                              <a:latin typeface="Cambria Math" panose="02040503050406030204" pitchFamily="18" charset="0"/>
+                              <a:ea typeface="Times New Roman" panose="02020603050405020304" pitchFamily="18" charset="0"/>
+                              <a:cs typeface="Calibri" panose="020F0502020204030204" pitchFamily="34" charset="0"/>
+                            </a:rPr>
+                            <m:t>𝑎</m:t>
+                          </m:r>
+                        </m:e>
+                        <m:sub>
+                          <m:r>
+                            <a:rPr lang="en-US" sz="1800" i="1">
+                              <a:effectLst/>
+                              <a:latin typeface="Cambria Math" panose="02040503050406030204" pitchFamily="18" charset="0"/>
+                              <a:ea typeface="Times New Roman" panose="02020603050405020304" pitchFamily="18" charset="0"/>
+                              <a:cs typeface="Calibri" panose="020F0502020204030204" pitchFamily="34" charset="0"/>
+                            </a:rPr>
+                            <m:t>1</m:t>
+                          </m:r>
+                        </m:sub>
+                      </m:sSub>
+                      <m:r>
+                        <a:rPr lang="en-US" sz="1800" i="1">
+                          <a:effectLst/>
+                          <a:latin typeface="Cambria Math" panose="02040503050406030204" pitchFamily="18" charset="0"/>
+                          <a:ea typeface="Times New Roman" panose="02020603050405020304" pitchFamily="18" charset="0"/>
+                          <a:cs typeface="Calibri" panose="020F0502020204030204" pitchFamily="34" charset="0"/>
+                        </a:rPr>
+                        <m:t>=</m:t>
+                      </m:r>
+                      <m:f>
+                        <m:fPr>
+                          <m:ctrlPr>
+                            <a:rPr lang="ru-RU" sz="1800" i="1">
+                              <a:effectLst/>
+                              <a:latin typeface="Cambria Math" panose="02040503050406030204" pitchFamily="18" charset="0"/>
+                              <a:ea typeface="Times New Roman" panose="02020603050405020304" pitchFamily="18" charset="0"/>
+                              <a:cs typeface="Calibri" panose="020F0502020204030204" pitchFamily="34" charset="0"/>
+                            </a:rPr>
+                          </m:ctrlPr>
+                        </m:fPr>
+                        <m:num>
+                          <m:sSub>
+                            <m:sSubPr>
+                              <m:ctrlPr>
+                                <a:rPr lang="ru-RU" sz="1800" i="1">
+                                  <a:effectLst/>
+                                  <a:latin typeface="Cambria Math" panose="02040503050406030204" pitchFamily="18" charset="0"/>
+                                  <a:ea typeface="Times New Roman" panose="02020603050405020304" pitchFamily="18" charset="0"/>
+                                  <a:cs typeface="Calibri" panose="020F0502020204030204" pitchFamily="34" charset="0"/>
+                                </a:rPr>
+                              </m:ctrlPr>
+                            </m:sSubPr>
+                            <m:e>
+                              <m:r>
+                                <a:rPr lang="en-US" sz="1800" i="1">
+                                  <a:effectLst/>
+                                  <a:latin typeface="Cambria Math" panose="02040503050406030204" pitchFamily="18" charset="0"/>
+                                  <a:ea typeface="Times New Roman" panose="02020603050405020304" pitchFamily="18" charset="0"/>
+                                  <a:cs typeface="Calibri" panose="020F0502020204030204" pitchFamily="34" charset="0"/>
+                                </a:rPr>
+                                <m:t>𝐹</m:t>
+                              </m:r>
+                            </m:e>
+                            <m:sub>
+                              <m:r>
+                                <m:rPr>
+                                  <m:nor/>
+                                </m:rPr>
+                                <a:rPr lang="en-US" sz="1800">
+                                  <a:effectLst/>
+                                  <a:latin typeface="Cambria Math" panose="02040503050406030204" pitchFamily="18" charset="0"/>
+                                  <a:ea typeface="Times New Roman" panose="02020603050405020304" pitchFamily="18" charset="0"/>
+                                  <a:cs typeface="Calibri" panose="020F0502020204030204" pitchFamily="34" charset="0"/>
+                                </a:rPr>
+                                <m:t>thrust</m:t>
+                              </m:r>
+                            </m:sub>
+                          </m:sSub>
+                          <m:r>
+                            <a:rPr lang="en-US" sz="1800" i="1">
+                              <a:effectLst/>
+                              <a:latin typeface="Cambria Math" panose="02040503050406030204" pitchFamily="18" charset="0"/>
+                              <a:ea typeface="Times New Roman" panose="02020603050405020304" pitchFamily="18" charset="0"/>
+                              <a:cs typeface="Calibri" panose="020F0502020204030204" pitchFamily="34" charset="0"/>
+                            </a:rPr>
+                            <m:t>−</m:t>
+                          </m:r>
+                          <m:sSub>
+                            <m:sSubPr>
+                              <m:ctrlPr>
+                                <a:rPr lang="ru-RU" sz="1800" i="1">
+                                  <a:effectLst/>
+                                  <a:latin typeface="Cambria Math" panose="02040503050406030204" pitchFamily="18" charset="0"/>
+                                  <a:ea typeface="Times New Roman" panose="02020603050405020304" pitchFamily="18" charset="0"/>
+                                  <a:cs typeface="Calibri" panose="020F0502020204030204" pitchFamily="34" charset="0"/>
+                                </a:rPr>
+                              </m:ctrlPr>
+                            </m:sSubPr>
+                            <m:e>
+                              <m:r>
+                                <a:rPr lang="en-US" sz="1800" i="1">
+                                  <a:effectLst/>
+                                  <a:latin typeface="Cambria Math" panose="02040503050406030204" pitchFamily="18" charset="0"/>
+                                  <a:ea typeface="Times New Roman" panose="02020603050405020304" pitchFamily="18" charset="0"/>
+                                  <a:cs typeface="Calibri" panose="020F0502020204030204" pitchFamily="34" charset="0"/>
+                                </a:rPr>
+                                <m:t>𝐹</m:t>
+                              </m:r>
+                            </m:e>
+                            <m:sub>
+                              <m:r>
+                                <a:rPr lang="en-US" sz="1800" i="1">
+                                  <a:effectLst/>
+                                  <a:latin typeface="Cambria Math" panose="02040503050406030204" pitchFamily="18" charset="0"/>
+                                  <a:ea typeface="Times New Roman" panose="02020603050405020304" pitchFamily="18" charset="0"/>
+                                  <a:cs typeface="Calibri" panose="020F0502020204030204" pitchFamily="34" charset="0"/>
+                                </a:rPr>
+                                <m:t>𝑑</m:t>
+                              </m:r>
+                            </m:sub>
+                          </m:sSub>
+                          <m:r>
+                            <a:rPr lang="en-US" sz="1800" i="1">
+                              <a:effectLst/>
+                              <a:latin typeface="Cambria Math" panose="02040503050406030204" pitchFamily="18" charset="0"/>
+                              <a:ea typeface="Times New Roman" panose="02020603050405020304" pitchFamily="18" charset="0"/>
+                              <a:cs typeface="Calibri" panose="020F0502020204030204" pitchFamily="34" charset="0"/>
+                            </a:rPr>
+                            <m:t>−</m:t>
+                          </m:r>
+                          <m:r>
+                            <a:rPr lang="en-US" sz="1800" i="1">
+                              <a:effectLst/>
+                              <a:latin typeface="Cambria Math" panose="02040503050406030204" pitchFamily="18" charset="0"/>
+                              <a:ea typeface="Times New Roman" panose="02020603050405020304" pitchFamily="18" charset="0"/>
+                              <a:cs typeface="Calibri" panose="020F0502020204030204" pitchFamily="34" charset="0"/>
+                            </a:rPr>
+                            <m:t>𝑚𝑔</m:t>
+                          </m:r>
+                        </m:num>
+                        <m:den>
+                          <m:r>
+                            <a:rPr lang="en-US" sz="1800" i="1">
+                              <a:effectLst/>
+                              <a:latin typeface="Cambria Math" panose="02040503050406030204" pitchFamily="18" charset="0"/>
+                              <a:ea typeface="Times New Roman" panose="02020603050405020304" pitchFamily="18" charset="0"/>
+                              <a:cs typeface="Calibri" panose="020F0502020204030204" pitchFamily="34" charset="0"/>
+                            </a:rPr>
+                            <m:t>𝑚</m:t>
+                          </m:r>
+                        </m:den>
+                      </m:f>
+                      <m:r>
+                        <a:rPr lang="en-US" sz="1800" i="1">
+                          <a:effectLst/>
+                          <a:latin typeface="Cambria Math" panose="02040503050406030204" pitchFamily="18" charset="0"/>
+                          <a:ea typeface="Times New Roman" panose="02020603050405020304" pitchFamily="18" charset="0"/>
+                          <a:cs typeface="Calibri" panose="020F0502020204030204" pitchFamily="34" charset="0"/>
+                        </a:rPr>
+                        <m:t>,</m:t>
+                      </m:r>
+                      <m:r>
+                        <a:rPr lang="en-US" sz="1800">
+                          <a:effectLst/>
+                          <a:latin typeface="Cambria Math" panose="02040503050406030204" pitchFamily="18" charset="0"/>
+                          <a:ea typeface="Times New Roman" panose="02020603050405020304" pitchFamily="18" charset="0"/>
+                          <a:cs typeface="Calibri" panose="020F0502020204030204" pitchFamily="34" charset="0"/>
+                        </a:rPr>
+                        <m:t> </m:t>
+                      </m:r>
+                      <m:sSubSup>
+                        <m:sSubSupPr>
+                          <m:ctrlPr>
+                            <a:rPr lang="ru-RU" sz="1800" i="1">
+                              <a:effectLst/>
+                              <a:latin typeface="Cambria Math" panose="02040503050406030204" pitchFamily="18" charset="0"/>
+                              <a:ea typeface="Times New Roman" panose="02020603050405020304" pitchFamily="18" charset="0"/>
+                              <a:cs typeface="Calibri" panose="020F0502020204030204" pitchFamily="34" charset="0"/>
+                            </a:rPr>
+                          </m:ctrlPr>
+                        </m:sSubSupPr>
+                        <m:e>
+                          <m:r>
+                            <a:rPr lang="en-US" sz="1800" i="1">
+                              <a:effectLst/>
+                              <a:latin typeface="Cambria Math" panose="02040503050406030204" pitchFamily="18" charset="0"/>
+                              <a:ea typeface="Times New Roman" panose="02020603050405020304" pitchFamily="18" charset="0"/>
+                              <a:cs typeface="Calibri" panose="020F0502020204030204" pitchFamily="34" charset="0"/>
+                            </a:rPr>
+                            <m:t>𝑘</m:t>
+                          </m:r>
+                        </m:e>
+                        <m:sub>
+                          <m:r>
+                            <a:rPr lang="en-US" sz="1800" i="1">
+                              <a:effectLst/>
+                              <a:latin typeface="Cambria Math" panose="02040503050406030204" pitchFamily="18" charset="0"/>
+                              <a:ea typeface="Times New Roman" panose="02020603050405020304" pitchFamily="18" charset="0"/>
+                              <a:cs typeface="Calibri" panose="020F0502020204030204" pitchFamily="34" charset="0"/>
+                            </a:rPr>
+                            <m:t>1</m:t>
+                          </m:r>
+                        </m:sub>
+                        <m:sup>
+                          <m:r>
+                            <a:rPr lang="en-US" sz="1800" i="1">
+                              <a:effectLst/>
+                              <a:latin typeface="Cambria Math" panose="02040503050406030204" pitchFamily="18" charset="0"/>
+                              <a:ea typeface="Times New Roman" panose="02020603050405020304" pitchFamily="18" charset="0"/>
+                              <a:cs typeface="Calibri" panose="020F0502020204030204" pitchFamily="34" charset="0"/>
+                            </a:rPr>
+                            <m:t>𝑣</m:t>
+                          </m:r>
+                        </m:sup>
+                      </m:sSubSup>
+                      <m:r>
+                        <a:rPr lang="en-US" sz="1800" i="1">
+                          <a:effectLst/>
+                          <a:latin typeface="Cambria Math" panose="02040503050406030204" pitchFamily="18" charset="0"/>
+                          <a:ea typeface="Times New Roman" panose="02020603050405020304" pitchFamily="18" charset="0"/>
+                          <a:cs typeface="Calibri" panose="020F0502020204030204" pitchFamily="34" charset="0"/>
+                        </a:rPr>
+                        <m:t>=</m:t>
+                      </m:r>
+                      <m:sSub>
+                        <m:sSubPr>
+                          <m:ctrlPr>
+                            <a:rPr lang="ru-RU" sz="1800" i="1">
+                              <a:effectLst/>
+                              <a:latin typeface="Cambria Math" panose="02040503050406030204" pitchFamily="18" charset="0"/>
+                              <a:ea typeface="Times New Roman" panose="02020603050405020304" pitchFamily="18" charset="0"/>
+                              <a:cs typeface="Calibri" panose="020F0502020204030204" pitchFamily="34" charset="0"/>
+                            </a:rPr>
+                          </m:ctrlPr>
+                        </m:sSubPr>
+                        <m:e>
+                          <m:r>
+                            <a:rPr lang="en-US" sz="1800" i="1">
+                              <a:effectLst/>
+                              <a:latin typeface="Cambria Math" panose="02040503050406030204" pitchFamily="18" charset="0"/>
+                              <a:ea typeface="Times New Roman" panose="02020603050405020304" pitchFamily="18" charset="0"/>
+                              <a:cs typeface="Calibri" panose="020F0502020204030204" pitchFamily="34" charset="0"/>
+                            </a:rPr>
+                            <m:t>𝑎</m:t>
+                          </m:r>
+                        </m:e>
+                        <m:sub>
+                          <m:r>
+                            <a:rPr lang="en-US" sz="1800" i="1">
+                              <a:effectLst/>
+                              <a:latin typeface="Cambria Math" panose="02040503050406030204" pitchFamily="18" charset="0"/>
+                              <a:ea typeface="Times New Roman" panose="02020603050405020304" pitchFamily="18" charset="0"/>
+                              <a:cs typeface="Calibri" panose="020F0502020204030204" pitchFamily="34" charset="0"/>
+                            </a:rPr>
+                            <m:t>1</m:t>
+                          </m:r>
+                        </m:sub>
+                      </m:sSub>
+                      <m:r>
+                        <a:rPr lang="en-US" sz="1800" i="1">
+                          <a:effectLst/>
+                          <a:latin typeface="Cambria Math" panose="02040503050406030204" pitchFamily="18" charset="0"/>
+                          <a:ea typeface="Times New Roman" panose="02020603050405020304" pitchFamily="18" charset="0"/>
+                          <a:cs typeface="Calibri" panose="020F0502020204030204" pitchFamily="34" charset="0"/>
+                        </a:rPr>
+                        <m:t>;</m:t>
+                      </m:r>
+                    </m:oMath>
+                  </m:oMathPara>
+                </a14:m>
+                <a:endParaRPr lang="ru-RU" sz="1800" dirty="0">
+                  <a:effectLst/>
+                  <a:latin typeface="Times New Roman" panose="02020603050405020304" pitchFamily="18" charset="0"/>
+                  <a:ea typeface="Times New Roman" panose="02020603050405020304" pitchFamily="18" charset="0"/>
+                </a:endParaRPr>
+              </a:p>
+              <a:p>
+                <a:pPr>
+                  <a:spcAft>
+                    <a:spcPts val="600"/>
+                  </a:spcAft>
+                </a:pPr>
+                <a14:m>
+                  <m:oMathPara xmlns:m="http://schemas.openxmlformats.org/officeDocument/2006/math">
+                    <m:oMathParaPr>
+                      <m:jc m:val="centerGroup"/>
+                    </m:oMathParaPr>
+                    <m:oMath xmlns:m="http://schemas.openxmlformats.org/officeDocument/2006/math">
+                      <m:sSubSup>
+                        <m:sSubSupPr>
+                          <m:ctrlPr>
+                            <a:rPr lang="ru-RU" sz="1800" i="1">
+                              <a:effectLst/>
+                              <a:latin typeface="Cambria Math" panose="02040503050406030204" pitchFamily="18" charset="0"/>
+                              <a:ea typeface="Times New Roman" panose="02020603050405020304" pitchFamily="18" charset="0"/>
+                              <a:cs typeface="Calibri" panose="020F0502020204030204" pitchFamily="34" charset="0"/>
+                            </a:rPr>
+                          </m:ctrlPr>
+                        </m:sSubSupPr>
+                        <m:e>
+                          <m:r>
+                            <a:rPr lang="en-US" sz="1800" i="1">
+                              <a:effectLst/>
+                              <a:latin typeface="Cambria Math" panose="02040503050406030204" pitchFamily="18" charset="0"/>
+                              <a:ea typeface="Times New Roman" panose="02020603050405020304" pitchFamily="18" charset="0"/>
+                              <a:cs typeface="Calibri" panose="020F0502020204030204" pitchFamily="34" charset="0"/>
+                            </a:rPr>
+                            <m:t>𝑘</m:t>
+                          </m:r>
+                        </m:e>
+                        <m:sub>
+                          <m:r>
+                            <a:rPr lang="en-US" sz="1800" i="1">
+                              <a:effectLst/>
+                              <a:latin typeface="Cambria Math" panose="02040503050406030204" pitchFamily="18" charset="0"/>
+                              <a:ea typeface="Times New Roman" panose="02020603050405020304" pitchFamily="18" charset="0"/>
+                              <a:cs typeface="Calibri" panose="020F0502020204030204" pitchFamily="34" charset="0"/>
+                            </a:rPr>
+                            <m:t>2</m:t>
+                          </m:r>
+                        </m:sub>
+                        <m:sup>
+                          <m:r>
+                            <a:rPr lang="en-US" sz="1800" i="1">
+                              <a:effectLst/>
+                              <a:latin typeface="Cambria Math" panose="02040503050406030204" pitchFamily="18" charset="0"/>
+                              <a:ea typeface="Times New Roman" panose="02020603050405020304" pitchFamily="18" charset="0"/>
+                              <a:cs typeface="Calibri" panose="020F0502020204030204" pitchFamily="34" charset="0"/>
+                            </a:rPr>
+                            <m:t>h</m:t>
+                          </m:r>
+                        </m:sup>
+                      </m:sSubSup>
+                      <m:r>
+                        <a:rPr lang="en-US" sz="1800" i="1">
+                          <a:effectLst/>
+                          <a:latin typeface="Cambria Math" panose="02040503050406030204" pitchFamily="18" charset="0"/>
+                          <a:ea typeface="Times New Roman" panose="02020603050405020304" pitchFamily="18" charset="0"/>
+                          <a:cs typeface="Calibri" panose="020F0502020204030204" pitchFamily="34" charset="0"/>
+                        </a:rPr>
+                        <m:t>=</m:t>
+                      </m:r>
+                      <m:r>
+                        <a:rPr lang="en-US" sz="1800" i="1">
+                          <a:effectLst/>
+                          <a:latin typeface="Cambria Math" panose="02040503050406030204" pitchFamily="18" charset="0"/>
+                          <a:ea typeface="Times New Roman" panose="02020603050405020304" pitchFamily="18" charset="0"/>
+                          <a:cs typeface="Calibri" panose="020F0502020204030204" pitchFamily="34" charset="0"/>
+                        </a:rPr>
+                        <m:t>𝑣</m:t>
+                      </m:r>
+                      <m:r>
+                        <a:rPr lang="en-US" sz="1800" i="1">
+                          <a:effectLst/>
+                          <a:latin typeface="Cambria Math" panose="02040503050406030204" pitchFamily="18" charset="0"/>
+                          <a:ea typeface="Times New Roman" panose="02020603050405020304" pitchFamily="18" charset="0"/>
+                          <a:cs typeface="Calibri" panose="020F0502020204030204" pitchFamily="34" charset="0"/>
+                        </a:rPr>
+                        <m:t>+</m:t>
+                      </m:r>
+                      <m:f>
+                        <m:fPr>
+                          <m:ctrlPr>
+                            <a:rPr lang="ru-RU" sz="1800" i="1">
+                              <a:effectLst/>
+                              <a:latin typeface="Cambria Math" panose="02040503050406030204" pitchFamily="18" charset="0"/>
+                              <a:ea typeface="Times New Roman" panose="02020603050405020304" pitchFamily="18" charset="0"/>
+                              <a:cs typeface="Calibri" panose="020F0502020204030204" pitchFamily="34" charset="0"/>
+                            </a:rPr>
+                          </m:ctrlPr>
+                        </m:fPr>
+                        <m:num>
+                          <m:r>
+                            <m:rPr>
+                              <m:sty m:val="p"/>
+                            </m:rPr>
+                            <a:rPr lang="en-US" sz="1800">
+                              <a:effectLst/>
+                              <a:latin typeface="Cambria Math" panose="02040503050406030204" pitchFamily="18" charset="0"/>
+                              <a:ea typeface="Times New Roman" panose="02020603050405020304" pitchFamily="18" charset="0"/>
+                              <a:cs typeface="Calibri" panose="020F0502020204030204" pitchFamily="34" charset="0"/>
+                            </a:rPr>
+                            <m:t>Δ</m:t>
+                          </m:r>
+                          <m:r>
+                            <a:rPr lang="en-US" sz="1800" i="1">
+                              <a:effectLst/>
+                              <a:latin typeface="Cambria Math" panose="02040503050406030204" pitchFamily="18" charset="0"/>
+                              <a:ea typeface="Times New Roman" panose="02020603050405020304" pitchFamily="18" charset="0"/>
+                              <a:cs typeface="Calibri" panose="020F0502020204030204" pitchFamily="34" charset="0"/>
+                            </a:rPr>
+                            <m:t>𝑡</m:t>
+                          </m:r>
+                        </m:num>
+                        <m:den>
+                          <m:r>
+                            <a:rPr lang="en-US" sz="1800" i="1">
+                              <a:effectLst/>
+                              <a:latin typeface="Cambria Math" panose="02040503050406030204" pitchFamily="18" charset="0"/>
+                              <a:ea typeface="Times New Roman" panose="02020603050405020304" pitchFamily="18" charset="0"/>
+                              <a:cs typeface="Calibri" panose="020F0502020204030204" pitchFamily="34" charset="0"/>
+                            </a:rPr>
+                            <m:t>2</m:t>
+                          </m:r>
+                        </m:den>
+                      </m:f>
+                      <m:sSubSup>
+                        <m:sSubSupPr>
+                          <m:ctrlPr>
+                            <a:rPr lang="ru-RU" sz="1800" i="1">
+                              <a:effectLst/>
+                              <a:latin typeface="Cambria Math" panose="02040503050406030204" pitchFamily="18" charset="0"/>
+                              <a:ea typeface="Times New Roman" panose="02020603050405020304" pitchFamily="18" charset="0"/>
+                              <a:cs typeface="Calibri" panose="020F0502020204030204" pitchFamily="34" charset="0"/>
+                            </a:rPr>
+                          </m:ctrlPr>
+                        </m:sSubSupPr>
+                        <m:e>
+                          <m:r>
+                            <a:rPr lang="en-US" sz="1800" i="1">
+                              <a:effectLst/>
+                              <a:latin typeface="Cambria Math" panose="02040503050406030204" pitchFamily="18" charset="0"/>
+                              <a:ea typeface="Times New Roman" panose="02020603050405020304" pitchFamily="18" charset="0"/>
+                              <a:cs typeface="Calibri" panose="020F0502020204030204" pitchFamily="34" charset="0"/>
+                            </a:rPr>
+                            <m:t>𝑘</m:t>
+                          </m:r>
+                        </m:e>
+                        <m:sub>
+                          <m:r>
+                            <a:rPr lang="en-US" sz="1800" i="1">
+                              <a:effectLst/>
+                              <a:latin typeface="Cambria Math" panose="02040503050406030204" pitchFamily="18" charset="0"/>
+                              <a:ea typeface="Times New Roman" panose="02020603050405020304" pitchFamily="18" charset="0"/>
+                              <a:cs typeface="Calibri" panose="020F0502020204030204" pitchFamily="34" charset="0"/>
+                            </a:rPr>
+                            <m:t>1</m:t>
+                          </m:r>
+                        </m:sub>
+                        <m:sup>
+                          <m:r>
+                            <a:rPr lang="en-US" sz="1800" i="1">
+                              <a:effectLst/>
+                              <a:latin typeface="Cambria Math" panose="02040503050406030204" pitchFamily="18" charset="0"/>
+                              <a:ea typeface="Times New Roman" panose="02020603050405020304" pitchFamily="18" charset="0"/>
+                              <a:cs typeface="Calibri" panose="020F0502020204030204" pitchFamily="34" charset="0"/>
+                            </a:rPr>
+                            <m:t>𝑣</m:t>
+                          </m:r>
+                        </m:sup>
+                      </m:sSubSup>
+                      <m:r>
+                        <a:rPr lang="en-US" sz="1800" i="1">
+                          <a:effectLst/>
+                          <a:latin typeface="Cambria Math" panose="02040503050406030204" pitchFamily="18" charset="0"/>
+                          <a:ea typeface="Times New Roman" panose="02020603050405020304" pitchFamily="18" charset="0"/>
+                          <a:cs typeface="Calibri" panose="020F0502020204030204" pitchFamily="34" charset="0"/>
+                        </a:rPr>
+                        <m:t>,</m:t>
+                      </m:r>
+                      <m:r>
+                        <a:rPr lang="en-US" sz="1800">
+                          <a:effectLst/>
+                          <a:latin typeface="Cambria Math" panose="02040503050406030204" pitchFamily="18" charset="0"/>
+                          <a:ea typeface="Times New Roman" panose="02020603050405020304" pitchFamily="18" charset="0"/>
+                          <a:cs typeface="Calibri" panose="020F0502020204030204" pitchFamily="34" charset="0"/>
+                        </a:rPr>
+                        <m:t> </m:t>
+                      </m:r>
+                      <m:sSubSup>
+                        <m:sSubSupPr>
+                          <m:ctrlPr>
+                            <a:rPr lang="ru-RU" sz="1800" i="1">
+                              <a:effectLst/>
+                              <a:latin typeface="Cambria Math" panose="02040503050406030204" pitchFamily="18" charset="0"/>
+                              <a:ea typeface="Times New Roman" panose="02020603050405020304" pitchFamily="18" charset="0"/>
+                              <a:cs typeface="Calibri" panose="020F0502020204030204" pitchFamily="34" charset="0"/>
+                            </a:rPr>
+                          </m:ctrlPr>
+                        </m:sSubSupPr>
+                        <m:e>
+                          <m:r>
+                            <a:rPr lang="en-US" sz="1800" i="1">
+                              <a:effectLst/>
+                              <a:latin typeface="Cambria Math" panose="02040503050406030204" pitchFamily="18" charset="0"/>
+                              <a:ea typeface="Times New Roman" panose="02020603050405020304" pitchFamily="18" charset="0"/>
+                              <a:cs typeface="Calibri" panose="020F0502020204030204" pitchFamily="34" charset="0"/>
+                            </a:rPr>
+                            <m:t>𝑘</m:t>
+                          </m:r>
+                        </m:e>
+                        <m:sub>
+                          <m:r>
+                            <a:rPr lang="en-US" sz="1800" i="1">
+                              <a:effectLst/>
+                              <a:latin typeface="Cambria Math" panose="02040503050406030204" pitchFamily="18" charset="0"/>
+                              <a:ea typeface="Times New Roman" panose="02020603050405020304" pitchFamily="18" charset="0"/>
+                              <a:cs typeface="Calibri" panose="020F0502020204030204" pitchFamily="34" charset="0"/>
+                            </a:rPr>
+                            <m:t>2</m:t>
+                          </m:r>
+                        </m:sub>
+                        <m:sup>
+                          <m:r>
+                            <a:rPr lang="en-US" sz="1800" i="1">
+                              <a:effectLst/>
+                              <a:latin typeface="Cambria Math" panose="02040503050406030204" pitchFamily="18" charset="0"/>
+                              <a:ea typeface="Times New Roman" panose="02020603050405020304" pitchFamily="18" charset="0"/>
+                              <a:cs typeface="Calibri" panose="020F0502020204030204" pitchFamily="34" charset="0"/>
+                            </a:rPr>
+                            <m:t>𝑣</m:t>
+                          </m:r>
+                        </m:sup>
+                      </m:sSubSup>
+                      <m:r>
+                        <a:rPr lang="en-US" sz="1800" i="1">
+                          <a:effectLst/>
+                          <a:latin typeface="Cambria Math" panose="02040503050406030204" pitchFamily="18" charset="0"/>
+                          <a:ea typeface="Times New Roman" panose="02020603050405020304" pitchFamily="18" charset="0"/>
+                          <a:cs typeface="Calibri" panose="020F0502020204030204" pitchFamily="34" charset="0"/>
+                        </a:rPr>
+                        <m:t>=</m:t>
+                      </m:r>
+                      <m:r>
+                        <a:rPr lang="en-US" sz="1800" i="1">
+                          <a:effectLst/>
+                          <a:latin typeface="Cambria Math" panose="02040503050406030204" pitchFamily="18" charset="0"/>
+                          <a:ea typeface="Times New Roman" panose="02020603050405020304" pitchFamily="18" charset="0"/>
+                          <a:cs typeface="Calibri" panose="020F0502020204030204" pitchFamily="34" charset="0"/>
+                        </a:rPr>
+                        <m:t>𝑎</m:t>
+                      </m:r>
+                      <m:d>
+                        <m:dPr>
+                          <m:ctrlPr>
+                            <a:rPr lang="ru-RU" sz="1800" i="1">
+                              <a:effectLst/>
+                              <a:latin typeface="Cambria Math" panose="02040503050406030204" pitchFamily="18" charset="0"/>
+                              <a:ea typeface="Times New Roman" panose="02020603050405020304" pitchFamily="18" charset="0"/>
+                              <a:cs typeface="Calibri" panose="020F0502020204030204" pitchFamily="34" charset="0"/>
+                            </a:rPr>
+                          </m:ctrlPr>
+                        </m:dPr>
+                        <m:e>
+                          <m:r>
+                            <a:rPr lang="en-US" sz="1800" i="1">
+                              <a:effectLst/>
+                              <a:latin typeface="Cambria Math" panose="02040503050406030204" pitchFamily="18" charset="0"/>
+                              <a:ea typeface="Times New Roman" panose="02020603050405020304" pitchFamily="18" charset="0"/>
+                              <a:cs typeface="Calibri" panose="020F0502020204030204" pitchFamily="34" charset="0"/>
+                            </a:rPr>
+                            <m:t>h</m:t>
+                          </m:r>
+                          <m:r>
+                            <a:rPr lang="en-US" sz="1800" i="1">
+                              <a:effectLst/>
+                              <a:latin typeface="Cambria Math" panose="02040503050406030204" pitchFamily="18" charset="0"/>
+                              <a:ea typeface="Times New Roman" panose="02020603050405020304" pitchFamily="18" charset="0"/>
+                              <a:cs typeface="Calibri" panose="020F0502020204030204" pitchFamily="34" charset="0"/>
+                            </a:rPr>
+                            <m:t>+</m:t>
+                          </m:r>
+                          <m:f>
+                            <m:fPr>
+                              <m:ctrlPr>
+                                <a:rPr lang="ru-RU" sz="1800" i="1">
+                                  <a:effectLst/>
+                                  <a:latin typeface="Cambria Math" panose="02040503050406030204" pitchFamily="18" charset="0"/>
+                                  <a:ea typeface="Times New Roman" panose="02020603050405020304" pitchFamily="18" charset="0"/>
+                                  <a:cs typeface="Calibri" panose="020F0502020204030204" pitchFamily="34" charset="0"/>
+                                </a:rPr>
+                              </m:ctrlPr>
+                            </m:fPr>
+                            <m:num>
+                              <m:r>
+                                <m:rPr>
+                                  <m:sty m:val="p"/>
+                                </m:rPr>
+                                <a:rPr lang="en-US" sz="1800">
+                                  <a:effectLst/>
+                                  <a:latin typeface="Cambria Math" panose="02040503050406030204" pitchFamily="18" charset="0"/>
+                                  <a:ea typeface="Times New Roman" panose="02020603050405020304" pitchFamily="18" charset="0"/>
+                                  <a:cs typeface="Calibri" panose="020F0502020204030204" pitchFamily="34" charset="0"/>
+                                </a:rPr>
+                                <m:t>Δ</m:t>
+                              </m:r>
+                              <m:r>
+                                <a:rPr lang="en-US" sz="1800" i="1">
+                                  <a:effectLst/>
+                                  <a:latin typeface="Cambria Math" panose="02040503050406030204" pitchFamily="18" charset="0"/>
+                                  <a:ea typeface="Times New Roman" panose="02020603050405020304" pitchFamily="18" charset="0"/>
+                                  <a:cs typeface="Calibri" panose="020F0502020204030204" pitchFamily="34" charset="0"/>
+                                </a:rPr>
+                                <m:t>𝑡</m:t>
+                              </m:r>
+                            </m:num>
+                            <m:den>
+                              <m:r>
+                                <a:rPr lang="en-US" sz="1800" i="1">
+                                  <a:effectLst/>
+                                  <a:latin typeface="Cambria Math" panose="02040503050406030204" pitchFamily="18" charset="0"/>
+                                  <a:ea typeface="Times New Roman" panose="02020603050405020304" pitchFamily="18" charset="0"/>
+                                  <a:cs typeface="Calibri" panose="020F0502020204030204" pitchFamily="34" charset="0"/>
+                                </a:rPr>
+                                <m:t>2</m:t>
+                              </m:r>
+                            </m:den>
+                          </m:f>
+                          <m:sSubSup>
+                            <m:sSubSupPr>
+                              <m:ctrlPr>
+                                <a:rPr lang="ru-RU" sz="1800" i="1">
+                                  <a:effectLst/>
+                                  <a:latin typeface="Cambria Math" panose="02040503050406030204" pitchFamily="18" charset="0"/>
+                                  <a:ea typeface="Times New Roman" panose="02020603050405020304" pitchFamily="18" charset="0"/>
+                                  <a:cs typeface="Calibri" panose="020F0502020204030204" pitchFamily="34" charset="0"/>
+                                </a:rPr>
+                              </m:ctrlPr>
+                            </m:sSubSupPr>
+                            <m:e>
+                              <m:r>
+                                <a:rPr lang="en-US" sz="1800" i="1">
+                                  <a:effectLst/>
+                                  <a:latin typeface="Cambria Math" panose="02040503050406030204" pitchFamily="18" charset="0"/>
+                                  <a:ea typeface="Times New Roman" panose="02020603050405020304" pitchFamily="18" charset="0"/>
+                                  <a:cs typeface="Calibri" panose="020F0502020204030204" pitchFamily="34" charset="0"/>
+                                </a:rPr>
+                                <m:t>𝑘</m:t>
+                              </m:r>
+                            </m:e>
+                            <m:sub>
+                              <m:r>
+                                <a:rPr lang="en-US" sz="1800" i="1">
+                                  <a:effectLst/>
+                                  <a:latin typeface="Cambria Math" panose="02040503050406030204" pitchFamily="18" charset="0"/>
+                                  <a:ea typeface="Times New Roman" panose="02020603050405020304" pitchFamily="18" charset="0"/>
+                                  <a:cs typeface="Calibri" panose="020F0502020204030204" pitchFamily="34" charset="0"/>
+                                </a:rPr>
+                                <m:t>1</m:t>
+                              </m:r>
+                            </m:sub>
+                            <m:sup>
+                              <m:r>
+                                <a:rPr lang="en-US" sz="1800" i="1">
+                                  <a:effectLst/>
+                                  <a:latin typeface="Cambria Math" panose="02040503050406030204" pitchFamily="18" charset="0"/>
+                                  <a:ea typeface="Times New Roman" panose="02020603050405020304" pitchFamily="18" charset="0"/>
+                                  <a:cs typeface="Calibri" panose="020F0502020204030204" pitchFamily="34" charset="0"/>
+                                </a:rPr>
+                                <m:t>h</m:t>
+                              </m:r>
+                            </m:sup>
+                          </m:sSubSup>
+                          <m:r>
+                            <a:rPr lang="en-US" sz="1800" i="1">
+                              <a:effectLst/>
+                              <a:latin typeface="Cambria Math" panose="02040503050406030204" pitchFamily="18" charset="0"/>
+                              <a:ea typeface="Times New Roman" panose="02020603050405020304" pitchFamily="18" charset="0"/>
+                              <a:cs typeface="Calibri" panose="020F0502020204030204" pitchFamily="34" charset="0"/>
+                            </a:rPr>
+                            <m:t>, </m:t>
+                          </m:r>
+                          <m:r>
+                            <a:rPr lang="en-US" sz="1800" i="1">
+                              <a:effectLst/>
+                              <a:latin typeface="Cambria Math" panose="02040503050406030204" pitchFamily="18" charset="0"/>
+                              <a:ea typeface="Times New Roman" panose="02020603050405020304" pitchFamily="18" charset="0"/>
+                              <a:cs typeface="Calibri" panose="020F0502020204030204" pitchFamily="34" charset="0"/>
+                            </a:rPr>
+                            <m:t>𝑣</m:t>
+                          </m:r>
+                          <m:r>
+                            <a:rPr lang="en-US" sz="1800" i="1">
+                              <a:effectLst/>
+                              <a:latin typeface="Cambria Math" panose="02040503050406030204" pitchFamily="18" charset="0"/>
+                              <a:ea typeface="Times New Roman" panose="02020603050405020304" pitchFamily="18" charset="0"/>
+                              <a:cs typeface="Calibri" panose="020F0502020204030204" pitchFamily="34" charset="0"/>
+                            </a:rPr>
+                            <m:t>+</m:t>
+                          </m:r>
+                          <m:f>
+                            <m:fPr>
+                              <m:ctrlPr>
+                                <a:rPr lang="ru-RU" sz="1800" i="1">
+                                  <a:effectLst/>
+                                  <a:latin typeface="Cambria Math" panose="02040503050406030204" pitchFamily="18" charset="0"/>
+                                  <a:ea typeface="Times New Roman" panose="02020603050405020304" pitchFamily="18" charset="0"/>
+                                  <a:cs typeface="Calibri" panose="020F0502020204030204" pitchFamily="34" charset="0"/>
+                                </a:rPr>
+                              </m:ctrlPr>
+                            </m:fPr>
+                            <m:num>
+                              <m:r>
+                                <m:rPr>
+                                  <m:sty m:val="p"/>
+                                </m:rPr>
+                                <a:rPr lang="en-US" sz="1800">
+                                  <a:effectLst/>
+                                  <a:latin typeface="Cambria Math" panose="02040503050406030204" pitchFamily="18" charset="0"/>
+                                  <a:ea typeface="Times New Roman" panose="02020603050405020304" pitchFamily="18" charset="0"/>
+                                  <a:cs typeface="Calibri" panose="020F0502020204030204" pitchFamily="34" charset="0"/>
+                                </a:rPr>
+                                <m:t>Δ</m:t>
+                              </m:r>
+                              <m:r>
+                                <a:rPr lang="en-US" sz="1800" i="1">
+                                  <a:effectLst/>
+                                  <a:latin typeface="Cambria Math" panose="02040503050406030204" pitchFamily="18" charset="0"/>
+                                  <a:ea typeface="Times New Roman" panose="02020603050405020304" pitchFamily="18" charset="0"/>
+                                  <a:cs typeface="Calibri" panose="020F0502020204030204" pitchFamily="34" charset="0"/>
+                                </a:rPr>
+                                <m:t>𝑡</m:t>
+                              </m:r>
+                            </m:num>
+                            <m:den>
+                              <m:r>
+                                <a:rPr lang="en-US" sz="1800" i="1">
+                                  <a:effectLst/>
+                                  <a:latin typeface="Cambria Math" panose="02040503050406030204" pitchFamily="18" charset="0"/>
+                                  <a:ea typeface="Times New Roman" panose="02020603050405020304" pitchFamily="18" charset="0"/>
+                                  <a:cs typeface="Calibri" panose="020F0502020204030204" pitchFamily="34" charset="0"/>
+                                </a:rPr>
+                                <m:t>2</m:t>
+                              </m:r>
+                            </m:den>
+                          </m:f>
+                          <m:sSubSup>
+                            <m:sSubSupPr>
+                              <m:ctrlPr>
+                                <a:rPr lang="ru-RU" sz="1800" i="1">
+                                  <a:effectLst/>
+                                  <a:latin typeface="Cambria Math" panose="02040503050406030204" pitchFamily="18" charset="0"/>
+                                  <a:ea typeface="Times New Roman" panose="02020603050405020304" pitchFamily="18" charset="0"/>
+                                  <a:cs typeface="Calibri" panose="020F0502020204030204" pitchFamily="34" charset="0"/>
+                                </a:rPr>
+                              </m:ctrlPr>
+                            </m:sSubSupPr>
+                            <m:e>
+                              <m:r>
+                                <a:rPr lang="en-US" sz="1800" i="1">
+                                  <a:effectLst/>
+                                  <a:latin typeface="Cambria Math" panose="02040503050406030204" pitchFamily="18" charset="0"/>
+                                  <a:ea typeface="Times New Roman" panose="02020603050405020304" pitchFamily="18" charset="0"/>
+                                  <a:cs typeface="Calibri" panose="020F0502020204030204" pitchFamily="34" charset="0"/>
+                                </a:rPr>
+                                <m:t>𝑘</m:t>
+                              </m:r>
+                            </m:e>
+                            <m:sub>
+                              <m:r>
+                                <a:rPr lang="en-US" sz="1800" i="1">
+                                  <a:effectLst/>
+                                  <a:latin typeface="Cambria Math" panose="02040503050406030204" pitchFamily="18" charset="0"/>
+                                  <a:ea typeface="Times New Roman" panose="02020603050405020304" pitchFamily="18" charset="0"/>
+                                  <a:cs typeface="Calibri" panose="020F0502020204030204" pitchFamily="34" charset="0"/>
+                                </a:rPr>
+                                <m:t>1</m:t>
+                              </m:r>
+                            </m:sub>
+                            <m:sup>
+                              <m:r>
+                                <a:rPr lang="en-US" sz="1800" i="1">
+                                  <a:effectLst/>
+                                  <a:latin typeface="Cambria Math" panose="02040503050406030204" pitchFamily="18" charset="0"/>
+                                  <a:ea typeface="Times New Roman" panose="02020603050405020304" pitchFamily="18" charset="0"/>
+                                  <a:cs typeface="Calibri" panose="020F0502020204030204" pitchFamily="34" charset="0"/>
+                                </a:rPr>
+                                <m:t>𝑣</m:t>
+                              </m:r>
+                            </m:sup>
+                          </m:sSubSup>
+                        </m:e>
+                      </m:d>
+                      <m:r>
+                        <a:rPr lang="en-US" sz="1800" i="1">
+                          <a:effectLst/>
+                          <a:latin typeface="Cambria Math" panose="02040503050406030204" pitchFamily="18" charset="0"/>
+                          <a:ea typeface="Times New Roman" panose="02020603050405020304" pitchFamily="18" charset="0"/>
+                          <a:cs typeface="Calibri" panose="020F0502020204030204" pitchFamily="34" charset="0"/>
+                        </a:rPr>
+                        <m:t>;</m:t>
+                      </m:r>
+                    </m:oMath>
+                  </m:oMathPara>
+                </a14:m>
+                <a:endParaRPr lang="ru-RU" sz="1800" dirty="0">
+                  <a:effectLst/>
+                  <a:latin typeface="Times New Roman" panose="02020603050405020304" pitchFamily="18" charset="0"/>
+                  <a:ea typeface="Times New Roman" panose="02020603050405020304" pitchFamily="18" charset="0"/>
+                </a:endParaRPr>
+              </a:p>
+              <a:p>
+                <a:pPr>
+                  <a:spcAft>
+                    <a:spcPts val="600"/>
+                  </a:spcAft>
+                </a:pPr>
+                <a14:m>
+                  <m:oMathPara xmlns:m="http://schemas.openxmlformats.org/officeDocument/2006/math">
+                    <m:oMathParaPr>
+                      <m:jc m:val="centerGroup"/>
+                    </m:oMathParaPr>
+                    <m:oMath xmlns:m="http://schemas.openxmlformats.org/officeDocument/2006/math">
+                      <m:sSubSup>
+                        <m:sSubSupPr>
+                          <m:ctrlPr>
+                            <a:rPr lang="ru-RU" sz="1800" i="1">
+                              <a:effectLst/>
+                              <a:latin typeface="Cambria Math" panose="02040503050406030204" pitchFamily="18" charset="0"/>
+                              <a:ea typeface="Times New Roman" panose="02020603050405020304" pitchFamily="18" charset="0"/>
+                              <a:cs typeface="Calibri" panose="020F0502020204030204" pitchFamily="34" charset="0"/>
+                            </a:rPr>
+                          </m:ctrlPr>
+                        </m:sSubSupPr>
+                        <m:e>
+                          <m:r>
+                            <a:rPr lang="en-US" sz="1800" i="1">
+                              <a:effectLst/>
+                              <a:latin typeface="Cambria Math" panose="02040503050406030204" pitchFamily="18" charset="0"/>
+                              <a:ea typeface="Times New Roman" panose="02020603050405020304" pitchFamily="18" charset="0"/>
+                              <a:cs typeface="Calibri" panose="020F0502020204030204" pitchFamily="34" charset="0"/>
+                            </a:rPr>
+                            <m:t>𝑘</m:t>
+                          </m:r>
+                        </m:e>
+                        <m:sub>
+                          <m:r>
+                            <a:rPr lang="en-US" sz="1800" i="1">
+                              <a:effectLst/>
+                              <a:latin typeface="Cambria Math" panose="02040503050406030204" pitchFamily="18" charset="0"/>
+                              <a:ea typeface="Times New Roman" panose="02020603050405020304" pitchFamily="18" charset="0"/>
+                              <a:cs typeface="Calibri" panose="020F0502020204030204" pitchFamily="34" charset="0"/>
+                            </a:rPr>
+                            <m:t>3</m:t>
+                          </m:r>
+                        </m:sub>
+                        <m:sup>
+                          <m:r>
+                            <a:rPr lang="en-US" sz="1800" i="1">
+                              <a:effectLst/>
+                              <a:latin typeface="Cambria Math" panose="02040503050406030204" pitchFamily="18" charset="0"/>
+                              <a:ea typeface="Times New Roman" panose="02020603050405020304" pitchFamily="18" charset="0"/>
+                              <a:cs typeface="Calibri" panose="020F0502020204030204" pitchFamily="34" charset="0"/>
+                            </a:rPr>
+                            <m:t>h</m:t>
+                          </m:r>
+                        </m:sup>
+                      </m:sSubSup>
+                      <m:r>
+                        <a:rPr lang="en-US" sz="1800" i="1">
+                          <a:effectLst/>
+                          <a:latin typeface="Cambria Math" panose="02040503050406030204" pitchFamily="18" charset="0"/>
+                          <a:ea typeface="Times New Roman" panose="02020603050405020304" pitchFamily="18" charset="0"/>
+                          <a:cs typeface="Calibri" panose="020F0502020204030204" pitchFamily="34" charset="0"/>
+                        </a:rPr>
+                        <m:t>=</m:t>
+                      </m:r>
+                      <m:r>
+                        <a:rPr lang="en-US" sz="1800" i="1">
+                          <a:effectLst/>
+                          <a:latin typeface="Cambria Math" panose="02040503050406030204" pitchFamily="18" charset="0"/>
+                          <a:ea typeface="Times New Roman" panose="02020603050405020304" pitchFamily="18" charset="0"/>
+                          <a:cs typeface="Calibri" panose="020F0502020204030204" pitchFamily="34" charset="0"/>
+                        </a:rPr>
+                        <m:t>𝑣</m:t>
+                      </m:r>
+                      <m:r>
+                        <a:rPr lang="en-US" sz="1800" i="1">
+                          <a:effectLst/>
+                          <a:latin typeface="Cambria Math" panose="02040503050406030204" pitchFamily="18" charset="0"/>
+                          <a:ea typeface="Times New Roman" panose="02020603050405020304" pitchFamily="18" charset="0"/>
+                          <a:cs typeface="Calibri" panose="020F0502020204030204" pitchFamily="34" charset="0"/>
+                        </a:rPr>
+                        <m:t>+</m:t>
+                      </m:r>
+                      <m:f>
+                        <m:fPr>
+                          <m:ctrlPr>
+                            <a:rPr lang="ru-RU" sz="1800" i="1">
+                              <a:effectLst/>
+                              <a:latin typeface="Cambria Math" panose="02040503050406030204" pitchFamily="18" charset="0"/>
+                              <a:ea typeface="Times New Roman" panose="02020603050405020304" pitchFamily="18" charset="0"/>
+                              <a:cs typeface="Calibri" panose="020F0502020204030204" pitchFamily="34" charset="0"/>
+                            </a:rPr>
+                          </m:ctrlPr>
+                        </m:fPr>
+                        <m:num>
+                          <m:r>
+                            <m:rPr>
+                              <m:sty m:val="p"/>
+                            </m:rPr>
+                            <a:rPr lang="en-US" sz="1800">
+                              <a:effectLst/>
+                              <a:latin typeface="Cambria Math" panose="02040503050406030204" pitchFamily="18" charset="0"/>
+                              <a:ea typeface="Times New Roman" panose="02020603050405020304" pitchFamily="18" charset="0"/>
+                              <a:cs typeface="Calibri" panose="020F0502020204030204" pitchFamily="34" charset="0"/>
+                            </a:rPr>
+                            <m:t>Δ</m:t>
+                          </m:r>
+                          <m:r>
+                            <a:rPr lang="en-US" sz="1800" i="1">
+                              <a:effectLst/>
+                              <a:latin typeface="Cambria Math" panose="02040503050406030204" pitchFamily="18" charset="0"/>
+                              <a:ea typeface="Times New Roman" panose="02020603050405020304" pitchFamily="18" charset="0"/>
+                              <a:cs typeface="Calibri" panose="020F0502020204030204" pitchFamily="34" charset="0"/>
+                            </a:rPr>
+                            <m:t>𝑡</m:t>
+                          </m:r>
+                        </m:num>
+                        <m:den>
+                          <m:r>
+                            <a:rPr lang="en-US" sz="1800" i="1">
+                              <a:effectLst/>
+                              <a:latin typeface="Cambria Math" panose="02040503050406030204" pitchFamily="18" charset="0"/>
+                              <a:ea typeface="Times New Roman" panose="02020603050405020304" pitchFamily="18" charset="0"/>
+                              <a:cs typeface="Calibri" panose="020F0502020204030204" pitchFamily="34" charset="0"/>
+                            </a:rPr>
+                            <m:t>2</m:t>
+                          </m:r>
+                        </m:den>
+                      </m:f>
+                      <m:sSubSup>
+                        <m:sSubSupPr>
+                          <m:ctrlPr>
+                            <a:rPr lang="ru-RU" sz="1800" i="1">
+                              <a:effectLst/>
+                              <a:latin typeface="Cambria Math" panose="02040503050406030204" pitchFamily="18" charset="0"/>
+                              <a:ea typeface="Times New Roman" panose="02020603050405020304" pitchFamily="18" charset="0"/>
+                              <a:cs typeface="Calibri" panose="020F0502020204030204" pitchFamily="34" charset="0"/>
+                            </a:rPr>
+                          </m:ctrlPr>
+                        </m:sSubSupPr>
+                        <m:e>
+                          <m:r>
+                            <a:rPr lang="en-US" sz="1800" i="1">
+                              <a:effectLst/>
+                              <a:latin typeface="Cambria Math" panose="02040503050406030204" pitchFamily="18" charset="0"/>
+                              <a:ea typeface="Times New Roman" panose="02020603050405020304" pitchFamily="18" charset="0"/>
+                              <a:cs typeface="Calibri" panose="020F0502020204030204" pitchFamily="34" charset="0"/>
+                            </a:rPr>
+                            <m:t>𝑘</m:t>
+                          </m:r>
+                        </m:e>
+                        <m:sub>
+                          <m:r>
+                            <a:rPr lang="en-US" sz="1800" i="1">
+                              <a:effectLst/>
+                              <a:latin typeface="Cambria Math" panose="02040503050406030204" pitchFamily="18" charset="0"/>
+                              <a:ea typeface="Times New Roman" panose="02020603050405020304" pitchFamily="18" charset="0"/>
+                              <a:cs typeface="Calibri" panose="020F0502020204030204" pitchFamily="34" charset="0"/>
+                            </a:rPr>
+                            <m:t>2</m:t>
+                          </m:r>
+                        </m:sub>
+                        <m:sup>
+                          <m:r>
+                            <a:rPr lang="en-US" sz="1800" i="1">
+                              <a:effectLst/>
+                              <a:latin typeface="Cambria Math" panose="02040503050406030204" pitchFamily="18" charset="0"/>
+                              <a:ea typeface="Times New Roman" panose="02020603050405020304" pitchFamily="18" charset="0"/>
+                              <a:cs typeface="Calibri" panose="020F0502020204030204" pitchFamily="34" charset="0"/>
+                            </a:rPr>
+                            <m:t>𝑣</m:t>
+                          </m:r>
+                        </m:sup>
+                      </m:sSubSup>
+                      <m:r>
+                        <a:rPr lang="en-US" sz="1800" i="1">
+                          <a:effectLst/>
+                          <a:latin typeface="Cambria Math" panose="02040503050406030204" pitchFamily="18" charset="0"/>
+                          <a:ea typeface="Times New Roman" panose="02020603050405020304" pitchFamily="18" charset="0"/>
+                          <a:cs typeface="Calibri" panose="020F0502020204030204" pitchFamily="34" charset="0"/>
+                        </a:rPr>
+                        <m:t>,</m:t>
+                      </m:r>
+                      <m:r>
+                        <a:rPr lang="en-US" sz="1800">
+                          <a:effectLst/>
+                          <a:latin typeface="Cambria Math" panose="02040503050406030204" pitchFamily="18" charset="0"/>
+                          <a:ea typeface="Times New Roman" panose="02020603050405020304" pitchFamily="18" charset="0"/>
+                          <a:cs typeface="Calibri" panose="020F0502020204030204" pitchFamily="34" charset="0"/>
+                        </a:rPr>
+                        <m:t> </m:t>
+                      </m:r>
+                      <m:sSubSup>
+                        <m:sSubSupPr>
+                          <m:ctrlPr>
+                            <a:rPr lang="ru-RU" sz="1800" i="1">
+                              <a:effectLst/>
+                              <a:latin typeface="Cambria Math" panose="02040503050406030204" pitchFamily="18" charset="0"/>
+                              <a:ea typeface="Times New Roman" panose="02020603050405020304" pitchFamily="18" charset="0"/>
+                              <a:cs typeface="Calibri" panose="020F0502020204030204" pitchFamily="34" charset="0"/>
+                            </a:rPr>
+                          </m:ctrlPr>
+                        </m:sSubSupPr>
+                        <m:e>
+                          <m:r>
+                            <a:rPr lang="en-US" sz="1800" i="1">
+                              <a:effectLst/>
+                              <a:latin typeface="Cambria Math" panose="02040503050406030204" pitchFamily="18" charset="0"/>
+                              <a:ea typeface="Times New Roman" panose="02020603050405020304" pitchFamily="18" charset="0"/>
+                              <a:cs typeface="Calibri" panose="020F0502020204030204" pitchFamily="34" charset="0"/>
+                            </a:rPr>
+                            <m:t>𝑘</m:t>
+                          </m:r>
+                        </m:e>
+                        <m:sub>
+                          <m:r>
+                            <a:rPr lang="en-US" sz="1800" i="1">
+                              <a:effectLst/>
+                              <a:latin typeface="Cambria Math" panose="02040503050406030204" pitchFamily="18" charset="0"/>
+                              <a:ea typeface="Times New Roman" panose="02020603050405020304" pitchFamily="18" charset="0"/>
+                              <a:cs typeface="Calibri" panose="020F0502020204030204" pitchFamily="34" charset="0"/>
+                            </a:rPr>
+                            <m:t>3</m:t>
+                          </m:r>
+                        </m:sub>
+                        <m:sup>
+                          <m:r>
+                            <a:rPr lang="en-US" sz="1800" i="1">
+                              <a:effectLst/>
+                              <a:latin typeface="Cambria Math" panose="02040503050406030204" pitchFamily="18" charset="0"/>
+                              <a:ea typeface="Times New Roman" panose="02020603050405020304" pitchFamily="18" charset="0"/>
+                              <a:cs typeface="Calibri" panose="020F0502020204030204" pitchFamily="34" charset="0"/>
+                            </a:rPr>
+                            <m:t>𝑣</m:t>
+                          </m:r>
+                        </m:sup>
+                      </m:sSubSup>
+                      <m:r>
+                        <a:rPr lang="en-US" sz="1800" i="1">
+                          <a:effectLst/>
+                          <a:latin typeface="Cambria Math" panose="02040503050406030204" pitchFamily="18" charset="0"/>
+                          <a:ea typeface="Times New Roman" panose="02020603050405020304" pitchFamily="18" charset="0"/>
+                          <a:cs typeface="Calibri" panose="020F0502020204030204" pitchFamily="34" charset="0"/>
+                        </a:rPr>
+                        <m:t>=</m:t>
+                      </m:r>
+                      <m:r>
+                        <a:rPr lang="en-US" sz="1800" i="1">
+                          <a:effectLst/>
+                          <a:latin typeface="Cambria Math" panose="02040503050406030204" pitchFamily="18" charset="0"/>
+                          <a:ea typeface="Times New Roman" panose="02020603050405020304" pitchFamily="18" charset="0"/>
+                          <a:cs typeface="Calibri" panose="020F0502020204030204" pitchFamily="34" charset="0"/>
+                        </a:rPr>
+                        <m:t>𝑎</m:t>
+                      </m:r>
+                      <m:d>
+                        <m:dPr>
+                          <m:ctrlPr>
+                            <a:rPr lang="ru-RU" sz="1800" i="1">
+                              <a:effectLst/>
+                              <a:latin typeface="Cambria Math" panose="02040503050406030204" pitchFamily="18" charset="0"/>
+                              <a:ea typeface="Times New Roman" panose="02020603050405020304" pitchFamily="18" charset="0"/>
+                              <a:cs typeface="Calibri" panose="020F0502020204030204" pitchFamily="34" charset="0"/>
+                            </a:rPr>
+                          </m:ctrlPr>
+                        </m:dPr>
+                        <m:e>
+                          <m:r>
+                            <a:rPr lang="en-US" sz="1800" i="1">
+                              <a:effectLst/>
+                              <a:latin typeface="Cambria Math" panose="02040503050406030204" pitchFamily="18" charset="0"/>
+                              <a:ea typeface="Times New Roman" panose="02020603050405020304" pitchFamily="18" charset="0"/>
+                              <a:cs typeface="Calibri" panose="020F0502020204030204" pitchFamily="34" charset="0"/>
+                            </a:rPr>
+                            <m:t>h</m:t>
+                          </m:r>
+                          <m:r>
+                            <a:rPr lang="en-US" sz="1800" i="1">
+                              <a:effectLst/>
+                              <a:latin typeface="Cambria Math" panose="02040503050406030204" pitchFamily="18" charset="0"/>
+                              <a:ea typeface="Times New Roman" panose="02020603050405020304" pitchFamily="18" charset="0"/>
+                              <a:cs typeface="Calibri" panose="020F0502020204030204" pitchFamily="34" charset="0"/>
+                            </a:rPr>
+                            <m:t>+</m:t>
+                          </m:r>
+                          <m:f>
+                            <m:fPr>
+                              <m:ctrlPr>
+                                <a:rPr lang="ru-RU" sz="1800" i="1">
+                                  <a:effectLst/>
+                                  <a:latin typeface="Cambria Math" panose="02040503050406030204" pitchFamily="18" charset="0"/>
+                                  <a:ea typeface="Times New Roman" panose="02020603050405020304" pitchFamily="18" charset="0"/>
+                                  <a:cs typeface="Calibri" panose="020F0502020204030204" pitchFamily="34" charset="0"/>
+                                </a:rPr>
+                              </m:ctrlPr>
+                            </m:fPr>
+                            <m:num>
+                              <m:r>
+                                <m:rPr>
+                                  <m:sty m:val="p"/>
+                                </m:rPr>
+                                <a:rPr lang="en-US" sz="1800">
+                                  <a:effectLst/>
+                                  <a:latin typeface="Cambria Math" panose="02040503050406030204" pitchFamily="18" charset="0"/>
+                                  <a:ea typeface="Times New Roman" panose="02020603050405020304" pitchFamily="18" charset="0"/>
+                                  <a:cs typeface="Calibri" panose="020F0502020204030204" pitchFamily="34" charset="0"/>
+                                </a:rPr>
+                                <m:t>Δ</m:t>
+                              </m:r>
+                              <m:r>
+                                <a:rPr lang="en-US" sz="1800" i="1">
+                                  <a:effectLst/>
+                                  <a:latin typeface="Cambria Math" panose="02040503050406030204" pitchFamily="18" charset="0"/>
+                                  <a:ea typeface="Times New Roman" panose="02020603050405020304" pitchFamily="18" charset="0"/>
+                                  <a:cs typeface="Calibri" panose="020F0502020204030204" pitchFamily="34" charset="0"/>
+                                </a:rPr>
+                                <m:t>𝑡</m:t>
+                              </m:r>
+                            </m:num>
+                            <m:den>
+                              <m:r>
+                                <a:rPr lang="en-US" sz="1800" i="1">
+                                  <a:effectLst/>
+                                  <a:latin typeface="Cambria Math" panose="02040503050406030204" pitchFamily="18" charset="0"/>
+                                  <a:ea typeface="Times New Roman" panose="02020603050405020304" pitchFamily="18" charset="0"/>
+                                  <a:cs typeface="Calibri" panose="020F0502020204030204" pitchFamily="34" charset="0"/>
+                                </a:rPr>
+                                <m:t>2</m:t>
+                              </m:r>
+                            </m:den>
+                          </m:f>
+                          <m:sSubSup>
+                            <m:sSubSupPr>
+                              <m:ctrlPr>
+                                <a:rPr lang="ru-RU" sz="1800" i="1">
+                                  <a:effectLst/>
+                                  <a:latin typeface="Cambria Math" panose="02040503050406030204" pitchFamily="18" charset="0"/>
+                                  <a:ea typeface="Times New Roman" panose="02020603050405020304" pitchFamily="18" charset="0"/>
+                                  <a:cs typeface="Calibri" panose="020F0502020204030204" pitchFamily="34" charset="0"/>
+                                </a:rPr>
+                              </m:ctrlPr>
+                            </m:sSubSupPr>
+                            <m:e>
+                              <m:r>
+                                <a:rPr lang="en-US" sz="1800" i="1">
+                                  <a:effectLst/>
+                                  <a:latin typeface="Cambria Math" panose="02040503050406030204" pitchFamily="18" charset="0"/>
+                                  <a:ea typeface="Times New Roman" panose="02020603050405020304" pitchFamily="18" charset="0"/>
+                                  <a:cs typeface="Calibri" panose="020F0502020204030204" pitchFamily="34" charset="0"/>
+                                </a:rPr>
+                                <m:t>𝑘</m:t>
+                              </m:r>
+                            </m:e>
+                            <m:sub>
+                              <m:r>
+                                <a:rPr lang="en-US" sz="1800" i="1">
+                                  <a:effectLst/>
+                                  <a:latin typeface="Cambria Math" panose="02040503050406030204" pitchFamily="18" charset="0"/>
+                                  <a:ea typeface="Times New Roman" panose="02020603050405020304" pitchFamily="18" charset="0"/>
+                                  <a:cs typeface="Calibri" panose="020F0502020204030204" pitchFamily="34" charset="0"/>
+                                </a:rPr>
+                                <m:t>2</m:t>
+                              </m:r>
+                            </m:sub>
+                            <m:sup>
+                              <m:r>
+                                <a:rPr lang="en-US" sz="1800" i="1">
+                                  <a:effectLst/>
+                                  <a:latin typeface="Cambria Math" panose="02040503050406030204" pitchFamily="18" charset="0"/>
+                                  <a:ea typeface="Times New Roman" panose="02020603050405020304" pitchFamily="18" charset="0"/>
+                                  <a:cs typeface="Calibri" panose="020F0502020204030204" pitchFamily="34" charset="0"/>
+                                </a:rPr>
+                                <m:t>h</m:t>
+                              </m:r>
+                            </m:sup>
+                          </m:sSubSup>
+                          <m:r>
+                            <a:rPr lang="en-US" sz="1800" i="1">
+                              <a:effectLst/>
+                              <a:latin typeface="Cambria Math" panose="02040503050406030204" pitchFamily="18" charset="0"/>
+                              <a:ea typeface="Times New Roman" panose="02020603050405020304" pitchFamily="18" charset="0"/>
+                              <a:cs typeface="Calibri" panose="020F0502020204030204" pitchFamily="34" charset="0"/>
+                            </a:rPr>
+                            <m:t>, </m:t>
+                          </m:r>
+                          <m:r>
+                            <a:rPr lang="en-US" sz="1800" i="1">
+                              <a:effectLst/>
+                              <a:latin typeface="Cambria Math" panose="02040503050406030204" pitchFamily="18" charset="0"/>
+                              <a:ea typeface="Times New Roman" panose="02020603050405020304" pitchFamily="18" charset="0"/>
+                              <a:cs typeface="Calibri" panose="020F0502020204030204" pitchFamily="34" charset="0"/>
+                            </a:rPr>
+                            <m:t>𝑣</m:t>
+                          </m:r>
+                          <m:r>
+                            <a:rPr lang="en-US" sz="1800" i="1">
+                              <a:effectLst/>
+                              <a:latin typeface="Cambria Math" panose="02040503050406030204" pitchFamily="18" charset="0"/>
+                              <a:ea typeface="Times New Roman" panose="02020603050405020304" pitchFamily="18" charset="0"/>
+                              <a:cs typeface="Calibri" panose="020F0502020204030204" pitchFamily="34" charset="0"/>
+                            </a:rPr>
+                            <m:t>+</m:t>
+                          </m:r>
+                          <m:f>
+                            <m:fPr>
+                              <m:ctrlPr>
+                                <a:rPr lang="ru-RU" sz="1800" i="1">
+                                  <a:effectLst/>
+                                  <a:latin typeface="Cambria Math" panose="02040503050406030204" pitchFamily="18" charset="0"/>
+                                  <a:ea typeface="Times New Roman" panose="02020603050405020304" pitchFamily="18" charset="0"/>
+                                  <a:cs typeface="Calibri" panose="020F0502020204030204" pitchFamily="34" charset="0"/>
+                                </a:rPr>
+                              </m:ctrlPr>
+                            </m:fPr>
+                            <m:num>
+                              <m:r>
+                                <m:rPr>
+                                  <m:sty m:val="p"/>
+                                </m:rPr>
+                                <a:rPr lang="en-US" sz="1800">
+                                  <a:effectLst/>
+                                  <a:latin typeface="Cambria Math" panose="02040503050406030204" pitchFamily="18" charset="0"/>
+                                  <a:ea typeface="Times New Roman" panose="02020603050405020304" pitchFamily="18" charset="0"/>
+                                  <a:cs typeface="Calibri" panose="020F0502020204030204" pitchFamily="34" charset="0"/>
+                                </a:rPr>
+                                <m:t>Δ</m:t>
+                              </m:r>
+                              <m:r>
+                                <a:rPr lang="en-US" sz="1800" i="1">
+                                  <a:effectLst/>
+                                  <a:latin typeface="Cambria Math" panose="02040503050406030204" pitchFamily="18" charset="0"/>
+                                  <a:ea typeface="Times New Roman" panose="02020603050405020304" pitchFamily="18" charset="0"/>
+                                  <a:cs typeface="Calibri" panose="020F0502020204030204" pitchFamily="34" charset="0"/>
+                                </a:rPr>
+                                <m:t>𝑡</m:t>
+                              </m:r>
+                            </m:num>
+                            <m:den>
+                              <m:r>
+                                <a:rPr lang="en-US" sz="1800" i="1">
+                                  <a:effectLst/>
+                                  <a:latin typeface="Cambria Math" panose="02040503050406030204" pitchFamily="18" charset="0"/>
+                                  <a:ea typeface="Times New Roman" panose="02020603050405020304" pitchFamily="18" charset="0"/>
+                                  <a:cs typeface="Calibri" panose="020F0502020204030204" pitchFamily="34" charset="0"/>
+                                </a:rPr>
+                                <m:t>2</m:t>
+                              </m:r>
+                            </m:den>
+                          </m:f>
+                          <m:sSubSup>
+                            <m:sSubSupPr>
+                              <m:ctrlPr>
+                                <a:rPr lang="ru-RU" sz="1800" i="1">
+                                  <a:effectLst/>
+                                  <a:latin typeface="Cambria Math" panose="02040503050406030204" pitchFamily="18" charset="0"/>
+                                  <a:ea typeface="Times New Roman" panose="02020603050405020304" pitchFamily="18" charset="0"/>
+                                  <a:cs typeface="Calibri" panose="020F0502020204030204" pitchFamily="34" charset="0"/>
+                                </a:rPr>
+                              </m:ctrlPr>
+                            </m:sSubSupPr>
+                            <m:e>
+                              <m:r>
+                                <a:rPr lang="en-US" sz="1800" i="1">
+                                  <a:effectLst/>
+                                  <a:latin typeface="Cambria Math" panose="02040503050406030204" pitchFamily="18" charset="0"/>
+                                  <a:ea typeface="Times New Roman" panose="02020603050405020304" pitchFamily="18" charset="0"/>
+                                  <a:cs typeface="Calibri" panose="020F0502020204030204" pitchFamily="34" charset="0"/>
+                                </a:rPr>
+                                <m:t>𝑘</m:t>
+                              </m:r>
+                            </m:e>
+                            <m:sub>
+                              <m:r>
+                                <a:rPr lang="en-US" sz="1800" i="1">
+                                  <a:effectLst/>
+                                  <a:latin typeface="Cambria Math" panose="02040503050406030204" pitchFamily="18" charset="0"/>
+                                  <a:ea typeface="Times New Roman" panose="02020603050405020304" pitchFamily="18" charset="0"/>
+                                  <a:cs typeface="Calibri" panose="020F0502020204030204" pitchFamily="34" charset="0"/>
+                                </a:rPr>
+                                <m:t>2</m:t>
+                              </m:r>
+                            </m:sub>
+                            <m:sup>
+                              <m:r>
+                                <a:rPr lang="en-US" sz="1800" i="1">
+                                  <a:effectLst/>
+                                  <a:latin typeface="Cambria Math" panose="02040503050406030204" pitchFamily="18" charset="0"/>
+                                  <a:ea typeface="Times New Roman" panose="02020603050405020304" pitchFamily="18" charset="0"/>
+                                  <a:cs typeface="Calibri" panose="020F0502020204030204" pitchFamily="34" charset="0"/>
+                                </a:rPr>
+                                <m:t>𝑣</m:t>
+                              </m:r>
+                            </m:sup>
+                          </m:sSubSup>
+                        </m:e>
+                      </m:d>
+                      <m:r>
+                        <a:rPr lang="en-US" sz="1800" i="1">
+                          <a:effectLst/>
+                          <a:latin typeface="Cambria Math" panose="02040503050406030204" pitchFamily="18" charset="0"/>
+                          <a:ea typeface="Times New Roman" panose="02020603050405020304" pitchFamily="18" charset="0"/>
+                          <a:cs typeface="Calibri" panose="020F0502020204030204" pitchFamily="34" charset="0"/>
+                        </a:rPr>
+                        <m:t>;</m:t>
+                      </m:r>
+                    </m:oMath>
+                  </m:oMathPara>
+                </a14:m>
+                <a:endParaRPr lang="ru-RU" sz="1800" dirty="0">
+                  <a:effectLst/>
+                  <a:latin typeface="Times New Roman" panose="02020603050405020304" pitchFamily="18" charset="0"/>
+                  <a:ea typeface="Times New Roman" panose="02020603050405020304" pitchFamily="18" charset="0"/>
+                </a:endParaRPr>
+              </a:p>
+              <a:p>
+                <a:pPr>
+                  <a:spcAft>
+                    <a:spcPts val="600"/>
+                  </a:spcAft>
+                </a:pPr>
+                <a14:m>
+                  <m:oMathPara xmlns:m="http://schemas.openxmlformats.org/officeDocument/2006/math">
+                    <m:oMathParaPr>
+                      <m:jc m:val="centerGroup"/>
+                    </m:oMathParaPr>
+                    <m:oMath xmlns:m="http://schemas.openxmlformats.org/officeDocument/2006/math">
+                      <m:sSubSup>
+                        <m:sSubSupPr>
+                          <m:ctrlPr>
+                            <a:rPr lang="ru-RU" sz="1800" i="1">
+                              <a:effectLst/>
+                              <a:latin typeface="Cambria Math" panose="02040503050406030204" pitchFamily="18" charset="0"/>
+                              <a:ea typeface="Times New Roman" panose="02020603050405020304" pitchFamily="18" charset="0"/>
+                              <a:cs typeface="Calibri" panose="020F0502020204030204" pitchFamily="34" charset="0"/>
+                            </a:rPr>
+                          </m:ctrlPr>
+                        </m:sSubSupPr>
+                        <m:e>
+                          <m:r>
+                            <a:rPr lang="en-US" sz="1800" i="1">
+                              <a:effectLst/>
+                              <a:latin typeface="Cambria Math" panose="02040503050406030204" pitchFamily="18" charset="0"/>
+                              <a:ea typeface="Times New Roman" panose="02020603050405020304" pitchFamily="18" charset="0"/>
+                              <a:cs typeface="Calibri" panose="020F0502020204030204" pitchFamily="34" charset="0"/>
+                            </a:rPr>
+                            <m:t>𝑘</m:t>
+                          </m:r>
+                        </m:e>
+                        <m:sub>
+                          <m:r>
+                            <a:rPr lang="en-US" sz="1800" i="1">
+                              <a:effectLst/>
+                              <a:latin typeface="Cambria Math" panose="02040503050406030204" pitchFamily="18" charset="0"/>
+                              <a:ea typeface="Times New Roman" panose="02020603050405020304" pitchFamily="18" charset="0"/>
+                              <a:cs typeface="Calibri" panose="020F0502020204030204" pitchFamily="34" charset="0"/>
+                            </a:rPr>
+                            <m:t>4</m:t>
+                          </m:r>
+                        </m:sub>
+                        <m:sup>
+                          <m:r>
+                            <a:rPr lang="en-US" sz="1800" i="1">
+                              <a:effectLst/>
+                              <a:latin typeface="Cambria Math" panose="02040503050406030204" pitchFamily="18" charset="0"/>
+                              <a:ea typeface="Times New Roman" panose="02020603050405020304" pitchFamily="18" charset="0"/>
+                              <a:cs typeface="Calibri" panose="020F0502020204030204" pitchFamily="34" charset="0"/>
+                            </a:rPr>
+                            <m:t>h</m:t>
+                          </m:r>
+                        </m:sup>
+                      </m:sSubSup>
+                      <m:r>
+                        <a:rPr lang="en-US" sz="1800" i="1">
+                          <a:effectLst/>
+                          <a:latin typeface="Cambria Math" panose="02040503050406030204" pitchFamily="18" charset="0"/>
+                          <a:ea typeface="Times New Roman" panose="02020603050405020304" pitchFamily="18" charset="0"/>
+                          <a:cs typeface="Calibri" panose="020F0502020204030204" pitchFamily="34" charset="0"/>
+                        </a:rPr>
+                        <m:t>=</m:t>
+                      </m:r>
+                      <m:r>
+                        <a:rPr lang="en-US" sz="1800" i="1">
+                          <a:effectLst/>
+                          <a:latin typeface="Cambria Math" panose="02040503050406030204" pitchFamily="18" charset="0"/>
+                          <a:ea typeface="Times New Roman" panose="02020603050405020304" pitchFamily="18" charset="0"/>
+                          <a:cs typeface="Calibri" panose="020F0502020204030204" pitchFamily="34" charset="0"/>
+                        </a:rPr>
+                        <m:t>𝑣</m:t>
+                      </m:r>
+                      <m:r>
+                        <a:rPr lang="en-US" sz="1800" i="1">
+                          <a:effectLst/>
+                          <a:latin typeface="Cambria Math" panose="02040503050406030204" pitchFamily="18" charset="0"/>
+                          <a:ea typeface="Times New Roman" panose="02020603050405020304" pitchFamily="18" charset="0"/>
+                          <a:cs typeface="Calibri" panose="020F0502020204030204" pitchFamily="34" charset="0"/>
+                        </a:rPr>
+                        <m:t>+</m:t>
+                      </m:r>
+                      <m:r>
+                        <m:rPr>
+                          <m:sty m:val="p"/>
+                        </m:rPr>
+                        <a:rPr lang="en-US" sz="1800">
+                          <a:effectLst/>
+                          <a:latin typeface="Cambria Math" panose="02040503050406030204" pitchFamily="18" charset="0"/>
+                          <a:ea typeface="Times New Roman" panose="02020603050405020304" pitchFamily="18" charset="0"/>
+                          <a:cs typeface="Calibri" panose="020F0502020204030204" pitchFamily="34" charset="0"/>
+                        </a:rPr>
+                        <m:t>Δ</m:t>
+                      </m:r>
+                      <m:r>
+                        <a:rPr lang="en-US" sz="1800" i="1">
+                          <a:effectLst/>
+                          <a:latin typeface="Cambria Math" panose="02040503050406030204" pitchFamily="18" charset="0"/>
+                          <a:ea typeface="Times New Roman" panose="02020603050405020304" pitchFamily="18" charset="0"/>
+                          <a:cs typeface="Calibri" panose="020F0502020204030204" pitchFamily="34" charset="0"/>
+                        </a:rPr>
+                        <m:t>𝑡</m:t>
+                      </m:r>
+                      <m:r>
+                        <a:rPr lang="en-US" sz="1800" i="1">
+                          <a:effectLst/>
+                          <a:latin typeface="Cambria Math" panose="02040503050406030204" pitchFamily="18" charset="0"/>
+                          <a:ea typeface="Times New Roman" panose="02020603050405020304" pitchFamily="18" charset="0"/>
+                          <a:cs typeface="Calibri" panose="020F0502020204030204" pitchFamily="34" charset="0"/>
+                        </a:rPr>
+                        <m:t> </m:t>
+                      </m:r>
+                      <m:sSubSup>
+                        <m:sSubSupPr>
+                          <m:ctrlPr>
+                            <a:rPr lang="ru-RU" sz="1800" i="1">
+                              <a:effectLst/>
+                              <a:latin typeface="Cambria Math" panose="02040503050406030204" pitchFamily="18" charset="0"/>
+                              <a:ea typeface="Times New Roman" panose="02020603050405020304" pitchFamily="18" charset="0"/>
+                              <a:cs typeface="Calibri" panose="020F0502020204030204" pitchFamily="34" charset="0"/>
+                            </a:rPr>
+                          </m:ctrlPr>
+                        </m:sSubSupPr>
+                        <m:e>
+                          <m:r>
+                            <a:rPr lang="en-US" sz="1800" i="1">
+                              <a:effectLst/>
+                              <a:latin typeface="Cambria Math" panose="02040503050406030204" pitchFamily="18" charset="0"/>
+                              <a:ea typeface="Times New Roman" panose="02020603050405020304" pitchFamily="18" charset="0"/>
+                              <a:cs typeface="Calibri" panose="020F0502020204030204" pitchFamily="34" charset="0"/>
+                            </a:rPr>
+                            <m:t>𝑘</m:t>
+                          </m:r>
+                        </m:e>
+                        <m:sub>
+                          <m:r>
+                            <a:rPr lang="en-US" sz="1800" i="1">
+                              <a:effectLst/>
+                              <a:latin typeface="Cambria Math" panose="02040503050406030204" pitchFamily="18" charset="0"/>
+                              <a:ea typeface="Times New Roman" panose="02020603050405020304" pitchFamily="18" charset="0"/>
+                              <a:cs typeface="Calibri" panose="020F0502020204030204" pitchFamily="34" charset="0"/>
+                            </a:rPr>
+                            <m:t>3</m:t>
+                          </m:r>
+                        </m:sub>
+                        <m:sup>
+                          <m:r>
+                            <a:rPr lang="en-US" sz="1800" i="1">
+                              <a:effectLst/>
+                              <a:latin typeface="Cambria Math" panose="02040503050406030204" pitchFamily="18" charset="0"/>
+                              <a:ea typeface="Times New Roman" panose="02020603050405020304" pitchFamily="18" charset="0"/>
+                              <a:cs typeface="Calibri" panose="020F0502020204030204" pitchFamily="34" charset="0"/>
+                            </a:rPr>
+                            <m:t>𝑣</m:t>
+                          </m:r>
+                        </m:sup>
+                      </m:sSubSup>
+                      <m:r>
+                        <a:rPr lang="en-US" sz="1800" i="1">
+                          <a:effectLst/>
+                          <a:latin typeface="Cambria Math" panose="02040503050406030204" pitchFamily="18" charset="0"/>
+                          <a:ea typeface="Times New Roman" panose="02020603050405020304" pitchFamily="18" charset="0"/>
+                          <a:cs typeface="Calibri" panose="020F0502020204030204" pitchFamily="34" charset="0"/>
+                        </a:rPr>
+                        <m:t>,</m:t>
+                      </m:r>
+                      <m:r>
+                        <a:rPr lang="en-US" sz="1800">
+                          <a:effectLst/>
+                          <a:latin typeface="Cambria Math" panose="02040503050406030204" pitchFamily="18" charset="0"/>
+                          <a:ea typeface="Times New Roman" panose="02020603050405020304" pitchFamily="18" charset="0"/>
+                          <a:cs typeface="Calibri" panose="020F0502020204030204" pitchFamily="34" charset="0"/>
+                        </a:rPr>
+                        <m:t> </m:t>
+                      </m:r>
+                      <m:sSubSup>
+                        <m:sSubSupPr>
+                          <m:ctrlPr>
+                            <a:rPr lang="ru-RU" sz="1800" i="1">
+                              <a:effectLst/>
+                              <a:latin typeface="Cambria Math" panose="02040503050406030204" pitchFamily="18" charset="0"/>
+                              <a:ea typeface="Times New Roman" panose="02020603050405020304" pitchFamily="18" charset="0"/>
+                              <a:cs typeface="Calibri" panose="020F0502020204030204" pitchFamily="34" charset="0"/>
+                            </a:rPr>
+                          </m:ctrlPr>
+                        </m:sSubSupPr>
+                        <m:e>
+                          <m:r>
+                            <a:rPr lang="en-US" sz="1800" i="1">
+                              <a:effectLst/>
+                              <a:latin typeface="Cambria Math" panose="02040503050406030204" pitchFamily="18" charset="0"/>
+                              <a:ea typeface="Times New Roman" panose="02020603050405020304" pitchFamily="18" charset="0"/>
+                              <a:cs typeface="Calibri" panose="020F0502020204030204" pitchFamily="34" charset="0"/>
+                            </a:rPr>
+                            <m:t>𝑘</m:t>
+                          </m:r>
+                        </m:e>
+                        <m:sub>
+                          <m:r>
+                            <a:rPr lang="en-US" sz="1800" i="1">
+                              <a:effectLst/>
+                              <a:latin typeface="Cambria Math" panose="02040503050406030204" pitchFamily="18" charset="0"/>
+                              <a:ea typeface="Times New Roman" panose="02020603050405020304" pitchFamily="18" charset="0"/>
+                              <a:cs typeface="Calibri" panose="020F0502020204030204" pitchFamily="34" charset="0"/>
+                            </a:rPr>
+                            <m:t>4</m:t>
+                          </m:r>
+                        </m:sub>
+                        <m:sup>
+                          <m:r>
+                            <a:rPr lang="en-US" sz="1800" i="1">
+                              <a:effectLst/>
+                              <a:latin typeface="Cambria Math" panose="02040503050406030204" pitchFamily="18" charset="0"/>
+                              <a:ea typeface="Times New Roman" panose="02020603050405020304" pitchFamily="18" charset="0"/>
+                              <a:cs typeface="Calibri" panose="020F0502020204030204" pitchFamily="34" charset="0"/>
+                            </a:rPr>
+                            <m:t>𝑣</m:t>
+                          </m:r>
+                        </m:sup>
+                      </m:sSubSup>
+                      <m:r>
+                        <a:rPr lang="en-US" sz="1800" i="1">
+                          <a:effectLst/>
+                          <a:latin typeface="Cambria Math" panose="02040503050406030204" pitchFamily="18" charset="0"/>
+                          <a:ea typeface="Times New Roman" panose="02020603050405020304" pitchFamily="18" charset="0"/>
+                          <a:cs typeface="Calibri" panose="020F0502020204030204" pitchFamily="34" charset="0"/>
+                        </a:rPr>
+                        <m:t>=</m:t>
+                      </m:r>
+                      <m:r>
+                        <a:rPr lang="en-US" sz="1800" i="1">
+                          <a:effectLst/>
+                          <a:latin typeface="Cambria Math" panose="02040503050406030204" pitchFamily="18" charset="0"/>
+                          <a:ea typeface="Times New Roman" panose="02020603050405020304" pitchFamily="18" charset="0"/>
+                          <a:cs typeface="Calibri" panose="020F0502020204030204" pitchFamily="34" charset="0"/>
+                        </a:rPr>
+                        <m:t>𝑎</m:t>
+                      </m:r>
+                      <m:d>
+                        <m:dPr>
+                          <m:ctrlPr>
+                            <a:rPr lang="ru-RU" sz="1800" i="1">
+                              <a:effectLst/>
+                              <a:latin typeface="Cambria Math" panose="02040503050406030204" pitchFamily="18" charset="0"/>
+                              <a:ea typeface="Times New Roman" panose="02020603050405020304" pitchFamily="18" charset="0"/>
+                              <a:cs typeface="Calibri" panose="020F0502020204030204" pitchFamily="34" charset="0"/>
+                            </a:rPr>
+                          </m:ctrlPr>
+                        </m:dPr>
+                        <m:e>
+                          <m:r>
+                            <a:rPr lang="en-US" sz="1800" i="1">
+                              <a:effectLst/>
+                              <a:latin typeface="Cambria Math" panose="02040503050406030204" pitchFamily="18" charset="0"/>
+                              <a:ea typeface="Times New Roman" panose="02020603050405020304" pitchFamily="18" charset="0"/>
+                              <a:cs typeface="Calibri" panose="020F0502020204030204" pitchFamily="34" charset="0"/>
+                            </a:rPr>
+                            <m:t>h</m:t>
+                          </m:r>
+                          <m:r>
+                            <a:rPr lang="en-US" sz="1800" i="1">
+                              <a:effectLst/>
+                              <a:latin typeface="Cambria Math" panose="02040503050406030204" pitchFamily="18" charset="0"/>
+                              <a:ea typeface="Times New Roman" panose="02020603050405020304" pitchFamily="18" charset="0"/>
+                              <a:cs typeface="Calibri" panose="020F0502020204030204" pitchFamily="34" charset="0"/>
+                            </a:rPr>
+                            <m:t>+</m:t>
+                          </m:r>
+                          <m:r>
+                            <m:rPr>
+                              <m:sty m:val="p"/>
+                            </m:rPr>
+                            <a:rPr lang="en-US" sz="1800">
+                              <a:effectLst/>
+                              <a:latin typeface="Cambria Math" panose="02040503050406030204" pitchFamily="18" charset="0"/>
+                              <a:ea typeface="Times New Roman" panose="02020603050405020304" pitchFamily="18" charset="0"/>
+                              <a:cs typeface="Calibri" panose="020F0502020204030204" pitchFamily="34" charset="0"/>
+                            </a:rPr>
+                            <m:t>Δ</m:t>
+                          </m:r>
+                          <m:r>
+                            <a:rPr lang="en-US" sz="1800" i="1">
+                              <a:effectLst/>
+                              <a:latin typeface="Cambria Math" panose="02040503050406030204" pitchFamily="18" charset="0"/>
+                              <a:ea typeface="Times New Roman" panose="02020603050405020304" pitchFamily="18" charset="0"/>
+                              <a:cs typeface="Calibri" panose="020F0502020204030204" pitchFamily="34" charset="0"/>
+                            </a:rPr>
+                            <m:t>𝑡</m:t>
+                          </m:r>
+                          <m:r>
+                            <a:rPr lang="en-US" sz="1800" i="1">
+                              <a:effectLst/>
+                              <a:latin typeface="Cambria Math" panose="02040503050406030204" pitchFamily="18" charset="0"/>
+                              <a:ea typeface="Times New Roman" panose="02020603050405020304" pitchFamily="18" charset="0"/>
+                              <a:cs typeface="Calibri" panose="020F0502020204030204" pitchFamily="34" charset="0"/>
+                            </a:rPr>
+                            <m:t> </m:t>
+                          </m:r>
+                          <m:sSubSup>
+                            <m:sSubSupPr>
+                              <m:ctrlPr>
+                                <a:rPr lang="ru-RU" sz="1800" i="1">
+                                  <a:effectLst/>
+                                  <a:latin typeface="Cambria Math" panose="02040503050406030204" pitchFamily="18" charset="0"/>
+                                  <a:ea typeface="Times New Roman" panose="02020603050405020304" pitchFamily="18" charset="0"/>
+                                  <a:cs typeface="Calibri" panose="020F0502020204030204" pitchFamily="34" charset="0"/>
+                                </a:rPr>
+                              </m:ctrlPr>
+                            </m:sSubSupPr>
+                            <m:e>
+                              <m:r>
+                                <a:rPr lang="en-US" sz="1800" i="1">
+                                  <a:effectLst/>
+                                  <a:latin typeface="Cambria Math" panose="02040503050406030204" pitchFamily="18" charset="0"/>
+                                  <a:ea typeface="Times New Roman" panose="02020603050405020304" pitchFamily="18" charset="0"/>
+                                  <a:cs typeface="Calibri" panose="020F0502020204030204" pitchFamily="34" charset="0"/>
+                                </a:rPr>
+                                <m:t>𝑘</m:t>
+                              </m:r>
+                            </m:e>
+                            <m:sub>
+                              <m:r>
+                                <a:rPr lang="en-US" sz="1800" i="1">
+                                  <a:effectLst/>
+                                  <a:latin typeface="Cambria Math" panose="02040503050406030204" pitchFamily="18" charset="0"/>
+                                  <a:ea typeface="Times New Roman" panose="02020603050405020304" pitchFamily="18" charset="0"/>
+                                  <a:cs typeface="Calibri" panose="020F0502020204030204" pitchFamily="34" charset="0"/>
+                                </a:rPr>
+                                <m:t>3</m:t>
+                              </m:r>
+                            </m:sub>
+                            <m:sup>
+                              <m:r>
+                                <a:rPr lang="en-US" sz="1800" i="1">
+                                  <a:effectLst/>
+                                  <a:latin typeface="Cambria Math" panose="02040503050406030204" pitchFamily="18" charset="0"/>
+                                  <a:ea typeface="Times New Roman" panose="02020603050405020304" pitchFamily="18" charset="0"/>
+                                  <a:cs typeface="Calibri" panose="020F0502020204030204" pitchFamily="34" charset="0"/>
+                                </a:rPr>
+                                <m:t>h</m:t>
+                              </m:r>
+                            </m:sup>
+                          </m:sSubSup>
+                          <m:r>
+                            <a:rPr lang="en-US" sz="1800" i="1">
+                              <a:effectLst/>
+                              <a:latin typeface="Cambria Math" panose="02040503050406030204" pitchFamily="18" charset="0"/>
+                              <a:ea typeface="Times New Roman" panose="02020603050405020304" pitchFamily="18" charset="0"/>
+                              <a:cs typeface="Calibri" panose="020F0502020204030204" pitchFamily="34" charset="0"/>
+                            </a:rPr>
+                            <m:t>, </m:t>
+                          </m:r>
+                          <m:r>
+                            <a:rPr lang="en-US" sz="1800" i="1">
+                              <a:effectLst/>
+                              <a:latin typeface="Cambria Math" panose="02040503050406030204" pitchFamily="18" charset="0"/>
+                              <a:ea typeface="Times New Roman" panose="02020603050405020304" pitchFamily="18" charset="0"/>
+                              <a:cs typeface="Calibri" panose="020F0502020204030204" pitchFamily="34" charset="0"/>
+                            </a:rPr>
+                            <m:t>𝑣</m:t>
+                          </m:r>
+                          <m:r>
+                            <a:rPr lang="en-US" sz="1800" i="1">
+                              <a:effectLst/>
+                              <a:latin typeface="Cambria Math" panose="02040503050406030204" pitchFamily="18" charset="0"/>
+                              <a:ea typeface="Times New Roman" panose="02020603050405020304" pitchFamily="18" charset="0"/>
+                              <a:cs typeface="Calibri" panose="020F0502020204030204" pitchFamily="34" charset="0"/>
+                            </a:rPr>
+                            <m:t>+</m:t>
+                          </m:r>
+                          <m:r>
+                            <m:rPr>
+                              <m:sty m:val="p"/>
+                            </m:rPr>
+                            <a:rPr lang="en-US" sz="1800">
+                              <a:effectLst/>
+                              <a:latin typeface="Cambria Math" panose="02040503050406030204" pitchFamily="18" charset="0"/>
+                              <a:ea typeface="Times New Roman" panose="02020603050405020304" pitchFamily="18" charset="0"/>
+                              <a:cs typeface="Calibri" panose="020F0502020204030204" pitchFamily="34" charset="0"/>
+                            </a:rPr>
+                            <m:t>Δ</m:t>
+                          </m:r>
+                          <m:r>
+                            <a:rPr lang="en-US" sz="1800" i="1">
+                              <a:effectLst/>
+                              <a:latin typeface="Cambria Math" panose="02040503050406030204" pitchFamily="18" charset="0"/>
+                              <a:ea typeface="Times New Roman" panose="02020603050405020304" pitchFamily="18" charset="0"/>
+                              <a:cs typeface="Calibri" panose="020F0502020204030204" pitchFamily="34" charset="0"/>
+                            </a:rPr>
+                            <m:t>𝑡</m:t>
+                          </m:r>
+                          <m:r>
+                            <a:rPr lang="en-US" sz="1800" i="1">
+                              <a:effectLst/>
+                              <a:latin typeface="Cambria Math" panose="02040503050406030204" pitchFamily="18" charset="0"/>
+                              <a:ea typeface="Times New Roman" panose="02020603050405020304" pitchFamily="18" charset="0"/>
+                              <a:cs typeface="Calibri" panose="020F0502020204030204" pitchFamily="34" charset="0"/>
+                            </a:rPr>
+                            <m:t> </m:t>
+                          </m:r>
+                          <m:sSubSup>
+                            <m:sSubSupPr>
+                              <m:ctrlPr>
+                                <a:rPr lang="ru-RU" sz="1800" i="1">
+                                  <a:effectLst/>
+                                  <a:latin typeface="Cambria Math" panose="02040503050406030204" pitchFamily="18" charset="0"/>
+                                  <a:ea typeface="Times New Roman" panose="02020603050405020304" pitchFamily="18" charset="0"/>
+                                  <a:cs typeface="Calibri" panose="020F0502020204030204" pitchFamily="34" charset="0"/>
+                                </a:rPr>
+                              </m:ctrlPr>
+                            </m:sSubSupPr>
+                            <m:e>
+                              <m:r>
+                                <a:rPr lang="en-US" sz="1800" i="1">
+                                  <a:effectLst/>
+                                  <a:latin typeface="Cambria Math" panose="02040503050406030204" pitchFamily="18" charset="0"/>
+                                  <a:ea typeface="Times New Roman" panose="02020603050405020304" pitchFamily="18" charset="0"/>
+                                  <a:cs typeface="Calibri" panose="020F0502020204030204" pitchFamily="34" charset="0"/>
+                                </a:rPr>
+                                <m:t>𝑘</m:t>
+                              </m:r>
+                            </m:e>
+                            <m:sub>
+                              <m:r>
+                                <a:rPr lang="en-US" sz="1800" i="1">
+                                  <a:effectLst/>
+                                  <a:latin typeface="Cambria Math" panose="02040503050406030204" pitchFamily="18" charset="0"/>
+                                  <a:ea typeface="Times New Roman" panose="02020603050405020304" pitchFamily="18" charset="0"/>
+                                  <a:cs typeface="Calibri" panose="020F0502020204030204" pitchFamily="34" charset="0"/>
+                                </a:rPr>
+                                <m:t>3</m:t>
+                              </m:r>
+                            </m:sub>
+                            <m:sup>
+                              <m:r>
+                                <a:rPr lang="en-US" sz="1800" i="1">
+                                  <a:effectLst/>
+                                  <a:latin typeface="Cambria Math" panose="02040503050406030204" pitchFamily="18" charset="0"/>
+                                  <a:ea typeface="Times New Roman" panose="02020603050405020304" pitchFamily="18" charset="0"/>
+                                  <a:cs typeface="Calibri" panose="020F0502020204030204" pitchFamily="34" charset="0"/>
+                                </a:rPr>
+                                <m:t>𝑣</m:t>
+                              </m:r>
+                            </m:sup>
+                          </m:sSubSup>
+                        </m:e>
+                      </m:d>
+                      <m:r>
+                        <a:rPr lang="en-US" sz="1800" i="1">
+                          <a:effectLst/>
+                          <a:latin typeface="Cambria Math" panose="02040503050406030204" pitchFamily="18" charset="0"/>
+                          <a:ea typeface="Times New Roman" panose="02020603050405020304" pitchFamily="18" charset="0"/>
+                          <a:cs typeface="Calibri" panose="020F0502020204030204" pitchFamily="34" charset="0"/>
+                        </a:rPr>
+                        <m:t>;</m:t>
+                      </m:r>
+                    </m:oMath>
+                  </m:oMathPara>
+                </a14:m>
+                <a:endParaRPr lang="ru-RU" sz="1800" dirty="0">
+                  <a:effectLst/>
+                  <a:latin typeface="Times New Roman" panose="02020603050405020304" pitchFamily="18" charset="0"/>
+                  <a:ea typeface="Times New Roman" panose="02020603050405020304" pitchFamily="18" charset="0"/>
+                </a:endParaRPr>
+              </a:p>
+              <a:p>
+                <a:pPr>
+                  <a:spcAft>
+                    <a:spcPts val="600"/>
+                  </a:spcAft>
+                </a:pPr>
+                <a14:m>
+                  <m:oMathPara xmlns:m="http://schemas.openxmlformats.org/officeDocument/2006/math">
+                    <m:oMathParaPr>
+                      <m:jc m:val="centerGroup"/>
+                    </m:oMathParaPr>
+                    <m:oMath xmlns:m="http://schemas.openxmlformats.org/officeDocument/2006/math">
+                      <m:r>
+                        <a:rPr lang="en-US" sz="1800" i="1">
+                          <a:effectLst/>
+                          <a:latin typeface="Cambria Math" panose="02040503050406030204" pitchFamily="18" charset="0"/>
+                          <a:ea typeface="Times New Roman" panose="02020603050405020304" pitchFamily="18" charset="0"/>
+                          <a:cs typeface="Calibri" panose="020F0502020204030204" pitchFamily="34" charset="0"/>
+                        </a:rPr>
+                        <m:t>h</m:t>
+                      </m:r>
+                      <m:d>
+                        <m:dPr>
+                          <m:ctrlPr>
+                            <a:rPr lang="ru-RU" sz="1800" i="1">
+                              <a:effectLst/>
+                              <a:latin typeface="Cambria Math" panose="02040503050406030204" pitchFamily="18" charset="0"/>
+                              <a:ea typeface="Times New Roman" panose="02020603050405020304" pitchFamily="18" charset="0"/>
+                              <a:cs typeface="Calibri" panose="020F0502020204030204" pitchFamily="34" charset="0"/>
+                            </a:rPr>
+                          </m:ctrlPr>
+                        </m:dPr>
+                        <m:e>
+                          <m:r>
+                            <a:rPr lang="en-US" sz="1800" i="1">
+                              <a:effectLst/>
+                              <a:latin typeface="Cambria Math" panose="02040503050406030204" pitchFamily="18" charset="0"/>
+                              <a:ea typeface="Times New Roman" panose="02020603050405020304" pitchFamily="18" charset="0"/>
+                              <a:cs typeface="Calibri" panose="020F0502020204030204" pitchFamily="34" charset="0"/>
+                            </a:rPr>
+                            <m:t>𝑡</m:t>
+                          </m:r>
+                          <m:r>
+                            <a:rPr lang="en-US" sz="1800" i="1">
+                              <a:effectLst/>
+                              <a:latin typeface="Cambria Math" panose="02040503050406030204" pitchFamily="18" charset="0"/>
+                              <a:ea typeface="Times New Roman" panose="02020603050405020304" pitchFamily="18" charset="0"/>
+                              <a:cs typeface="Calibri" panose="020F0502020204030204" pitchFamily="34" charset="0"/>
+                            </a:rPr>
+                            <m:t>+</m:t>
+                          </m:r>
+                          <m:r>
+                            <m:rPr>
+                              <m:sty m:val="p"/>
+                            </m:rPr>
+                            <a:rPr lang="en-US" sz="1800">
+                              <a:effectLst/>
+                              <a:latin typeface="Cambria Math" panose="02040503050406030204" pitchFamily="18" charset="0"/>
+                              <a:ea typeface="Times New Roman" panose="02020603050405020304" pitchFamily="18" charset="0"/>
+                              <a:cs typeface="Calibri" panose="020F0502020204030204" pitchFamily="34" charset="0"/>
+                            </a:rPr>
+                            <m:t>Δ</m:t>
+                          </m:r>
+                          <m:r>
+                            <a:rPr lang="en-US" sz="1800" i="1">
+                              <a:effectLst/>
+                              <a:latin typeface="Cambria Math" panose="02040503050406030204" pitchFamily="18" charset="0"/>
+                              <a:ea typeface="Times New Roman" panose="02020603050405020304" pitchFamily="18" charset="0"/>
+                              <a:cs typeface="Calibri" panose="020F0502020204030204" pitchFamily="34" charset="0"/>
+                            </a:rPr>
+                            <m:t>𝑡</m:t>
+                          </m:r>
+                        </m:e>
+                      </m:d>
+                      <m:r>
+                        <a:rPr lang="en-US" sz="1800" i="1">
+                          <a:effectLst/>
+                          <a:latin typeface="Cambria Math" panose="02040503050406030204" pitchFamily="18" charset="0"/>
+                          <a:ea typeface="Times New Roman" panose="02020603050405020304" pitchFamily="18" charset="0"/>
+                          <a:cs typeface="Calibri" panose="020F0502020204030204" pitchFamily="34" charset="0"/>
+                        </a:rPr>
+                        <m:t>=</m:t>
+                      </m:r>
+                      <m:r>
+                        <a:rPr lang="en-US" sz="1800" i="1">
+                          <a:effectLst/>
+                          <a:latin typeface="Cambria Math" panose="02040503050406030204" pitchFamily="18" charset="0"/>
+                          <a:ea typeface="Times New Roman" panose="02020603050405020304" pitchFamily="18" charset="0"/>
+                          <a:cs typeface="Calibri" panose="020F0502020204030204" pitchFamily="34" charset="0"/>
+                        </a:rPr>
+                        <m:t>h</m:t>
+                      </m:r>
+                      <m:d>
+                        <m:dPr>
+                          <m:ctrlPr>
+                            <a:rPr lang="ru-RU" sz="1800" i="1">
+                              <a:effectLst/>
+                              <a:latin typeface="Cambria Math" panose="02040503050406030204" pitchFamily="18" charset="0"/>
+                              <a:ea typeface="Times New Roman" panose="02020603050405020304" pitchFamily="18" charset="0"/>
+                              <a:cs typeface="Calibri" panose="020F0502020204030204" pitchFamily="34" charset="0"/>
+                            </a:rPr>
+                          </m:ctrlPr>
+                        </m:dPr>
+                        <m:e>
+                          <m:r>
+                            <a:rPr lang="en-US" sz="1800" i="1">
+                              <a:effectLst/>
+                              <a:latin typeface="Cambria Math" panose="02040503050406030204" pitchFamily="18" charset="0"/>
+                              <a:ea typeface="Times New Roman" panose="02020603050405020304" pitchFamily="18" charset="0"/>
+                              <a:cs typeface="Calibri" panose="020F0502020204030204" pitchFamily="34" charset="0"/>
+                            </a:rPr>
+                            <m:t>𝑡</m:t>
+                          </m:r>
+                        </m:e>
+                      </m:d>
+                      <m:r>
+                        <a:rPr lang="en-US" sz="1800" i="1">
+                          <a:effectLst/>
+                          <a:latin typeface="Cambria Math" panose="02040503050406030204" pitchFamily="18" charset="0"/>
+                          <a:ea typeface="Times New Roman" panose="02020603050405020304" pitchFamily="18" charset="0"/>
+                          <a:cs typeface="Calibri" panose="020F0502020204030204" pitchFamily="34" charset="0"/>
+                        </a:rPr>
+                        <m:t>+</m:t>
+                      </m:r>
+                      <m:f>
+                        <m:fPr>
+                          <m:ctrlPr>
+                            <a:rPr lang="ru-RU" sz="1800" i="1">
+                              <a:effectLst/>
+                              <a:latin typeface="Cambria Math" panose="02040503050406030204" pitchFamily="18" charset="0"/>
+                              <a:ea typeface="Times New Roman" panose="02020603050405020304" pitchFamily="18" charset="0"/>
+                              <a:cs typeface="Calibri" panose="020F0502020204030204" pitchFamily="34" charset="0"/>
+                            </a:rPr>
+                          </m:ctrlPr>
+                        </m:fPr>
+                        <m:num>
+                          <m:r>
+                            <m:rPr>
+                              <m:sty m:val="p"/>
+                            </m:rPr>
+                            <a:rPr lang="en-US" sz="1800">
+                              <a:effectLst/>
+                              <a:latin typeface="Cambria Math" panose="02040503050406030204" pitchFamily="18" charset="0"/>
+                              <a:ea typeface="Times New Roman" panose="02020603050405020304" pitchFamily="18" charset="0"/>
+                              <a:cs typeface="Calibri" panose="020F0502020204030204" pitchFamily="34" charset="0"/>
+                            </a:rPr>
+                            <m:t>Δ</m:t>
+                          </m:r>
+                          <m:r>
+                            <a:rPr lang="en-US" sz="1800" i="1">
+                              <a:effectLst/>
+                              <a:latin typeface="Cambria Math" panose="02040503050406030204" pitchFamily="18" charset="0"/>
+                              <a:ea typeface="Times New Roman" panose="02020603050405020304" pitchFamily="18" charset="0"/>
+                              <a:cs typeface="Calibri" panose="020F0502020204030204" pitchFamily="34" charset="0"/>
+                            </a:rPr>
+                            <m:t>𝑡</m:t>
+                          </m:r>
+                        </m:num>
+                        <m:den>
+                          <m:r>
+                            <a:rPr lang="en-US" sz="1800" i="1">
+                              <a:effectLst/>
+                              <a:latin typeface="Cambria Math" panose="02040503050406030204" pitchFamily="18" charset="0"/>
+                              <a:ea typeface="Times New Roman" panose="02020603050405020304" pitchFamily="18" charset="0"/>
+                              <a:cs typeface="Calibri" panose="020F0502020204030204" pitchFamily="34" charset="0"/>
+                            </a:rPr>
+                            <m:t>6</m:t>
+                          </m:r>
+                        </m:den>
+                      </m:f>
+                      <m:d>
+                        <m:dPr>
+                          <m:ctrlPr>
+                            <a:rPr lang="ru-RU" sz="1800" i="1">
+                              <a:effectLst/>
+                              <a:latin typeface="Cambria Math" panose="02040503050406030204" pitchFamily="18" charset="0"/>
+                              <a:ea typeface="Times New Roman" panose="02020603050405020304" pitchFamily="18" charset="0"/>
+                              <a:cs typeface="Calibri" panose="020F0502020204030204" pitchFamily="34" charset="0"/>
+                            </a:rPr>
+                          </m:ctrlPr>
+                        </m:dPr>
+                        <m:e>
+                          <m:sSubSup>
+                            <m:sSubSupPr>
+                              <m:ctrlPr>
+                                <a:rPr lang="ru-RU" sz="1800" i="1">
+                                  <a:effectLst/>
+                                  <a:latin typeface="Cambria Math" panose="02040503050406030204" pitchFamily="18" charset="0"/>
+                                  <a:ea typeface="Times New Roman" panose="02020603050405020304" pitchFamily="18" charset="0"/>
+                                  <a:cs typeface="Calibri" panose="020F0502020204030204" pitchFamily="34" charset="0"/>
+                                </a:rPr>
+                              </m:ctrlPr>
+                            </m:sSubSupPr>
+                            <m:e>
+                              <m:r>
+                                <a:rPr lang="en-US" sz="1800" i="1">
+                                  <a:effectLst/>
+                                  <a:latin typeface="Cambria Math" panose="02040503050406030204" pitchFamily="18" charset="0"/>
+                                  <a:ea typeface="Times New Roman" panose="02020603050405020304" pitchFamily="18" charset="0"/>
+                                  <a:cs typeface="Calibri" panose="020F0502020204030204" pitchFamily="34" charset="0"/>
+                                </a:rPr>
+                                <m:t>𝑘</m:t>
+                              </m:r>
+                            </m:e>
+                            <m:sub>
+                              <m:r>
+                                <a:rPr lang="en-US" sz="1800" i="1">
+                                  <a:effectLst/>
+                                  <a:latin typeface="Cambria Math" panose="02040503050406030204" pitchFamily="18" charset="0"/>
+                                  <a:ea typeface="Times New Roman" panose="02020603050405020304" pitchFamily="18" charset="0"/>
+                                  <a:cs typeface="Calibri" panose="020F0502020204030204" pitchFamily="34" charset="0"/>
+                                </a:rPr>
+                                <m:t>1</m:t>
+                              </m:r>
+                            </m:sub>
+                            <m:sup>
+                              <m:r>
+                                <a:rPr lang="en-US" sz="1800" i="1">
+                                  <a:effectLst/>
+                                  <a:latin typeface="Cambria Math" panose="02040503050406030204" pitchFamily="18" charset="0"/>
+                                  <a:ea typeface="Times New Roman" panose="02020603050405020304" pitchFamily="18" charset="0"/>
+                                  <a:cs typeface="Calibri" panose="020F0502020204030204" pitchFamily="34" charset="0"/>
+                                </a:rPr>
+                                <m:t>h</m:t>
+                              </m:r>
+                            </m:sup>
+                          </m:sSubSup>
+                          <m:r>
+                            <a:rPr lang="en-US" sz="1800" i="1">
+                              <a:effectLst/>
+                              <a:latin typeface="Cambria Math" panose="02040503050406030204" pitchFamily="18" charset="0"/>
+                              <a:ea typeface="Times New Roman" panose="02020603050405020304" pitchFamily="18" charset="0"/>
+                              <a:cs typeface="Calibri" panose="020F0502020204030204" pitchFamily="34" charset="0"/>
+                            </a:rPr>
+                            <m:t>+2</m:t>
+                          </m:r>
+                          <m:sSubSup>
+                            <m:sSubSupPr>
+                              <m:ctrlPr>
+                                <a:rPr lang="ru-RU" sz="1800" i="1">
+                                  <a:effectLst/>
+                                  <a:latin typeface="Cambria Math" panose="02040503050406030204" pitchFamily="18" charset="0"/>
+                                  <a:ea typeface="Times New Roman" panose="02020603050405020304" pitchFamily="18" charset="0"/>
+                                  <a:cs typeface="Calibri" panose="020F0502020204030204" pitchFamily="34" charset="0"/>
+                                </a:rPr>
+                              </m:ctrlPr>
+                            </m:sSubSupPr>
+                            <m:e>
+                              <m:r>
+                                <a:rPr lang="en-US" sz="1800" i="1">
+                                  <a:effectLst/>
+                                  <a:latin typeface="Cambria Math" panose="02040503050406030204" pitchFamily="18" charset="0"/>
+                                  <a:ea typeface="Times New Roman" panose="02020603050405020304" pitchFamily="18" charset="0"/>
+                                  <a:cs typeface="Calibri" panose="020F0502020204030204" pitchFamily="34" charset="0"/>
+                                </a:rPr>
+                                <m:t>𝑘</m:t>
+                              </m:r>
+                            </m:e>
+                            <m:sub>
+                              <m:r>
+                                <a:rPr lang="en-US" sz="1800" i="1">
+                                  <a:effectLst/>
+                                  <a:latin typeface="Cambria Math" panose="02040503050406030204" pitchFamily="18" charset="0"/>
+                                  <a:ea typeface="Times New Roman" panose="02020603050405020304" pitchFamily="18" charset="0"/>
+                                  <a:cs typeface="Calibri" panose="020F0502020204030204" pitchFamily="34" charset="0"/>
+                                </a:rPr>
+                                <m:t>2</m:t>
+                              </m:r>
+                            </m:sub>
+                            <m:sup>
+                              <m:r>
+                                <a:rPr lang="en-US" sz="1800" i="1">
+                                  <a:effectLst/>
+                                  <a:latin typeface="Cambria Math" panose="02040503050406030204" pitchFamily="18" charset="0"/>
+                                  <a:ea typeface="Times New Roman" panose="02020603050405020304" pitchFamily="18" charset="0"/>
+                                  <a:cs typeface="Calibri" panose="020F0502020204030204" pitchFamily="34" charset="0"/>
+                                </a:rPr>
+                                <m:t>h</m:t>
+                              </m:r>
+                            </m:sup>
+                          </m:sSubSup>
+                          <m:r>
+                            <a:rPr lang="en-US" sz="1800" i="1">
+                              <a:effectLst/>
+                              <a:latin typeface="Cambria Math" panose="02040503050406030204" pitchFamily="18" charset="0"/>
+                              <a:ea typeface="Times New Roman" panose="02020603050405020304" pitchFamily="18" charset="0"/>
+                              <a:cs typeface="Calibri" panose="020F0502020204030204" pitchFamily="34" charset="0"/>
+                            </a:rPr>
+                            <m:t>+2</m:t>
+                          </m:r>
+                          <m:sSubSup>
+                            <m:sSubSupPr>
+                              <m:ctrlPr>
+                                <a:rPr lang="ru-RU" sz="1800" i="1">
+                                  <a:effectLst/>
+                                  <a:latin typeface="Cambria Math" panose="02040503050406030204" pitchFamily="18" charset="0"/>
+                                  <a:ea typeface="Times New Roman" panose="02020603050405020304" pitchFamily="18" charset="0"/>
+                                  <a:cs typeface="Calibri" panose="020F0502020204030204" pitchFamily="34" charset="0"/>
+                                </a:rPr>
+                              </m:ctrlPr>
+                            </m:sSubSupPr>
+                            <m:e>
+                              <m:r>
+                                <a:rPr lang="en-US" sz="1800" i="1">
+                                  <a:effectLst/>
+                                  <a:latin typeface="Cambria Math" panose="02040503050406030204" pitchFamily="18" charset="0"/>
+                                  <a:ea typeface="Times New Roman" panose="02020603050405020304" pitchFamily="18" charset="0"/>
+                                  <a:cs typeface="Calibri" panose="020F0502020204030204" pitchFamily="34" charset="0"/>
+                                </a:rPr>
+                                <m:t>𝑘</m:t>
+                              </m:r>
+                            </m:e>
+                            <m:sub>
+                              <m:r>
+                                <a:rPr lang="en-US" sz="1800" i="1">
+                                  <a:effectLst/>
+                                  <a:latin typeface="Cambria Math" panose="02040503050406030204" pitchFamily="18" charset="0"/>
+                                  <a:ea typeface="Times New Roman" panose="02020603050405020304" pitchFamily="18" charset="0"/>
+                                  <a:cs typeface="Calibri" panose="020F0502020204030204" pitchFamily="34" charset="0"/>
+                                </a:rPr>
+                                <m:t>3</m:t>
+                              </m:r>
+                            </m:sub>
+                            <m:sup>
+                              <m:r>
+                                <a:rPr lang="en-US" sz="1800" i="1">
+                                  <a:effectLst/>
+                                  <a:latin typeface="Cambria Math" panose="02040503050406030204" pitchFamily="18" charset="0"/>
+                                  <a:ea typeface="Times New Roman" panose="02020603050405020304" pitchFamily="18" charset="0"/>
+                                  <a:cs typeface="Calibri" panose="020F0502020204030204" pitchFamily="34" charset="0"/>
+                                </a:rPr>
+                                <m:t>h</m:t>
+                              </m:r>
+                            </m:sup>
+                          </m:sSubSup>
+                          <m:r>
+                            <a:rPr lang="en-US" sz="1800" i="1">
+                              <a:effectLst/>
+                              <a:latin typeface="Cambria Math" panose="02040503050406030204" pitchFamily="18" charset="0"/>
+                              <a:ea typeface="Times New Roman" panose="02020603050405020304" pitchFamily="18" charset="0"/>
+                              <a:cs typeface="Calibri" panose="020F0502020204030204" pitchFamily="34" charset="0"/>
+                            </a:rPr>
+                            <m:t>+</m:t>
+                          </m:r>
+                          <m:sSubSup>
+                            <m:sSubSupPr>
+                              <m:ctrlPr>
+                                <a:rPr lang="ru-RU" sz="1800" i="1">
+                                  <a:effectLst/>
+                                  <a:latin typeface="Cambria Math" panose="02040503050406030204" pitchFamily="18" charset="0"/>
+                                  <a:ea typeface="Times New Roman" panose="02020603050405020304" pitchFamily="18" charset="0"/>
+                                  <a:cs typeface="Calibri" panose="020F0502020204030204" pitchFamily="34" charset="0"/>
+                                </a:rPr>
+                              </m:ctrlPr>
+                            </m:sSubSupPr>
+                            <m:e>
+                              <m:r>
+                                <a:rPr lang="en-US" sz="1800" i="1">
+                                  <a:effectLst/>
+                                  <a:latin typeface="Cambria Math" panose="02040503050406030204" pitchFamily="18" charset="0"/>
+                                  <a:ea typeface="Times New Roman" panose="02020603050405020304" pitchFamily="18" charset="0"/>
+                                  <a:cs typeface="Calibri" panose="020F0502020204030204" pitchFamily="34" charset="0"/>
+                                </a:rPr>
+                                <m:t>𝑘</m:t>
+                              </m:r>
+                            </m:e>
+                            <m:sub>
+                              <m:r>
+                                <a:rPr lang="en-US" sz="1800" i="1">
+                                  <a:effectLst/>
+                                  <a:latin typeface="Cambria Math" panose="02040503050406030204" pitchFamily="18" charset="0"/>
+                                  <a:ea typeface="Times New Roman" panose="02020603050405020304" pitchFamily="18" charset="0"/>
+                                  <a:cs typeface="Calibri" panose="020F0502020204030204" pitchFamily="34" charset="0"/>
+                                </a:rPr>
+                                <m:t>4</m:t>
+                              </m:r>
+                            </m:sub>
+                            <m:sup>
+                              <m:r>
+                                <a:rPr lang="en-US" sz="1800" i="1">
+                                  <a:effectLst/>
+                                  <a:latin typeface="Cambria Math" panose="02040503050406030204" pitchFamily="18" charset="0"/>
+                                  <a:ea typeface="Times New Roman" panose="02020603050405020304" pitchFamily="18" charset="0"/>
+                                  <a:cs typeface="Calibri" panose="020F0502020204030204" pitchFamily="34" charset="0"/>
+                                </a:rPr>
+                                <m:t>h</m:t>
+                              </m:r>
+                            </m:sup>
+                          </m:sSubSup>
+                        </m:e>
+                      </m:d>
+                      <m:r>
+                        <a:rPr lang="en-US" sz="1800" i="1">
+                          <a:effectLst/>
+                          <a:latin typeface="Cambria Math" panose="02040503050406030204" pitchFamily="18" charset="0"/>
+                          <a:ea typeface="Times New Roman" panose="02020603050405020304" pitchFamily="18" charset="0"/>
+                          <a:cs typeface="Calibri" panose="020F0502020204030204" pitchFamily="34" charset="0"/>
+                        </a:rPr>
+                        <m:t>,</m:t>
+                      </m:r>
+                    </m:oMath>
+                  </m:oMathPara>
+                </a14:m>
+                <a:endParaRPr lang="ru-RU" sz="1800" dirty="0">
+                  <a:effectLst/>
+                  <a:latin typeface="Times New Roman" panose="02020603050405020304" pitchFamily="18" charset="0"/>
+                  <a:ea typeface="Times New Roman" panose="02020603050405020304" pitchFamily="18" charset="0"/>
+                </a:endParaRPr>
+              </a:p>
+              <a:p>
+                <a:pPr>
+                  <a:spcAft>
+                    <a:spcPts val="600"/>
+                  </a:spcAft>
+                </a:pPr>
+                <a14:m>
+                  <m:oMathPara xmlns:m="http://schemas.openxmlformats.org/officeDocument/2006/math">
+                    <m:oMathParaPr>
+                      <m:jc m:val="centerGroup"/>
+                    </m:oMathParaPr>
+                    <m:oMath xmlns:m="http://schemas.openxmlformats.org/officeDocument/2006/math">
+                      <m:r>
+                        <a:rPr lang="en-US" sz="1800" i="1">
+                          <a:effectLst/>
+                          <a:latin typeface="Cambria Math" panose="02040503050406030204" pitchFamily="18" charset="0"/>
+                          <a:ea typeface="Times New Roman" panose="02020603050405020304" pitchFamily="18" charset="0"/>
+                          <a:cs typeface="Calibri" panose="020F0502020204030204" pitchFamily="34" charset="0"/>
+                        </a:rPr>
+                        <m:t>𝑣</m:t>
+                      </m:r>
+                      <m:d>
+                        <m:dPr>
+                          <m:ctrlPr>
+                            <a:rPr lang="ru-RU" sz="1800" i="1">
+                              <a:effectLst/>
+                              <a:latin typeface="Cambria Math" panose="02040503050406030204" pitchFamily="18" charset="0"/>
+                              <a:ea typeface="Times New Roman" panose="02020603050405020304" pitchFamily="18" charset="0"/>
+                              <a:cs typeface="Calibri" panose="020F0502020204030204" pitchFamily="34" charset="0"/>
+                            </a:rPr>
+                          </m:ctrlPr>
+                        </m:dPr>
+                        <m:e>
+                          <m:r>
+                            <a:rPr lang="en-US" sz="1800" i="1">
+                              <a:effectLst/>
+                              <a:latin typeface="Cambria Math" panose="02040503050406030204" pitchFamily="18" charset="0"/>
+                              <a:ea typeface="Times New Roman" panose="02020603050405020304" pitchFamily="18" charset="0"/>
+                              <a:cs typeface="Calibri" panose="020F0502020204030204" pitchFamily="34" charset="0"/>
+                            </a:rPr>
+                            <m:t>𝑡</m:t>
+                          </m:r>
+                          <m:r>
+                            <a:rPr lang="en-US" sz="1800" i="1">
+                              <a:effectLst/>
+                              <a:latin typeface="Cambria Math" panose="02040503050406030204" pitchFamily="18" charset="0"/>
+                              <a:ea typeface="Times New Roman" panose="02020603050405020304" pitchFamily="18" charset="0"/>
+                              <a:cs typeface="Calibri" panose="020F0502020204030204" pitchFamily="34" charset="0"/>
+                            </a:rPr>
+                            <m:t>+</m:t>
+                          </m:r>
+                          <m:r>
+                            <m:rPr>
+                              <m:sty m:val="p"/>
+                            </m:rPr>
+                            <a:rPr lang="en-US" sz="1800">
+                              <a:effectLst/>
+                              <a:latin typeface="Cambria Math" panose="02040503050406030204" pitchFamily="18" charset="0"/>
+                              <a:ea typeface="Times New Roman" panose="02020603050405020304" pitchFamily="18" charset="0"/>
+                              <a:cs typeface="Calibri" panose="020F0502020204030204" pitchFamily="34" charset="0"/>
+                            </a:rPr>
+                            <m:t>Δ</m:t>
+                          </m:r>
+                          <m:r>
+                            <a:rPr lang="en-US" sz="1800" i="1">
+                              <a:effectLst/>
+                              <a:latin typeface="Cambria Math" panose="02040503050406030204" pitchFamily="18" charset="0"/>
+                              <a:ea typeface="Times New Roman" panose="02020603050405020304" pitchFamily="18" charset="0"/>
+                              <a:cs typeface="Calibri" panose="020F0502020204030204" pitchFamily="34" charset="0"/>
+                            </a:rPr>
+                            <m:t>𝑡</m:t>
+                          </m:r>
+                        </m:e>
+                      </m:d>
+                      <m:r>
+                        <a:rPr lang="en-US" sz="1800" i="1">
+                          <a:effectLst/>
+                          <a:latin typeface="Cambria Math" panose="02040503050406030204" pitchFamily="18" charset="0"/>
+                          <a:ea typeface="Times New Roman" panose="02020603050405020304" pitchFamily="18" charset="0"/>
+                          <a:cs typeface="Calibri" panose="020F0502020204030204" pitchFamily="34" charset="0"/>
+                        </a:rPr>
+                        <m:t>=</m:t>
+                      </m:r>
+                      <m:r>
+                        <a:rPr lang="en-US" sz="1800" i="1">
+                          <a:effectLst/>
+                          <a:latin typeface="Cambria Math" panose="02040503050406030204" pitchFamily="18" charset="0"/>
+                          <a:ea typeface="Times New Roman" panose="02020603050405020304" pitchFamily="18" charset="0"/>
+                          <a:cs typeface="Calibri" panose="020F0502020204030204" pitchFamily="34" charset="0"/>
+                        </a:rPr>
+                        <m:t>𝑣</m:t>
+                      </m:r>
+                      <m:d>
+                        <m:dPr>
+                          <m:ctrlPr>
+                            <a:rPr lang="ru-RU" sz="1800" i="1">
+                              <a:effectLst/>
+                              <a:latin typeface="Cambria Math" panose="02040503050406030204" pitchFamily="18" charset="0"/>
+                              <a:ea typeface="Times New Roman" panose="02020603050405020304" pitchFamily="18" charset="0"/>
+                              <a:cs typeface="Calibri" panose="020F0502020204030204" pitchFamily="34" charset="0"/>
+                            </a:rPr>
+                          </m:ctrlPr>
+                        </m:dPr>
+                        <m:e>
+                          <m:r>
+                            <a:rPr lang="en-US" sz="1800" i="1">
+                              <a:effectLst/>
+                              <a:latin typeface="Cambria Math" panose="02040503050406030204" pitchFamily="18" charset="0"/>
+                              <a:ea typeface="Times New Roman" panose="02020603050405020304" pitchFamily="18" charset="0"/>
+                              <a:cs typeface="Calibri" panose="020F0502020204030204" pitchFamily="34" charset="0"/>
+                            </a:rPr>
+                            <m:t>𝑡</m:t>
+                          </m:r>
+                        </m:e>
+                      </m:d>
+                      <m:r>
+                        <a:rPr lang="en-US" sz="1800" i="1">
+                          <a:effectLst/>
+                          <a:latin typeface="Cambria Math" panose="02040503050406030204" pitchFamily="18" charset="0"/>
+                          <a:ea typeface="Times New Roman" panose="02020603050405020304" pitchFamily="18" charset="0"/>
+                          <a:cs typeface="Calibri" panose="020F0502020204030204" pitchFamily="34" charset="0"/>
+                        </a:rPr>
+                        <m:t>+</m:t>
+                      </m:r>
+                      <m:f>
+                        <m:fPr>
+                          <m:ctrlPr>
+                            <a:rPr lang="ru-RU" sz="1800" i="1">
+                              <a:effectLst/>
+                              <a:latin typeface="Cambria Math" panose="02040503050406030204" pitchFamily="18" charset="0"/>
+                              <a:ea typeface="Times New Roman" panose="02020603050405020304" pitchFamily="18" charset="0"/>
+                              <a:cs typeface="Calibri" panose="020F0502020204030204" pitchFamily="34" charset="0"/>
+                            </a:rPr>
+                          </m:ctrlPr>
+                        </m:fPr>
+                        <m:num>
+                          <m:r>
+                            <m:rPr>
+                              <m:sty m:val="p"/>
+                            </m:rPr>
+                            <a:rPr lang="en-US" sz="1800">
+                              <a:effectLst/>
+                              <a:latin typeface="Cambria Math" panose="02040503050406030204" pitchFamily="18" charset="0"/>
+                              <a:ea typeface="Times New Roman" panose="02020603050405020304" pitchFamily="18" charset="0"/>
+                              <a:cs typeface="Calibri" panose="020F0502020204030204" pitchFamily="34" charset="0"/>
+                            </a:rPr>
+                            <m:t>Δ</m:t>
+                          </m:r>
+                          <m:r>
+                            <a:rPr lang="en-US" sz="1800" i="1">
+                              <a:effectLst/>
+                              <a:latin typeface="Cambria Math" panose="02040503050406030204" pitchFamily="18" charset="0"/>
+                              <a:ea typeface="Times New Roman" panose="02020603050405020304" pitchFamily="18" charset="0"/>
+                              <a:cs typeface="Calibri" panose="020F0502020204030204" pitchFamily="34" charset="0"/>
+                            </a:rPr>
+                            <m:t>𝑡</m:t>
+                          </m:r>
+                        </m:num>
+                        <m:den>
+                          <m:r>
+                            <a:rPr lang="en-US" sz="1800" i="1">
+                              <a:effectLst/>
+                              <a:latin typeface="Cambria Math" panose="02040503050406030204" pitchFamily="18" charset="0"/>
+                              <a:ea typeface="Times New Roman" panose="02020603050405020304" pitchFamily="18" charset="0"/>
+                              <a:cs typeface="Calibri" panose="020F0502020204030204" pitchFamily="34" charset="0"/>
+                            </a:rPr>
+                            <m:t>6</m:t>
+                          </m:r>
+                        </m:den>
+                      </m:f>
+                      <m:d>
+                        <m:dPr>
+                          <m:ctrlPr>
+                            <a:rPr lang="ru-RU" sz="1800" i="1">
+                              <a:effectLst/>
+                              <a:latin typeface="Cambria Math" panose="02040503050406030204" pitchFamily="18" charset="0"/>
+                              <a:ea typeface="Times New Roman" panose="02020603050405020304" pitchFamily="18" charset="0"/>
+                              <a:cs typeface="Calibri" panose="020F0502020204030204" pitchFamily="34" charset="0"/>
+                            </a:rPr>
+                          </m:ctrlPr>
+                        </m:dPr>
+                        <m:e>
+                          <m:sSubSup>
+                            <m:sSubSupPr>
+                              <m:ctrlPr>
+                                <a:rPr lang="ru-RU" sz="1800" i="1">
+                                  <a:effectLst/>
+                                  <a:latin typeface="Cambria Math" panose="02040503050406030204" pitchFamily="18" charset="0"/>
+                                  <a:ea typeface="Times New Roman" panose="02020603050405020304" pitchFamily="18" charset="0"/>
+                                  <a:cs typeface="Calibri" panose="020F0502020204030204" pitchFamily="34" charset="0"/>
+                                </a:rPr>
+                              </m:ctrlPr>
+                            </m:sSubSupPr>
+                            <m:e>
+                              <m:r>
+                                <a:rPr lang="en-US" sz="1800" i="1">
+                                  <a:effectLst/>
+                                  <a:latin typeface="Cambria Math" panose="02040503050406030204" pitchFamily="18" charset="0"/>
+                                  <a:ea typeface="Times New Roman" panose="02020603050405020304" pitchFamily="18" charset="0"/>
+                                  <a:cs typeface="Calibri" panose="020F0502020204030204" pitchFamily="34" charset="0"/>
+                                </a:rPr>
+                                <m:t>𝑘</m:t>
+                              </m:r>
+                            </m:e>
+                            <m:sub>
+                              <m:r>
+                                <a:rPr lang="en-US" sz="1800" i="1">
+                                  <a:effectLst/>
+                                  <a:latin typeface="Cambria Math" panose="02040503050406030204" pitchFamily="18" charset="0"/>
+                                  <a:ea typeface="Times New Roman" panose="02020603050405020304" pitchFamily="18" charset="0"/>
+                                  <a:cs typeface="Calibri" panose="020F0502020204030204" pitchFamily="34" charset="0"/>
+                                </a:rPr>
+                                <m:t>1</m:t>
+                              </m:r>
+                            </m:sub>
+                            <m:sup>
+                              <m:r>
+                                <a:rPr lang="en-US" sz="1800" i="1">
+                                  <a:effectLst/>
+                                  <a:latin typeface="Cambria Math" panose="02040503050406030204" pitchFamily="18" charset="0"/>
+                                  <a:ea typeface="Times New Roman" panose="02020603050405020304" pitchFamily="18" charset="0"/>
+                                  <a:cs typeface="Calibri" panose="020F0502020204030204" pitchFamily="34" charset="0"/>
+                                </a:rPr>
+                                <m:t>𝑣</m:t>
+                              </m:r>
+                            </m:sup>
+                          </m:sSubSup>
+                          <m:r>
+                            <a:rPr lang="en-US" sz="1800" i="1">
+                              <a:effectLst/>
+                              <a:latin typeface="Cambria Math" panose="02040503050406030204" pitchFamily="18" charset="0"/>
+                              <a:ea typeface="Times New Roman" panose="02020603050405020304" pitchFamily="18" charset="0"/>
+                              <a:cs typeface="Calibri" panose="020F0502020204030204" pitchFamily="34" charset="0"/>
+                            </a:rPr>
+                            <m:t>+2</m:t>
+                          </m:r>
+                          <m:sSubSup>
+                            <m:sSubSupPr>
+                              <m:ctrlPr>
+                                <a:rPr lang="ru-RU" sz="1800" i="1">
+                                  <a:effectLst/>
+                                  <a:latin typeface="Cambria Math" panose="02040503050406030204" pitchFamily="18" charset="0"/>
+                                  <a:ea typeface="Times New Roman" panose="02020603050405020304" pitchFamily="18" charset="0"/>
+                                  <a:cs typeface="Calibri" panose="020F0502020204030204" pitchFamily="34" charset="0"/>
+                                </a:rPr>
+                              </m:ctrlPr>
+                            </m:sSubSupPr>
+                            <m:e>
+                              <m:r>
+                                <a:rPr lang="en-US" sz="1800" i="1">
+                                  <a:effectLst/>
+                                  <a:latin typeface="Cambria Math" panose="02040503050406030204" pitchFamily="18" charset="0"/>
+                                  <a:ea typeface="Times New Roman" panose="02020603050405020304" pitchFamily="18" charset="0"/>
+                                  <a:cs typeface="Calibri" panose="020F0502020204030204" pitchFamily="34" charset="0"/>
+                                </a:rPr>
+                                <m:t>𝑘</m:t>
+                              </m:r>
+                            </m:e>
+                            <m:sub>
+                              <m:r>
+                                <a:rPr lang="en-US" sz="1800" i="1">
+                                  <a:effectLst/>
+                                  <a:latin typeface="Cambria Math" panose="02040503050406030204" pitchFamily="18" charset="0"/>
+                                  <a:ea typeface="Times New Roman" panose="02020603050405020304" pitchFamily="18" charset="0"/>
+                                  <a:cs typeface="Calibri" panose="020F0502020204030204" pitchFamily="34" charset="0"/>
+                                </a:rPr>
+                                <m:t>2</m:t>
+                              </m:r>
+                            </m:sub>
+                            <m:sup>
+                              <m:r>
+                                <a:rPr lang="en-US" sz="1800" i="1">
+                                  <a:effectLst/>
+                                  <a:latin typeface="Cambria Math" panose="02040503050406030204" pitchFamily="18" charset="0"/>
+                                  <a:ea typeface="Times New Roman" panose="02020603050405020304" pitchFamily="18" charset="0"/>
+                                  <a:cs typeface="Calibri" panose="020F0502020204030204" pitchFamily="34" charset="0"/>
+                                </a:rPr>
+                                <m:t>𝑣</m:t>
+                              </m:r>
+                            </m:sup>
+                          </m:sSubSup>
+                          <m:r>
+                            <a:rPr lang="en-US" sz="1800" i="1">
+                              <a:effectLst/>
+                              <a:latin typeface="Cambria Math" panose="02040503050406030204" pitchFamily="18" charset="0"/>
+                              <a:ea typeface="Times New Roman" panose="02020603050405020304" pitchFamily="18" charset="0"/>
+                              <a:cs typeface="Calibri" panose="020F0502020204030204" pitchFamily="34" charset="0"/>
+                            </a:rPr>
+                            <m:t>+2</m:t>
+                          </m:r>
+                          <m:sSubSup>
+                            <m:sSubSupPr>
+                              <m:ctrlPr>
+                                <a:rPr lang="ru-RU" sz="1800" i="1">
+                                  <a:effectLst/>
+                                  <a:latin typeface="Cambria Math" panose="02040503050406030204" pitchFamily="18" charset="0"/>
+                                  <a:ea typeface="Times New Roman" panose="02020603050405020304" pitchFamily="18" charset="0"/>
+                                  <a:cs typeface="Calibri" panose="020F0502020204030204" pitchFamily="34" charset="0"/>
+                                </a:rPr>
+                              </m:ctrlPr>
+                            </m:sSubSupPr>
+                            <m:e>
+                              <m:r>
+                                <a:rPr lang="en-US" sz="1800" i="1">
+                                  <a:effectLst/>
+                                  <a:latin typeface="Cambria Math" panose="02040503050406030204" pitchFamily="18" charset="0"/>
+                                  <a:ea typeface="Times New Roman" panose="02020603050405020304" pitchFamily="18" charset="0"/>
+                                  <a:cs typeface="Calibri" panose="020F0502020204030204" pitchFamily="34" charset="0"/>
+                                </a:rPr>
+                                <m:t>𝑘</m:t>
+                              </m:r>
+                            </m:e>
+                            <m:sub>
+                              <m:r>
+                                <a:rPr lang="en-US" sz="1800" i="1">
+                                  <a:effectLst/>
+                                  <a:latin typeface="Cambria Math" panose="02040503050406030204" pitchFamily="18" charset="0"/>
+                                  <a:ea typeface="Times New Roman" panose="02020603050405020304" pitchFamily="18" charset="0"/>
+                                  <a:cs typeface="Calibri" panose="020F0502020204030204" pitchFamily="34" charset="0"/>
+                                </a:rPr>
+                                <m:t>3</m:t>
+                              </m:r>
+                            </m:sub>
+                            <m:sup>
+                              <m:r>
+                                <a:rPr lang="en-US" sz="1800" i="1">
+                                  <a:effectLst/>
+                                  <a:latin typeface="Cambria Math" panose="02040503050406030204" pitchFamily="18" charset="0"/>
+                                  <a:ea typeface="Times New Roman" panose="02020603050405020304" pitchFamily="18" charset="0"/>
+                                  <a:cs typeface="Calibri" panose="020F0502020204030204" pitchFamily="34" charset="0"/>
+                                </a:rPr>
+                                <m:t>𝑣</m:t>
+                              </m:r>
+                            </m:sup>
+                          </m:sSubSup>
+                          <m:r>
+                            <a:rPr lang="en-US" sz="1800" i="1">
+                              <a:effectLst/>
+                              <a:latin typeface="Cambria Math" panose="02040503050406030204" pitchFamily="18" charset="0"/>
+                              <a:ea typeface="Times New Roman" panose="02020603050405020304" pitchFamily="18" charset="0"/>
+                              <a:cs typeface="Calibri" panose="020F0502020204030204" pitchFamily="34" charset="0"/>
+                            </a:rPr>
+                            <m:t>+</m:t>
+                          </m:r>
+                          <m:sSubSup>
+                            <m:sSubSupPr>
+                              <m:ctrlPr>
+                                <a:rPr lang="ru-RU" sz="1800" i="1">
+                                  <a:effectLst/>
+                                  <a:latin typeface="Cambria Math" panose="02040503050406030204" pitchFamily="18" charset="0"/>
+                                  <a:ea typeface="Times New Roman" panose="02020603050405020304" pitchFamily="18" charset="0"/>
+                                  <a:cs typeface="Calibri" panose="020F0502020204030204" pitchFamily="34" charset="0"/>
+                                </a:rPr>
+                              </m:ctrlPr>
+                            </m:sSubSupPr>
+                            <m:e>
+                              <m:r>
+                                <a:rPr lang="en-US" sz="1800" i="1">
+                                  <a:effectLst/>
+                                  <a:latin typeface="Cambria Math" panose="02040503050406030204" pitchFamily="18" charset="0"/>
+                                  <a:ea typeface="Times New Roman" panose="02020603050405020304" pitchFamily="18" charset="0"/>
+                                  <a:cs typeface="Calibri" panose="020F0502020204030204" pitchFamily="34" charset="0"/>
+                                </a:rPr>
+                                <m:t>𝑘</m:t>
+                              </m:r>
+                            </m:e>
+                            <m:sub>
+                              <m:r>
+                                <a:rPr lang="en-US" sz="1800" i="1">
+                                  <a:effectLst/>
+                                  <a:latin typeface="Cambria Math" panose="02040503050406030204" pitchFamily="18" charset="0"/>
+                                  <a:ea typeface="Times New Roman" panose="02020603050405020304" pitchFamily="18" charset="0"/>
+                                  <a:cs typeface="Calibri" panose="020F0502020204030204" pitchFamily="34" charset="0"/>
+                                </a:rPr>
+                                <m:t>4</m:t>
+                              </m:r>
+                            </m:sub>
+                            <m:sup>
+                              <m:r>
+                                <a:rPr lang="en-US" sz="1800" i="1">
+                                  <a:effectLst/>
+                                  <a:latin typeface="Cambria Math" panose="02040503050406030204" pitchFamily="18" charset="0"/>
+                                  <a:ea typeface="Times New Roman" panose="02020603050405020304" pitchFamily="18" charset="0"/>
+                                  <a:cs typeface="Calibri" panose="020F0502020204030204" pitchFamily="34" charset="0"/>
+                                </a:rPr>
+                                <m:t>𝑣</m:t>
+                              </m:r>
+                            </m:sup>
+                          </m:sSubSup>
+                        </m:e>
+                      </m:d>
+                    </m:oMath>
+                  </m:oMathPara>
+                </a14:m>
+                <a:endParaRPr lang="ru-RU" sz="1800" dirty="0">
+                  <a:effectLst/>
+                  <a:latin typeface="Times New Roman" panose="02020603050405020304" pitchFamily="18" charset="0"/>
+                  <a:ea typeface="Times New Roman" panose="02020603050405020304" pitchFamily="18" charset="0"/>
+                </a:endParaRPr>
+              </a:p>
+              <a:p>
+                <a:pPr>
+                  <a:spcAft>
+                    <a:spcPts val="600"/>
+                  </a:spcAft>
+                </a:pPr>
+                <a:r>
+                  <a:rPr lang="ru-RU" sz="1800" dirty="0">
+                    <a:effectLst/>
+                    <a:latin typeface="Calibri" panose="020F0502020204030204" pitchFamily="34" charset="0"/>
+                    <a:ea typeface="Times New Roman" panose="02020603050405020304" pitchFamily="18" charset="0"/>
+                  </a:rPr>
+                  <a:t>- </a:t>
+                </a:r>
+                <a14:m>
+                  <m:oMath xmlns:m="http://schemas.openxmlformats.org/officeDocument/2006/math">
+                    <m:sSubSup>
+                      <m:sSubSupPr>
+                        <m:ctrlPr>
+                          <a:rPr lang="ru-RU" sz="1800" i="1">
+                            <a:effectLst/>
+                            <a:latin typeface="Cambria Math" panose="02040503050406030204" pitchFamily="18" charset="0"/>
+                            <a:ea typeface="Times New Roman" panose="02020603050405020304" pitchFamily="18" charset="0"/>
+                            <a:cs typeface="Calibri" panose="020F0502020204030204" pitchFamily="34" charset="0"/>
+                          </a:rPr>
+                        </m:ctrlPr>
+                      </m:sSubSupPr>
+                      <m:e>
+                        <m:r>
+                          <a:rPr lang="ru-RU" sz="1800" i="1">
+                            <a:effectLst/>
+                            <a:latin typeface="Cambria Math" panose="02040503050406030204" pitchFamily="18" charset="0"/>
+                            <a:ea typeface="Times New Roman" panose="02020603050405020304" pitchFamily="18" charset="0"/>
+                            <a:cs typeface="Calibri" panose="020F0502020204030204" pitchFamily="34" charset="0"/>
+                          </a:rPr>
+                          <m:t>𝑘</m:t>
+                        </m:r>
+                      </m:e>
+                      <m:sub>
+                        <m:r>
+                          <a:rPr lang="ru-RU" sz="1800" i="1">
+                            <a:effectLst/>
+                            <a:latin typeface="Cambria Math" panose="02040503050406030204" pitchFamily="18" charset="0"/>
+                            <a:ea typeface="Times New Roman" panose="02020603050405020304" pitchFamily="18" charset="0"/>
+                            <a:cs typeface="Calibri" panose="020F0502020204030204" pitchFamily="34" charset="0"/>
+                          </a:rPr>
+                          <m:t>𝑖</m:t>
+                        </m:r>
+                      </m:sub>
+                      <m:sup>
+                        <m:r>
+                          <a:rPr lang="ru-RU" sz="1800" i="1">
+                            <a:effectLst/>
+                            <a:latin typeface="Cambria Math" panose="02040503050406030204" pitchFamily="18" charset="0"/>
+                            <a:ea typeface="Times New Roman" panose="02020603050405020304" pitchFamily="18" charset="0"/>
+                            <a:cs typeface="Calibri" panose="020F0502020204030204" pitchFamily="34" charset="0"/>
+                          </a:rPr>
+                          <m:t>h</m:t>
+                        </m:r>
+                      </m:sup>
+                    </m:sSubSup>
+                  </m:oMath>
+                </a14:m>
+                <a:r>
+                  <a:rPr lang="ru-RU" sz="1800" dirty="0">
+                    <a:effectLst/>
+                    <a:latin typeface="Calibri" panose="020F0502020204030204" pitchFamily="34" charset="0"/>
+                    <a:ea typeface="Times New Roman" panose="02020603050405020304" pitchFamily="18" charset="0"/>
+                  </a:rPr>
+                  <a:t> — промежуточные приращения высоты (м/с)  </a:t>
+                </a:r>
+                <a:endParaRPr lang="ru-RU" sz="1800" dirty="0">
+                  <a:effectLst/>
+                  <a:latin typeface="Times New Roman" panose="02020603050405020304" pitchFamily="18" charset="0"/>
+                  <a:ea typeface="Times New Roman" panose="02020603050405020304" pitchFamily="18" charset="0"/>
+                </a:endParaRPr>
+              </a:p>
+              <a:p>
+                <a:pPr>
+                  <a:spcAft>
+                    <a:spcPts val="600"/>
+                  </a:spcAft>
+                </a:pPr>
+                <a:r>
+                  <a:rPr lang="ru-RU" sz="1800" dirty="0">
+                    <a:effectLst/>
+                    <a:latin typeface="Calibri" panose="020F0502020204030204" pitchFamily="34" charset="0"/>
+                    <a:ea typeface="Times New Roman" panose="02020603050405020304" pitchFamily="18" charset="0"/>
+                  </a:rPr>
+                  <a:t>- </a:t>
+                </a:r>
+                <a14:m>
+                  <m:oMath xmlns:m="http://schemas.openxmlformats.org/officeDocument/2006/math">
+                    <m:sSubSup>
+                      <m:sSubSupPr>
+                        <m:ctrlPr>
+                          <a:rPr lang="ru-RU" sz="1800" i="1">
+                            <a:effectLst/>
+                            <a:latin typeface="Cambria Math" panose="02040503050406030204" pitchFamily="18" charset="0"/>
+                            <a:ea typeface="Times New Roman" panose="02020603050405020304" pitchFamily="18" charset="0"/>
+                            <a:cs typeface="Calibri" panose="020F0502020204030204" pitchFamily="34" charset="0"/>
+                          </a:rPr>
+                        </m:ctrlPr>
+                      </m:sSubSupPr>
+                      <m:e>
+                        <m:r>
+                          <a:rPr lang="ru-RU" sz="1800" i="1">
+                            <a:effectLst/>
+                            <a:latin typeface="Cambria Math" panose="02040503050406030204" pitchFamily="18" charset="0"/>
+                            <a:ea typeface="Times New Roman" panose="02020603050405020304" pitchFamily="18" charset="0"/>
+                            <a:cs typeface="Calibri" panose="020F0502020204030204" pitchFamily="34" charset="0"/>
+                          </a:rPr>
+                          <m:t>𝑘</m:t>
+                        </m:r>
+                      </m:e>
+                      <m:sub>
+                        <m:r>
+                          <a:rPr lang="ru-RU" sz="1800" i="1">
+                            <a:effectLst/>
+                            <a:latin typeface="Cambria Math" panose="02040503050406030204" pitchFamily="18" charset="0"/>
+                            <a:ea typeface="Times New Roman" panose="02020603050405020304" pitchFamily="18" charset="0"/>
+                            <a:cs typeface="Calibri" panose="020F0502020204030204" pitchFamily="34" charset="0"/>
+                          </a:rPr>
+                          <m:t>𝑖</m:t>
+                        </m:r>
+                      </m:sub>
+                      <m:sup>
+                        <m:r>
+                          <a:rPr lang="ru-RU" sz="1800" i="1">
+                            <a:effectLst/>
+                            <a:latin typeface="Cambria Math" panose="02040503050406030204" pitchFamily="18" charset="0"/>
+                            <a:ea typeface="Times New Roman" panose="02020603050405020304" pitchFamily="18" charset="0"/>
+                            <a:cs typeface="Calibri" panose="020F0502020204030204" pitchFamily="34" charset="0"/>
+                          </a:rPr>
+                          <m:t>𝑣</m:t>
+                        </m:r>
+                      </m:sup>
+                    </m:sSubSup>
+                  </m:oMath>
+                </a14:m>
+                <a:r>
+                  <a:rPr lang="ru-RU" sz="1800" dirty="0">
+                    <a:effectLst/>
+                    <a:latin typeface="Calibri" panose="020F0502020204030204" pitchFamily="34" charset="0"/>
+                    <a:ea typeface="Times New Roman" panose="02020603050405020304" pitchFamily="18" charset="0"/>
+                  </a:rPr>
+                  <a:t> — промежуточные приращения скорости (м/с²)  </a:t>
+                </a:r>
+                <a:endParaRPr lang="ru-RU" sz="1800" dirty="0">
+                  <a:effectLst/>
+                  <a:latin typeface="Times New Roman" panose="02020603050405020304" pitchFamily="18" charset="0"/>
+                  <a:ea typeface="Times New Roman" panose="02020603050405020304" pitchFamily="18" charset="0"/>
+                </a:endParaRPr>
+              </a:p>
+              <a:p>
+                <a:pPr>
+                  <a:spcAft>
+                    <a:spcPts val="600"/>
+                  </a:spcAft>
+                </a:pPr>
+                <a:r>
+                  <a:rPr lang="ru-RU" sz="1800" dirty="0">
+                    <a:effectLst/>
+                    <a:latin typeface="Calibri" panose="020F0502020204030204" pitchFamily="34" charset="0"/>
+                    <a:ea typeface="Times New Roman" panose="02020603050405020304" pitchFamily="18" charset="0"/>
+                  </a:rPr>
+                  <a:t>- </a:t>
+                </a:r>
+                <a14:m>
+                  <m:oMath xmlns:m="http://schemas.openxmlformats.org/officeDocument/2006/math">
+                    <m:r>
+                      <a:rPr lang="ru-RU" sz="1800" i="1">
+                        <a:effectLst/>
+                        <a:latin typeface="Cambria Math" panose="02040503050406030204" pitchFamily="18" charset="0"/>
+                        <a:ea typeface="Times New Roman" panose="02020603050405020304" pitchFamily="18" charset="0"/>
+                        <a:cs typeface="Calibri" panose="020F0502020204030204" pitchFamily="34" charset="0"/>
+                      </a:rPr>
+                      <m:t>𝑎</m:t>
+                    </m:r>
+                  </m:oMath>
+                </a14:m>
+                <a:r>
+                  <a:rPr lang="ru-RU" sz="1800" dirty="0">
+                    <a:effectLst/>
+                    <a:latin typeface="Calibri" panose="020F0502020204030204" pitchFamily="34" charset="0"/>
+                    <a:ea typeface="Times New Roman" panose="02020603050405020304" pitchFamily="18" charset="0"/>
+                  </a:rPr>
+                  <a:t> — ускорение на промежуточном состоянии (м/с²)  </a:t>
+                </a:r>
+                <a:endParaRPr lang="ru-RU" sz="1800" dirty="0">
+                  <a:effectLst/>
+                  <a:latin typeface="Times New Roman" panose="02020603050405020304" pitchFamily="18" charset="0"/>
+                  <a:ea typeface="Times New Roman" panose="02020603050405020304" pitchFamily="18" charset="0"/>
+                </a:endParaRPr>
+              </a:p>
+              <a:p>
+                <a:pPr>
+                  <a:spcAft>
+                    <a:spcPts val="600"/>
+                  </a:spcAft>
+                </a:pPr>
+                <a:r>
+                  <a:rPr lang="ru-RU" sz="1800" dirty="0">
+                    <a:effectLst/>
+                    <a:latin typeface="Calibri" panose="020F0502020204030204" pitchFamily="34" charset="0"/>
+                    <a:ea typeface="Times New Roman" panose="02020603050405020304" pitchFamily="18" charset="0"/>
+                  </a:rPr>
+                  <a:t>- </a:t>
+                </a:r>
+                <a14:m>
+                  <m:oMath xmlns:m="http://schemas.openxmlformats.org/officeDocument/2006/math">
+                    <m:r>
+                      <m:rPr>
+                        <m:sty m:val="p"/>
+                      </m:rPr>
+                      <a:rPr lang="ru-RU" sz="1800">
+                        <a:effectLst/>
+                        <a:latin typeface="Cambria Math" panose="02040503050406030204" pitchFamily="18" charset="0"/>
+                        <a:ea typeface="Times New Roman" panose="02020603050405020304" pitchFamily="18" charset="0"/>
+                        <a:cs typeface="Calibri" panose="020F0502020204030204" pitchFamily="34" charset="0"/>
+                      </a:rPr>
+                      <m:t>Δ</m:t>
+                    </m:r>
+                    <m:r>
+                      <a:rPr lang="ru-RU" sz="1800" i="1">
+                        <a:effectLst/>
+                        <a:latin typeface="Cambria Math" panose="02040503050406030204" pitchFamily="18" charset="0"/>
+                        <a:ea typeface="Times New Roman" panose="02020603050405020304" pitchFamily="18" charset="0"/>
+                        <a:cs typeface="Calibri" panose="020F0502020204030204" pitchFamily="34" charset="0"/>
+                      </a:rPr>
+                      <m:t>𝑡</m:t>
+                    </m:r>
+                  </m:oMath>
+                </a14:m>
+                <a:r>
+                  <a:rPr lang="ru-RU" sz="1800" dirty="0">
+                    <a:effectLst/>
+                    <a:latin typeface="Calibri" panose="020F0502020204030204" pitchFamily="34" charset="0"/>
+                    <a:ea typeface="Times New Roman" panose="02020603050405020304" pitchFamily="18" charset="0"/>
+                  </a:rPr>
+                  <a:t> — шаг по времени (с)  </a:t>
+                </a:r>
+                <a:endParaRPr lang="ru-RU" sz="1800" dirty="0">
+                  <a:effectLst/>
+                  <a:latin typeface="Times New Roman" panose="02020603050405020304" pitchFamily="18" charset="0"/>
+                  <a:ea typeface="Times New Roman" panose="02020603050405020304" pitchFamily="18" charset="0"/>
+                </a:endParaRPr>
+              </a:p>
+            </p:txBody>
+          </p:sp>
+        </mc:Choice>
+        <mc:Fallback>
+          <p:sp>
+            <p:nvSpPr>
+              <p:cNvPr id="8" name="TextBox 7">
+                <a:extLst>
+                  <a:ext uri="{FF2B5EF4-FFF2-40B4-BE49-F238E27FC236}">
+                    <a16:creationId xmlns:a16="http://schemas.microsoft.com/office/drawing/2014/main" id="{F8CFBDAA-B845-4C53-8511-67F56157498B}"/>
+                  </a:ext>
+                </a:extLst>
+              </p:cNvPr>
+              <p:cNvSpPr txBox="1">
+                <a:spLocks noRot="1" noChangeAspect="1" noMove="1" noResize="1" noEditPoints="1" noAdjustHandles="1" noChangeArrowheads="1" noChangeShapeType="1" noTextEdit="1"/>
+              </p:cNvSpPr>
+              <p:nvPr/>
+            </p:nvSpPr>
+            <p:spPr>
+              <a:xfrm>
+                <a:off x="4953836" y="311973"/>
+                <a:ext cx="5546691" cy="5775620"/>
+              </a:xfrm>
+              <a:prstGeom prst="rect">
+                <a:avLst/>
+              </a:prstGeom>
+              <a:blipFill>
+                <a:blip r:embed="rId2"/>
+                <a:stretch>
+                  <a:fillRect l="-877" t="-421" r="-110" b="-632"/>
+                </a:stretch>
+              </a:blipFill>
+              <a:ln>
+                <a:solidFill>
+                  <a:schemeClr val="tx1">
+                    <a:lumMod val="50000"/>
+                    <a:lumOff val="50000"/>
+                  </a:schemeClr>
+                </a:solidFill>
+              </a:ln>
+            </p:spPr>
+            <p:txBody>
+              <a:bodyPr/>
+              <a:lstStyle/>
+              <a:p>
+                <a:r>
+                  <a:rPr lang="ru-RU">
+                    <a:noFill/>
+                  </a:rPr>
+                  <a:t> </a:t>
+                </a:r>
+              </a:p>
+            </p:txBody>
+          </p:sp>
+        </mc:Fallback>
+      </mc:AlternateContent>
+      <mc:AlternateContent xmlns:mc="http://schemas.openxmlformats.org/markup-compatibility/2006">
+        <mc:Choice xmlns:a14="http://schemas.microsoft.com/office/drawing/2010/main" Requires="a14">
+          <p:sp>
+            <p:nvSpPr>
+              <p:cNvPr id="15" name="TextBox 14">
+                <a:extLst>
+                  <a:ext uri="{FF2B5EF4-FFF2-40B4-BE49-F238E27FC236}">
+                    <a16:creationId xmlns:a16="http://schemas.microsoft.com/office/drawing/2014/main" id="{A7010AF4-E67F-4CE0-A7C0-A9F5264FE515}"/>
+                  </a:ext>
+                </a:extLst>
+              </p:cNvPr>
+              <p:cNvSpPr txBox="1"/>
+              <p:nvPr/>
+            </p:nvSpPr>
+            <p:spPr>
+              <a:xfrm>
+                <a:off x="261624" y="191393"/>
+                <a:ext cx="4491246" cy="3466205"/>
+              </a:xfrm>
+              <a:prstGeom prst="rect">
+                <a:avLst/>
+              </a:prstGeom>
+              <a:noFill/>
+              <a:ln>
+                <a:solidFill>
+                  <a:schemeClr val="tx1">
+                    <a:lumMod val="50000"/>
+                    <a:lumOff val="50000"/>
+                  </a:schemeClr>
+                </a:solidFill>
+              </a:ln>
+            </p:spPr>
+            <p:txBody>
+              <a:bodyPr wrap="square">
+                <a:spAutoFit/>
+              </a:bodyPr>
+              <a:lstStyle/>
+              <a:p>
+                <a:pPr>
+                  <a:spcAft>
+                    <a:spcPts val="600"/>
+                  </a:spcAft>
+                </a:pPr>
+                <a:r>
+                  <a:rPr lang="ru-RU" sz="1800" b="1" dirty="0">
+                    <a:effectLst/>
+                    <a:latin typeface="Calibri" panose="020F0502020204030204" pitchFamily="34" charset="0"/>
+                    <a:ea typeface="Times New Roman" panose="02020603050405020304" pitchFamily="18" charset="0"/>
+                  </a:rPr>
+                  <a:t>Тяга на высоте из тяги на уровне моря и в вакууме</a:t>
+                </a:r>
+                <a:endParaRPr lang="ru-RU" sz="1800" dirty="0">
+                  <a:effectLst/>
+                  <a:latin typeface="Times New Roman" panose="02020603050405020304" pitchFamily="18" charset="0"/>
+                  <a:ea typeface="Times New Roman" panose="02020603050405020304" pitchFamily="18" charset="0"/>
+                </a:endParaRPr>
+              </a:p>
+              <a:p>
+                <a:pPr>
+                  <a:spcAft>
+                    <a:spcPts val="600"/>
+                  </a:spcAft>
+                </a:pPr>
+                <a14:m>
+                  <m:oMathPara xmlns:m="http://schemas.openxmlformats.org/officeDocument/2006/math">
+                    <m:oMathParaPr>
+                      <m:jc m:val="centerGroup"/>
+                    </m:oMathParaPr>
+                    <m:oMath xmlns:m="http://schemas.openxmlformats.org/officeDocument/2006/math">
+                      <m:r>
+                        <a:rPr lang="en-US" sz="1800" i="1">
+                          <a:effectLst/>
+                          <a:latin typeface="Cambria Math" panose="02040503050406030204" pitchFamily="18" charset="0"/>
+                          <a:ea typeface="Times New Roman" panose="02020603050405020304" pitchFamily="18" charset="0"/>
+                          <a:cs typeface="Calibri" panose="020F0502020204030204" pitchFamily="34" charset="0"/>
+                        </a:rPr>
+                        <m:t>𝐹</m:t>
+                      </m:r>
+                      <m:d>
+                        <m:dPr>
+                          <m:ctrlPr>
+                            <a:rPr lang="ru-RU" sz="1800" i="1">
+                              <a:effectLst/>
+                              <a:latin typeface="Cambria Math" panose="02040503050406030204" pitchFamily="18" charset="0"/>
+                              <a:ea typeface="Times New Roman" panose="02020603050405020304" pitchFamily="18" charset="0"/>
+                              <a:cs typeface="Calibri" panose="020F0502020204030204" pitchFamily="34" charset="0"/>
+                            </a:rPr>
+                          </m:ctrlPr>
+                        </m:dPr>
+                        <m:e>
+                          <m:r>
+                            <a:rPr lang="en-US" sz="1800" i="1">
+                              <a:effectLst/>
+                              <a:latin typeface="Cambria Math" panose="02040503050406030204" pitchFamily="18" charset="0"/>
+                              <a:ea typeface="Times New Roman" panose="02020603050405020304" pitchFamily="18" charset="0"/>
+                              <a:cs typeface="Calibri" panose="020F0502020204030204" pitchFamily="34" charset="0"/>
+                            </a:rPr>
+                            <m:t>h</m:t>
+                          </m:r>
+                        </m:e>
+                      </m:d>
+                      <m:r>
+                        <a:rPr lang="en-US" sz="1800" i="1">
+                          <a:effectLst/>
+                          <a:latin typeface="Cambria Math" panose="02040503050406030204" pitchFamily="18" charset="0"/>
+                          <a:ea typeface="Times New Roman" panose="02020603050405020304" pitchFamily="18" charset="0"/>
+                          <a:cs typeface="Calibri" panose="020F0502020204030204" pitchFamily="34" charset="0"/>
+                        </a:rPr>
+                        <m:t>=</m:t>
+                      </m:r>
+                      <m:sSub>
+                        <m:sSubPr>
+                          <m:ctrlPr>
+                            <a:rPr lang="ru-RU" sz="1800" i="1">
+                              <a:effectLst/>
+                              <a:latin typeface="Cambria Math" panose="02040503050406030204" pitchFamily="18" charset="0"/>
+                              <a:ea typeface="Times New Roman" panose="02020603050405020304" pitchFamily="18" charset="0"/>
+                              <a:cs typeface="Calibri" panose="020F0502020204030204" pitchFamily="34" charset="0"/>
+                            </a:rPr>
+                          </m:ctrlPr>
+                        </m:sSubPr>
+                        <m:e>
+                          <m:r>
+                            <a:rPr lang="en-US" sz="1800" i="1">
+                              <a:effectLst/>
+                              <a:latin typeface="Cambria Math" panose="02040503050406030204" pitchFamily="18" charset="0"/>
+                              <a:ea typeface="Times New Roman" panose="02020603050405020304" pitchFamily="18" charset="0"/>
+                              <a:cs typeface="Calibri" panose="020F0502020204030204" pitchFamily="34" charset="0"/>
+                            </a:rPr>
+                            <m:t>𝐹</m:t>
+                          </m:r>
+                        </m:e>
+                        <m:sub>
+                          <m:r>
+                            <m:rPr>
+                              <m:nor/>
+                            </m:rPr>
+                            <a:rPr lang="en-US" sz="1800">
+                              <a:effectLst/>
+                              <a:latin typeface="Cambria Math" panose="02040503050406030204" pitchFamily="18" charset="0"/>
+                              <a:ea typeface="Times New Roman" panose="02020603050405020304" pitchFamily="18" charset="0"/>
+                              <a:cs typeface="Calibri" panose="020F0502020204030204" pitchFamily="34" charset="0"/>
+                            </a:rPr>
+                            <m:t>vac</m:t>
+                          </m:r>
+                        </m:sub>
+                      </m:sSub>
+                      <m:r>
+                        <a:rPr lang="en-US" sz="1800" i="1">
+                          <a:effectLst/>
+                          <a:latin typeface="Cambria Math" panose="02040503050406030204" pitchFamily="18" charset="0"/>
+                          <a:ea typeface="Times New Roman" panose="02020603050405020304" pitchFamily="18" charset="0"/>
+                          <a:cs typeface="Calibri" panose="020F0502020204030204" pitchFamily="34" charset="0"/>
+                        </a:rPr>
+                        <m:t>−</m:t>
+                      </m:r>
+                      <m:sSub>
+                        <m:sSubPr>
+                          <m:ctrlPr>
+                            <a:rPr lang="ru-RU" sz="1800" i="1">
+                              <a:effectLst/>
+                              <a:latin typeface="Cambria Math" panose="02040503050406030204" pitchFamily="18" charset="0"/>
+                              <a:ea typeface="Times New Roman" panose="02020603050405020304" pitchFamily="18" charset="0"/>
+                              <a:cs typeface="Calibri" panose="020F0502020204030204" pitchFamily="34" charset="0"/>
+                            </a:rPr>
+                          </m:ctrlPr>
+                        </m:sSubPr>
+                        <m:e>
+                          <m:r>
+                            <a:rPr lang="en-US" sz="1800" i="1">
+                              <a:effectLst/>
+                              <a:latin typeface="Cambria Math" panose="02040503050406030204" pitchFamily="18" charset="0"/>
+                              <a:ea typeface="Times New Roman" panose="02020603050405020304" pitchFamily="18" charset="0"/>
+                              <a:cs typeface="Calibri" panose="020F0502020204030204" pitchFamily="34" charset="0"/>
+                            </a:rPr>
+                            <m:t>𝑝</m:t>
+                          </m:r>
+                        </m:e>
+                        <m:sub>
+                          <m:r>
+                            <a:rPr lang="en-US" sz="1800" i="1">
+                              <a:effectLst/>
+                              <a:latin typeface="Cambria Math" panose="02040503050406030204" pitchFamily="18" charset="0"/>
+                              <a:ea typeface="Times New Roman" panose="02020603050405020304" pitchFamily="18" charset="0"/>
+                              <a:cs typeface="Calibri" panose="020F0502020204030204" pitchFamily="34" charset="0"/>
+                            </a:rPr>
+                            <m:t>𝑎</m:t>
+                          </m:r>
+                        </m:sub>
+                      </m:sSub>
+                      <m:d>
+                        <m:dPr>
+                          <m:ctrlPr>
+                            <a:rPr lang="ru-RU" sz="1800" i="1">
+                              <a:effectLst/>
+                              <a:latin typeface="Cambria Math" panose="02040503050406030204" pitchFamily="18" charset="0"/>
+                              <a:ea typeface="Times New Roman" panose="02020603050405020304" pitchFamily="18" charset="0"/>
+                              <a:cs typeface="Calibri" panose="020F0502020204030204" pitchFamily="34" charset="0"/>
+                            </a:rPr>
+                          </m:ctrlPr>
+                        </m:dPr>
+                        <m:e>
+                          <m:r>
+                            <a:rPr lang="en-US" sz="1800" i="1">
+                              <a:effectLst/>
+                              <a:latin typeface="Cambria Math" panose="02040503050406030204" pitchFamily="18" charset="0"/>
+                              <a:ea typeface="Times New Roman" panose="02020603050405020304" pitchFamily="18" charset="0"/>
+                              <a:cs typeface="Calibri" panose="020F0502020204030204" pitchFamily="34" charset="0"/>
+                            </a:rPr>
+                            <m:t>h</m:t>
+                          </m:r>
+                        </m:e>
+                      </m:d>
+                      <m:r>
+                        <a:rPr lang="en-US" sz="1800">
+                          <a:effectLst/>
+                          <a:latin typeface="Cambria Math" panose="02040503050406030204" pitchFamily="18" charset="0"/>
+                          <a:ea typeface="Times New Roman" panose="02020603050405020304" pitchFamily="18" charset="0"/>
+                          <a:cs typeface="Calibri" panose="020F0502020204030204" pitchFamily="34" charset="0"/>
+                        </a:rPr>
+                        <m:t>⋅</m:t>
+                      </m:r>
+                      <m:sSub>
+                        <m:sSubPr>
+                          <m:ctrlPr>
+                            <a:rPr lang="ru-RU" sz="1800" i="1">
+                              <a:effectLst/>
+                              <a:latin typeface="Cambria Math" panose="02040503050406030204" pitchFamily="18" charset="0"/>
+                              <a:ea typeface="Times New Roman" panose="02020603050405020304" pitchFamily="18" charset="0"/>
+                              <a:cs typeface="Calibri" panose="020F0502020204030204" pitchFamily="34" charset="0"/>
+                            </a:rPr>
+                          </m:ctrlPr>
+                        </m:sSubPr>
+                        <m:e>
+                          <m:r>
+                            <a:rPr lang="en-US" sz="1800" i="1">
+                              <a:effectLst/>
+                              <a:latin typeface="Cambria Math" panose="02040503050406030204" pitchFamily="18" charset="0"/>
+                              <a:ea typeface="Times New Roman" panose="02020603050405020304" pitchFamily="18" charset="0"/>
+                              <a:cs typeface="Calibri" panose="020F0502020204030204" pitchFamily="34" charset="0"/>
+                            </a:rPr>
+                            <m:t>𝐴</m:t>
+                          </m:r>
+                        </m:e>
+                        <m:sub>
+                          <m:r>
+                            <a:rPr lang="en-US" sz="1800" i="1">
+                              <a:effectLst/>
+                              <a:latin typeface="Cambria Math" panose="02040503050406030204" pitchFamily="18" charset="0"/>
+                              <a:ea typeface="Times New Roman" panose="02020603050405020304" pitchFamily="18" charset="0"/>
+                              <a:cs typeface="Calibri" panose="020F0502020204030204" pitchFamily="34" charset="0"/>
+                            </a:rPr>
+                            <m:t>𝑒</m:t>
+                          </m:r>
+                        </m:sub>
+                      </m:sSub>
+                    </m:oMath>
+                  </m:oMathPara>
+                </a14:m>
+                <a:endParaRPr lang="ru-RU" sz="1800" dirty="0">
+                  <a:effectLst/>
+                  <a:latin typeface="Times New Roman" panose="02020603050405020304" pitchFamily="18" charset="0"/>
+                  <a:ea typeface="Times New Roman" panose="02020603050405020304" pitchFamily="18" charset="0"/>
+                </a:endParaRPr>
+              </a:p>
+              <a:p>
+                <a:pPr>
+                  <a:spcAft>
+                    <a:spcPts val="600"/>
+                  </a:spcAft>
+                </a:pPr>
+                <a14:m>
+                  <m:oMathPara xmlns:m="http://schemas.openxmlformats.org/officeDocument/2006/math">
+                    <m:oMathParaPr>
+                      <m:jc m:val="centerGroup"/>
+                    </m:oMathParaPr>
+                    <m:oMath xmlns:m="http://schemas.openxmlformats.org/officeDocument/2006/math">
+                      <m:sSub>
+                        <m:sSubPr>
+                          <m:ctrlPr>
+                            <a:rPr lang="ru-RU" sz="1800" i="1">
+                              <a:effectLst/>
+                              <a:latin typeface="Cambria Math" panose="02040503050406030204" pitchFamily="18" charset="0"/>
+                              <a:ea typeface="Times New Roman" panose="02020603050405020304" pitchFamily="18" charset="0"/>
+                              <a:cs typeface="Calibri" panose="020F0502020204030204" pitchFamily="34" charset="0"/>
+                            </a:rPr>
+                          </m:ctrlPr>
+                        </m:sSubPr>
+                        <m:e>
+                          <m:r>
+                            <a:rPr lang="en-US" sz="1800" i="1">
+                              <a:effectLst/>
+                              <a:latin typeface="Cambria Math" panose="02040503050406030204" pitchFamily="18" charset="0"/>
+                              <a:ea typeface="Times New Roman" panose="02020603050405020304" pitchFamily="18" charset="0"/>
+                              <a:cs typeface="Calibri" panose="020F0502020204030204" pitchFamily="34" charset="0"/>
+                            </a:rPr>
+                            <m:t>𝐴</m:t>
+                          </m:r>
+                        </m:e>
+                        <m:sub>
+                          <m:r>
+                            <a:rPr lang="en-US" sz="1800" i="1">
+                              <a:effectLst/>
+                              <a:latin typeface="Cambria Math" panose="02040503050406030204" pitchFamily="18" charset="0"/>
+                              <a:ea typeface="Times New Roman" panose="02020603050405020304" pitchFamily="18" charset="0"/>
+                              <a:cs typeface="Calibri" panose="020F0502020204030204" pitchFamily="34" charset="0"/>
+                            </a:rPr>
+                            <m:t>𝑒</m:t>
+                          </m:r>
+                        </m:sub>
+                      </m:sSub>
+                      <m:r>
+                        <a:rPr lang="en-US" sz="1800" i="1">
+                          <a:effectLst/>
+                          <a:latin typeface="Cambria Math" panose="02040503050406030204" pitchFamily="18" charset="0"/>
+                          <a:ea typeface="Times New Roman" panose="02020603050405020304" pitchFamily="18" charset="0"/>
+                          <a:cs typeface="Calibri" panose="020F0502020204030204" pitchFamily="34" charset="0"/>
+                        </a:rPr>
+                        <m:t>=</m:t>
+                      </m:r>
+                      <m:f>
+                        <m:fPr>
+                          <m:ctrlPr>
+                            <a:rPr lang="ru-RU" sz="1800" i="1">
+                              <a:effectLst/>
+                              <a:latin typeface="Cambria Math" panose="02040503050406030204" pitchFamily="18" charset="0"/>
+                              <a:ea typeface="Times New Roman" panose="02020603050405020304" pitchFamily="18" charset="0"/>
+                              <a:cs typeface="Calibri" panose="020F0502020204030204" pitchFamily="34" charset="0"/>
+                            </a:rPr>
+                          </m:ctrlPr>
+                        </m:fPr>
+                        <m:num>
+                          <m:sSub>
+                            <m:sSubPr>
+                              <m:ctrlPr>
+                                <a:rPr lang="ru-RU" sz="1800" i="1">
+                                  <a:effectLst/>
+                                  <a:latin typeface="Cambria Math" panose="02040503050406030204" pitchFamily="18" charset="0"/>
+                                  <a:ea typeface="Times New Roman" panose="02020603050405020304" pitchFamily="18" charset="0"/>
+                                  <a:cs typeface="Calibri" panose="020F0502020204030204" pitchFamily="34" charset="0"/>
+                                </a:rPr>
+                              </m:ctrlPr>
+                            </m:sSubPr>
+                            <m:e>
+                              <m:r>
+                                <a:rPr lang="en-US" sz="1800" i="1">
+                                  <a:effectLst/>
+                                  <a:latin typeface="Cambria Math" panose="02040503050406030204" pitchFamily="18" charset="0"/>
+                                  <a:ea typeface="Times New Roman" panose="02020603050405020304" pitchFamily="18" charset="0"/>
+                                  <a:cs typeface="Calibri" panose="020F0502020204030204" pitchFamily="34" charset="0"/>
+                                </a:rPr>
+                                <m:t>𝐹</m:t>
+                              </m:r>
+                            </m:e>
+                            <m:sub>
+                              <m:r>
+                                <m:rPr>
+                                  <m:nor/>
+                                </m:rPr>
+                                <a:rPr lang="en-US" sz="1800">
+                                  <a:effectLst/>
+                                  <a:latin typeface="Cambria Math" panose="02040503050406030204" pitchFamily="18" charset="0"/>
+                                  <a:ea typeface="Times New Roman" panose="02020603050405020304" pitchFamily="18" charset="0"/>
+                                  <a:cs typeface="Calibri" panose="020F0502020204030204" pitchFamily="34" charset="0"/>
+                                </a:rPr>
+                                <m:t>vac</m:t>
+                              </m:r>
+                            </m:sub>
+                          </m:sSub>
+                          <m:r>
+                            <a:rPr lang="en-US" sz="1800" i="1">
+                              <a:effectLst/>
+                              <a:latin typeface="Cambria Math" panose="02040503050406030204" pitchFamily="18" charset="0"/>
+                              <a:ea typeface="Times New Roman" panose="02020603050405020304" pitchFamily="18" charset="0"/>
+                              <a:cs typeface="Calibri" panose="020F0502020204030204" pitchFamily="34" charset="0"/>
+                            </a:rPr>
+                            <m:t>−</m:t>
+                          </m:r>
+                          <m:sSub>
+                            <m:sSubPr>
+                              <m:ctrlPr>
+                                <a:rPr lang="ru-RU" sz="1800" i="1">
+                                  <a:effectLst/>
+                                  <a:latin typeface="Cambria Math" panose="02040503050406030204" pitchFamily="18" charset="0"/>
+                                  <a:ea typeface="Times New Roman" panose="02020603050405020304" pitchFamily="18" charset="0"/>
+                                  <a:cs typeface="Calibri" panose="020F0502020204030204" pitchFamily="34" charset="0"/>
+                                </a:rPr>
+                              </m:ctrlPr>
+                            </m:sSubPr>
+                            <m:e>
+                              <m:r>
+                                <a:rPr lang="en-US" sz="1800" i="1">
+                                  <a:effectLst/>
+                                  <a:latin typeface="Cambria Math" panose="02040503050406030204" pitchFamily="18" charset="0"/>
+                                  <a:ea typeface="Times New Roman" panose="02020603050405020304" pitchFamily="18" charset="0"/>
+                                  <a:cs typeface="Calibri" panose="020F0502020204030204" pitchFamily="34" charset="0"/>
+                                </a:rPr>
+                                <m:t>𝐹</m:t>
+                              </m:r>
+                            </m:e>
+                            <m:sub>
+                              <m:r>
+                                <m:rPr>
+                                  <m:nor/>
+                                </m:rPr>
+                                <a:rPr lang="en-US" sz="1800">
+                                  <a:effectLst/>
+                                  <a:latin typeface="Cambria Math" panose="02040503050406030204" pitchFamily="18" charset="0"/>
+                                  <a:ea typeface="Times New Roman" panose="02020603050405020304" pitchFamily="18" charset="0"/>
+                                  <a:cs typeface="Calibri" panose="020F0502020204030204" pitchFamily="34" charset="0"/>
+                                </a:rPr>
+                                <m:t>sl</m:t>
+                              </m:r>
+                            </m:sub>
+                          </m:sSub>
+                        </m:num>
+                        <m:den>
+                          <m:sSub>
+                            <m:sSubPr>
+                              <m:ctrlPr>
+                                <a:rPr lang="ru-RU" sz="1800" i="1">
+                                  <a:effectLst/>
+                                  <a:latin typeface="Cambria Math" panose="02040503050406030204" pitchFamily="18" charset="0"/>
+                                  <a:ea typeface="Times New Roman" panose="02020603050405020304" pitchFamily="18" charset="0"/>
+                                  <a:cs typeface="Calibri" panose="020F0502020204030204" pitchFamily="34" charset="0"/>
+                                </a:rPr>
+                              </m:ctrlPr>
+                            </m:sSubPr>
+                            <m:e>
+                              <m:r>
+                                <a:rPr lang="en-US" sz="1800" i="1">
+                                  <a:effectLst/>
+                                  <a:latin typeface="Cambria Math" panose="02040503050406030204" pitchFamily="18" charset="0"/>
+                                  <a:ea typeface="Times New Roman" panose="02020603050405020304" pitchFamily="18" charset="0"/>
+                                  <a:cs typeface="Calibri" panose="020F0502020204030204" pitchFamily="34" charset="0"/>
+                                </a:rPr>
+                                <m:t>𝑝</m:t>
+                              </m:r>
+                            </m:e>
+                            <m:sub>
+                              <m:r>
+                                <m:rPr>
+                                  <m:nor/>
+                                </m:rPr>
+                                <a:rPr lang="en-US" sz="1800">
+                                  <a:effectLst/>
+                                  <a:latin typeface="Cambria Math" panose="02040503050406030204" pitchFamily="18" charset="0"/>
+                                  <a:ea typeface="Times New Roman" panose="02020603050405020304" pitchFamily="18" charset="0"/>
+                                  <a:cs typeface="Calibri" panose="020F0502020204030204" pitchFamily="34" charset="0"/>
+                                </a:rPr>
+                                <m:t>sl</m:t>
+                              </m:r>
+                            </m:sub>
+                          </m:sSub>
+                        </m:den>
+                      </m:f>
+                    </m:oMath>
+                  </m:oMathPara>
+                </a14:m>
+                <a:endParaRPr lang="ru-RU" sz="1800" dirty="0">
+                  <a:effectLst/>
+                  <a:latin typeface="Times New Roman" panose="02020603050405020304" pitchFamily="18" charset="0"/>
+                  <a:ea typeface="Times New Roman" panose="02020603050405020304" pitchFamily="18" charset="0"/>
+                </a:endParaRPr>
+              </a:p>
+              <a:p>
+                <a:pPr>
+                  <a:spcAft>
+                    <a:spcPts val="600"/>
+                  </a:spcAft>
+                </a:pPr>
+                <a:r>
+                  <a:rPr lang="ru-RU" sz="1800" dirty="0">
+                    <a:effectLst/>
+                    <a:latin typeface="Calibri" panose="020F0502020204030204" pitchFamily="34" charset="0"/>
+                    <a:ea typeface="Times New Roman" panose="02020603050405020304" pitchFamily="18" charset="0"/>
+                  </a:rPr>
+                  <a:t>- </a:t>
+                </a:r>
+                <a14:m>
+                  <m:oMath xmlns:m="http://schemas.openxmlformats.org/officeDocument/2006/math">
+                    <m:r>
+                      <a:rPr lang="ru-RU" sz="1800" i="1">
+                        <a:effectLst/>
+                        <a:latin typeface="Cambria Math" panose="02040503050406030204" pitchFamily="18" charset="0"/>
+                        <a:ea typeface="Times New Roman" panose="02020603050405020304" pitchFamily="18" charset="0"/>
+                        <a:cs typeface="Calibri" panose="020F0502020204030204" pitchFamily="34" charset="0"/>
+                      </a:rPr>
+                      <m:t>𝐹</m:t>
+                    </m:r>
+                    <m:d>
+                      <m:dPr>
+                        <m:ctrlPr>
+                          <a:rPr lang="ru-RU" sz="1800" i="1">
+                            <a:effectLst/>
+                            <a:latin typeface="Cambria Math" panose="02040503050406030204" pitchFamily="18" charset="0"/>
+                            <a:ea typeface="Times New Roman" panose="02020603050405020304" pitchFamily="18" charset="0"/>
+                            <a:cs typeface="Calibri" panose="020F0502020204030204" pitchFamily="34" charset="0"/>
+                          </a:rPr>
+                        </m:ctrlPr>
+                      </m:dPr>
+                      <m:e>
+                        <m:r>
+                          <a:rPr lang="ru-RU" sz="1800" i="1">
+                            <a:effectLst/>
+                            <a:latin typeface="Cambria Math" panose="02040503050406030204" pitchFamily="18" charset="0"/>
+                            <a:ea typeface="Times New Roman" panose="02020603050405020304" pitchFamily="18" charset="0"/>
+                            <a:cs typeface="Calibri" panose="020F0502020204030204" pitchFamily="34" charset="0"/>
+                          </a:rPr>
+                          <m:t>h</m:t>
+                        </m:r>
+                      </m:e>
+                    </m:d>
+                  </m:oMath>
+                </a14:m>
+                <a:r>
+                  <a:rPr lang="ru-RU" sz="1800" dirty="0">
+                    <a:effectLst/>
+                    <a:latin typeface="Calibri" panose="020F0502020204030204" pitchFamily="34" charset="0"/>
+                    <a:ea typeface="Times New Roman" panose="02020603050405020304" pitchFamily="18" charset="0"/>
+                  </a:rPr>
+                  <a:t> — тяга на высоте </a:t>
+                </a:r>
+                <a14:m>
+                  <m:oMath xmlns:m="http://schemas.openxmlformats.org/officeDocument/2006/math">
+                    <m:r>
+                      <a:rPr lang="ru-RU" sz="1800" i="1">
+                        <a:effectLst/>
+                        <a:latin typeface="Cambria Math" panose="02040503050406030204" pitchFamily="18" charset="0"/>
+                        <a:ea typeface="Times New Roman" panose="02020603050405020304" pitchFamily="18" charset="0"/>
+                        <a:cs typeface="Calibri" panose="020F0502020204030204" pitchFamily="34" charset="0"/>
+                      </a:rPr>
+                      <m:t>h</m:t>
+                    </m:r>
+                  </m:oMath>
+                </a14:m>
+                <a:r>
+                  <a:rPr lang="ru-RU" sz="1800" dirty="0">
+                    <a:effectLst/>
+                    <a:latin typeface="Calibri" panose="020F0502020204030204" pitchFamily="34" charset="0"/>
+                    <a:ea typeface="Times New Roman" panose="02020603050405020304" pitchFamily="18" charset="0"/>
+                  </a:rPr>
+                  <a:t> (Н)  </a:t>
+                </a:r>
+                <a:endParaRPr lang="ru-RU" sz="1800" dirty="0">
+                  <a:effectLst/>
+                  <a:latin typeface="Times New Roman" panose="02020603050405020304" pitchFamily="18" charset="0"/>
+                  <a:ea typeface="Times New Roman" panose="02020603050405020304" pitchFamily="18" charset="0"/>
+                </a:endParaRPr>
+              </a:p>
+              <a:p>
+                <a:pPr>
+                  <a:spcAft>
+                    <a:spcPts val="600"/>
+                  </a:spcAft>
+                </a:pPr>
+                <a:r>
+                  <a:rPr lang="ru-RU" sz="1800" dirty="0">
+                    <a:effectLst/>
+                    <a:latin typeface="Calibri" panose="020F0502020204030204" pitchFamily="34" charset="0"/>
+                    <a:ea typeface="Times New Roman" panose="02020603050405020304" pitchFamily="18" charset="0"/>
+                  </a:rPr>
+                  <a:t>- </a:t>
+                </a:r>
+                <a14:m>
+                  <m:oMath xmlns:m="http://schemas.openxmlformats.org/officeDocument/2006/math">
+                    <m:sSub>
+                      <m:sSubPr>
+                        <m:ctrlPr>
+                          <a:rPr lang="ru-RU" sz="1800" i="1">
+                            <a:effectLst/>
+                            <a:latin typeface="Cambria Math" panose="02040503050406030204" pitchFamily="18" charset="0"/>
+                            <a:ea typeface="Times New Roman" panose="02020603050405020304" pitchFamily="18" charset="0"/>
+                            <a:cs typeface="Calibri" panose="020F0502020204030204" pitchFamily="34" charset="0"/>
+                          </a:rPr>
+                        </m:ctrlPr>
+                      </m:sSubPr>
+                      <m:e>
+                        <m:r>
+                          <a:rPr lang="ru-RU" sz="1800" i="1">
+                            <a:effectLst/>
+                            <a:latin typeface="Cambria Math" panose="02040503050406030204" pitchFamily="18" charset="0"/>
+                            <a:ea typeface="Times New Roman" panose="02020603050405020304" pitchFamily="18" charset="0"/>
+                            <a:cs typeface="Calibri" panose="020F0502020204030204" pitchFamily="34" charset="0"/>
+                          </a:rPr>
+                          <m:t>𝐹</m:t>
+                        </m:r>
+                      </m:e>
+                      <m:sub>
+                        <m:r>
+                          <m:rPr>
+                            <m:nor/>
+                          </m:rPr>
+                          <a:rPr lang="ru-RU" sz="1800">
+                            <a:effectLst/>
+                            <a:latin typeface="Cambria Math" panose="02040503050406030204" pitchFamily="18" charset="0"/>
+                            <a:ea typeface="Times New Roman" panose="02020603050405020304" pitchFamily="18" charset="0"/>
+                            <a:cs typeface="Calibri" panose="020F0502020204030204" pitchFamily="34" charset="0"/>
+                          </a:rPr>
+                          <m:t>vac</m:t>
+                        </m:r>
+                      </m:sub>
+                    </m:sSub>
+                  </m:oMath>
+                </a14:m>
+                <a:r>
+                  <a:rPr lang="ru-RU" sz="1800" dirty="0">
+                    <a:effectLst/>
+                    <a:latin typeface="Calibri" panose="020F0502020204030204" pitchFamily="34" charset="0"/>
+                    <a:ea typeface="Times New Roman" panose="02020603050405020304" pitchFamily="18" charset="0"/>
+                  </a:rPr>
+                  <a:t> — тяга в вакууме (Н)  </a:t>
+                </a:r>
+                <a:endParaRPr lang="ru-RU" sz="1800" dirty="0">
+                  <a:effectLst/>
+                  <a:latin typeface="Times New Roman" panose="02020603050405020304" pitchFamily="18" charset="0"/>
+                  <a:ea typeface="Times New Roman" panose="02020603050405020304" pitchFamily="18" charset="0"/>
+                </a:endParaRPr>
+              </a:p>
+              <a:p>
+                <a:pPr>
+                  <a:spcAft>
+                    <a:spcPts val="600"/>
+                  </a:spcAft>
+                </a:pPr>
+                <a:r>
+                  <a:rPr lang="ru-RU" sz="1800" dirty="0">
+                    <a:effectLst/>
+                    <a:latin typeface="Calibri" panose="020F0502020204030204" pitchFamily="34" charset="0"/>
+                    <a:ea typeface="Times New Roman" panose="02020603050405020304" pitchFamily="18" charset="0"/>
+                  </a:rPr>
+                  <a:t>- </a:t>
+                </a:r>
+                <a14:m>
+                  <m:oMath xmlns:m="http://schemas.openxmlformats.org/officeDocument/2006/math">
+                    <m:sSub>
+                      <m:sSubPr>
+                        <m:ctrlPr>
+                          <a:rPr lang="ru-RU" sz="1800" i="1">
+                            <a:effectLst/>
+                            <a:latin typeface="Cambria Math" panose="02040503050406030204" pitchFamily="18" charset="0"/>
+                            <a:ea typeface="Times New Roman" panose="02020603050405020304" pitchFamily="18" charset="0"/>
+                            <a:cs typeface="Calibri" panose="020F0502020204030204" pitchFamily="34" charset="0"/>
+                          </a:rPr>
+                        </m:ctrlPr>
+                      </m:sSubPr>
+                      <m:e>
+                        <m:r>
+                          <a:rPr lang="ru-RU" sz="1800" i="1">
+                            <a:effectLst/>
+                            <a:latin typeface="Cambria Math" panose="02040503050406030204" pitchFamily="18" charset="0"/>
+                            <a:ea typeface="Times New Roman" panose="02020603050405020304" pitchFamily="18" charset="0"/>
+                            <a:cs typeface="Calibri" panose="020F0502020204030204" pitchFamily="34" charset="0"/>
+                          </a:rPr>
+                          <m:t>𝐹</m:t>
+                        </m:r>
+                      </m:e>
+                      <m:sub>
+                        <m:r>
+                          <m:rPr>
+                            <m:nor/>
+                          </m:rPr>
+                          <a:rPr lang="ru-RU" sz="1800">
+                            <a:effectLst/>
+                            <a:latin typeface="Cambria Math" panose="02040503050406030204" pitchFamily="18" charset="0"/>
+                            <a:ea typeface="Times New Roman" panose="02020603050405020304" pitchFamily="18" charset="0"/>
+                            <a:cs typeface="Calibri" panose="020F0502020204030204" pitchFamily="34" charset="0"/>
+                          </a:rPr>
+                          <m:t>sl</m:t>
+                        </m:r>
+                      </m:sub>
+                    </m:sSub>
+                  </m:oMath>
+                </a14:m>
+                <a:r>
+                  <a:rPr lang="ru-RU" sz="1800" dirty="0">
+                    <a:effectLst/>
+                    <a:latin typeface="Calibri" panose="020F0502020204030204" pitchFamily="34" charset="0"/>
+                    <a:ea typeface="Times New Roman" panose="02020603050405020304" pitchFamily="18" charset="0"/>
+                  </a:rPr>
+                  <a:t> — тяга на уровне моря (Н)  </a:t>
+                </a:r>
+                <a:endParaRPr lang="ru-RU" sz="1800" dirty="0">
+                  <a:effectLst/>
+                  <a:latin typeface="Times New Roman" panose="02020603050405020304" pitchFamily="18" charset="0"/>
+                  <a:ea typeface="Times New Roman" panose="02020603050405020304" pitchFamily="18" charset="0"/>
+                </a:endParaRPr>
+              </a:p>
+              <a:p>
+                <a:pPr>
+                  <a:spcAft>
+                    <a:spcPts val="600"/>
+                  </a:spcAft>
+                </a:pPr>
+                <a:r>
+                  <a:rPr lang="ru-RU" sz="1800" dirty="0">
+                    <a:effectLst/>
+                    <a:latin typeface="Calibri" panose="020F0502020204030204" pitchFamily="34" charset="0"/>
+                    <a:ea typeface="Times New Roman" panose="02020603050405020304" pitchFamily="18" charset="0"/>
+                  </a:rPr>
+                  <a:t>- </a:t>
+                </a:r>
+                <a14:m>
+                  <m:oMath xmlns:m="http://schemas.openxmlformats.org/officeDocument/2006/math">
+                    <m:sSub>
+                      <m:sSubPr>
+                        <m:ctrlPr>
+                          <a:rPr lang="ru-RU" sz="1800" i="1">
+                            <a:effectLst/>
+                            <a:latin typeface="Cambria Math" panose="02040503050406030204" pitchFamily="18" charset="0"/>
+                            <a:ea typeface="Times New Roman" panose="02020603050405020304" pitchFamily="18" charset="0"/>
+                            <a:cs typeface="Calibri" panose="020F0502020204030204" pitchFamily="34" charset="0"/>
+                          </a:rPr>
+                        </m:ctrlPr>
+                      </m:sSubPr>
+                      <m:e>
+                        <m:r>
+                          <a:rPr lang="ru-RU" sz="1800" i="1">
+                            <a:effectLst/>
+                            <a:latin typeface="Cambria Math" panose="02040503050406030204" pitchFamily="18" charset="0"/>
+                            <a:ea typeface="Times New Roman" panose="02020603050405020304" pitchFamily="18" charset="0"/>
+                            <a:cs typeface="Calibri" panose="020F0502020204030204" pitchFamily="34" charset="0"/>
+                          </a:rPr>
+                          <m:t>𝑝</m:t>
+                        </m:r>
+                      </m:e>
+                      <m:sub>
+                        <m:r>
+                          <a:rPr lang="ru-RU" sz="1800" i="1">
+                            <a:effectLst/>
+                            <a:latin typeface="Cambria Math" panose="02040503050406030204" pitchFamily="18" charset="0"/>
+                            <a:ea typeface="Times New Roman" panose="02020603050405020304" pitchFamily="18" charset="0"/>
+                            <a:cs typeface="Calibri" panose="020F0502020204030204" pitchFamily="34" charset="0"/>
+                          </a:rPr>
+                          <m:t>𝑎</m:t>
+                        </m:r>
+                      </m:sub>
+                    </m:sSub>
+                    <m:d>
+                      <m:dPr>
+                        <m:ctrlPr>
+                          <a:rPr lang="ru-RU" sz="1800" i="1">
+                            <a:effectLst/>
+                            <a:latin typeface="Cambria Math" panose="02040503050406030204" pitchFamily="18" charset="0"/>
+                            <a:ea typeface="Times New Roman" panose="02020603050405020304" pitchFamily="18" charset="0"/>
+                            <a:cs typeface="Calibri" panose="020F0502020204030204" pitchFamily="34" charset="0"/>
+                          </a:rPr>
+                        </m:ctrlPr>
+                      </m:dPr>
+                      <m:e>
+                        <m:r>
+                          <a:rPr lang="ru-RU" sz="1800" i="1">
+                            <a:effectLst/>
+                            <a:latin typeface="Cambria Math" panose="02040503050406030204" pitchFamily="18" charset="0"/>
+                            <a:ea typeface="Times New Roman" panose="02020603050405020304" pitchFamily="18" charset="0"/>
+                            <a:cs typeface="Calibri" panose="020F0502020204030204" pitchFamily="34" charset="0"/>
+                          </a:rPr>
+                          <m:t>h</m:t>
+                        </m:r>
+                      </m:e>
+                    </m:d>
+                  </m:oMath>
+                </a14:m>
+                <a:r>
+                  <a:rPr lang="ru-RU" sz="1800" dirty="0">
+                    <a:effectLst/>
+                    <a:latin typeface="Calibri" panose="020F0502020204030204" pitchFamily="34" charset="0"/>
+                    <a:ea typeface="Times New Roman" panose="02020603050405020304" pitchFamily="18" charset="0"/>
+                  </a:rPr>
+                  <a:t> — давление воздуха на высоте (Па)  </a:t>
+                </a:r>
+                <a:endParaRPr lang="ru-RU" sz="1800" dirty="0">
+                  <a:effectLst/>
+                  <a:latin typeface="Times New Roman" panose="02020603050405020304" pitchFamily="18" charset="0"/>
+                  <a:ea typeface="Times New Roman" panose="02020603050405020304" pitchFamily="18" charset="0"/>
+                </a:endParaRPr>
+              </a:p>
+              <a:p>
+                <a:pPr>
+                  <a:spcAft>
+                    <a:spcPts val="600"/>
+                  </a:spcAft>
+                </a:pPr>
+                <a:r>
+                  <a:rPr lang="ru-RU" sz="1800" dirty="0">
+                    <a:effectLst/>
+                    <a:latin typeface="Calibri" panose="020F0502020204030204" pitchFamily="34" charset="0"/>
+                    <a:ea typeface="Times New Roman" panose="02020603050405020304" pitchFamily="18" charset="0"/>
+                  </a:rPr>
+                  <a:t>- </a:t>
+                </a:r>
+                <a14:m>
+                  <m:oMath xmlns:m="http://schemas.openxmlformats.org/officeDocument/2006/math">
+                    <m:sSub>
+                      <m:sSubPr>
+                        <m:ctrlPr>
+                          <a:rPr lang="ru-RU" sz="1800" i="1">
+                            <a:effectLst/>
+                            <a:latin typeface="Cambria Math" panose="02040503050406030204" pitchFamily="18" charset="0"/>
+                            <a:ea typeface="Times New Roman" panose="02020603050405020304" pitchFamily="18" charset="0"/>
+                            <a:cs typeface="Calibri" panose="020F0502020204030204" pitchFamily="34" charset="0"/>
+                          </a:rPr>
+                        </m:ctrlPr>
+                      </m:sSubPr>
+                      <m:e>
+                        <m:r>
+                          <a:rPr lang="ru-RU" sz="1800" i="1">
+                            <a:effectLst/>
+                            <a:latin typeface="Cambria Math" panose="02040503050406030204" pitchFamily="18" charset="0"/>
+                            <a:ea typeface="Times New Roman" panose="02020603050405020304" pitchFamily="18" charset="0"/>
+                            <a:cs typeface="Calibri" panose="020F0502020204030204" pitchFamily="34" charset="0"/>
+                          </a:rPr>
+                          <m:t>𝐴</m:t>
+                        </m:r>
+                      </m:e>
+                      <m:sub>
+                        <m:r>
+                          <a:rPr lang="ru-RU" sz="1800" i="1">
+                            <a:effectLst/>
+                            <a:latin typeface="Cambria Math" panose="02040503050406030204" pitchFamily="18" charset="0"/>
+                            <a:ea typeface="Times New Roman" panose="02020603050405020304" pitchFamily="18" charset="0"/>
+                            <a:cs typeface="Calibri" panose="020F0502020204030204" pitchFamily="34" charset="0"/>
+                          </a:rPr>
+                          <m:t>𝑒</m:t>
+                        </m:r>
+                      </m:sub>
+                    </m:sSub>
+                  </m:oMath>
+                </a14:m>
+                <a:r>
+                  <a:rPr lang="ru-RU" sz="1800" dirty="0">
+                    <a:effectLst/>
+                    <a:latin typeface="Calibri" panose="020F0502020204030204" pitchFamily="34" charset="0"/>
+                    <a:ea typeface="Times New Roman" panose="02020603050405020304" pitchFamily="18" charset="0"/>
+                  </a:rPr>
+                  <a:t> — эффективная площадь сопла (м²)  </a:t>
+                </a:r>
+                <a:endParaRPr lang="ru-RU" sz="1800" dirty="0">
+                  <a:effectLst/>
+                  <a:latin typeface="Times New Roman" panose="02020603050405020304" pitchFamily="18" charset="0"/>
+                  <a:ea typeface="Times New Roman" panose="02020603050405020304" pitchFamily="18" charset="0"/>
+                </a:endParaRPr>
+              </a:p>
+            </p:txBody>
+          </p:sp>
+        </mc:Choice>
+        <mc:Fallback>
+          <p:sp>
+            <p:nvSpPr>
+              <p:cNvPr id="15" name="TextBox 14">
+                <a:extLst>
+                  <a:ext uri="{FF2B5EF4-FFF2-40B4-BE49-F238E27FC236}">
+                    <a16:creationId xmlns:a16="http://schemas.microsoft.com/office/drawing/2014/main" id="{A7010AF4-E67F-4CE0-A7C0-A9F5264FE515}"/>
+                  </a:ext>
+                </a:extLst>
+              </p:cNvPr>
+              <p:cNvSpPr txBox="1">
+                <a:spLocks noRot="1" noChangeAspect="1" noMove="1" noResize="1" noEditPoints="1" noAdjustHandles="1" noChangeArrowheads="1" noChangeShapeType="1" noTextEdit="1"/>
+              </p:cNvSpPr>
+              <p:nvPr/>
+            </p:nvSpPr>
+            <p:spPr>
+              <a:xfrm>
+                <a:off x="261624" y="191393"/>
+                <a:ext cx="4491246" cy="3466205"/>
+              </a:xfrm>
+              <a:prstGeom prst="rect">
+                <a:avLst/>
+              </a:prstGeom>
+              <a:blipFill>
+                <a:blip r:embed="rId3"/>
+                <a:stretch>
+                  <a:fillRect l="-1083" t="-701" r="-812" b="-1576"/>
+                </a:stretch>
+              </a:blipFill>
+              <a:ln>
+                <a:solidFill>
+                  <a:schemeClr val="tx1">
+                    <a:lumMod val="50000"/>
+                    <a:lumOff val="50000"/>
+                  </a:schemeClr>
+                </a:solidFill>
+              </a:ln>
+            </p:spPr>
+            <p:txBody>
+              <a:bodyPr/>
+              <a:lstStyle/>
+              <a:p>
+                <a:r>
+                  <a:rPr lang="ru-RU">
+                    <a:noFill/>
+                  </a:rPr>
+                  <a:t> </a:t>
+                </a:r>
+              </a:p>
+            </p:txBody>
+          </p:sp>
+        </mc:Fallback>
+      </mc:AlternateContent>
+      <mc:AlternateContent xmlns:mc="http://schemas.openxmlformats.org/markup-compatibility/2006">
+        <mc:Choice xmlns:a14="http://schemas.microsoft.com/office/drawing/2010/main" Requires="a14">
+          <p:sp>
+            <p:nvSpPr>
+              <p:cNvPr id="18" name="TextBox 17">
+                <a:extLst>
+                  <a:ext uri="{FF2B5EF4-FFF2-40B4-BE49-F238E27FC236}">
+                    <a16:creationId xmlns:a16="http://schemas.microsoft.com/office/drawing/2014/main" id="{C75A51CD-19C6-4245-9DF8-AB74A7B8D3EF}"/>
+                  </a:ext>
+                </a:extLst>
+              </p:cNvPr>
+              <p:cNvSpPr txBox="1"/>
+              <p:nvPr/>
+            </p:nvSpPr>
+            <p:spPr>
+              <a:xfrm>
+                <a:off x="362107" y="4024719"/>
+                <a:ext cx="4491246" cy="2781146"/>
+              </a:xfrm>
+              <a:prstGeom prst="rect">
+                <a:avLst/>
+              </a:prstGeom>
+              <a:noFill/>
+              <a:ln>
+                <a:solidFill>
+                  <a:schemeClr val="tx1">
+                    <a:lumMod val="50000"/>
+                    <a:lumOff val="50000"/>
+                  </a:schemeClr>
+                </a:solidFill>
+              </a:ln>
+            </p:spPr>
+            <p:txBody>
+              <a:bodyPr wrap="square">
+                <a:spAutoFit/>
+              </a:bodyPr>
+              <a:lstStyle/>
+              <a:p>
+                <a:pPr>
+                  <a:spcAft>
+                    <a:spcPts val="600"/>
+                  </a:spcAft>
+                </a:pPr>
+                <a:r>
+                  <a:rPr lang="ru-RU" sz="1800" b="1" dirty="0">
+                    <a:effectLst/>
+                    <a:latin typeface="Calibri" panose="020F0502020204030204" pitchFamily="34" charset="0"/>
+                    <a:ea typeface="Times New Roman" panose="02020603050405020304" pitchFamily="18" charset="0"/>
+                  </a:rPr>
+                  <a:t>Давление воздуха</a:t>
+                </a:r>
+                <a:endParaRPr lang="ru-RU" sz="1800" dirty="0">
+                  <a:effectLst/>
+                  <a:latin typeface="Times New Roman" panose="02020603050405020304" pitchFamily="18" charset="0"/>
+                  <a:ea typeface="Times New Roman" panose="02020603050405020304" pitchFamily="18" charset="0"/>
+                </a:endParaRPr>
+              </a:p>
+              <a:p>
+                <a:pPr>
+                  <a:spcAft>
+                    <a:spcPts val="600"/>
+                  </a:spcAft>
+                </a:pPr>
+                <a14:m>
+                  <m:oMathPara xmlns:m="http://schemas.openxmlformats.org/officeDocument/2006/math">
+                    <m:oMathParaPr>
+                      <m:jc m:val="centerGroup"/>
+                    </m:oMathParaPr>
+                    <m:oMath xmlns:m="http://schemas.openxmlformats.org/officeDocument/2006/math">
+                      <m:sSub>
+                        <m:sSubPr>
+                          <m:ctrlPr>
+                            <a:rPr lang="ru-RU" sz="1800" i="1">
+                              <a:effectLst/>
+                              <a:latin typeface="Cambria Math" panose="02040503050406030204" pitchFamily="18" charset="0"/>
+                              <a:ea typeface="Times New Roman" panose="02020603050405020304" pitchFamily="18" charset="0"/>
+                              <a:cs typeface="Calibri" panose="020F0502020204030204" pitchFamily="34" charset="0"/>
+                            </a:rPr>
+                          </m:ctrlPr>
+                        </m:sSubPr>
+                        <m:e>
+                          <m:r>
+                            <a:rPr lang="en-US" sz="1800" i="1">
+                              <a:effectLst/>
+                              <a:latin typeface="Cambria Math" panose="02040503050406030204" pitchFamily="18" charset="0"/>
+                              <a:ea typeface="Times New Roman" panose="02020603050405020304" pitchFamily="18" charset="0"/>
+                              <a:cs typeface="Calibri" panose="020F0502020204030204" pitchFamily="34" charset="0"/>
+                            </a:rPr>
+                            <m:t>𝑝</m:t>
+                          </m:r>
+                        </m:e>
+                        <m:sub>
+                          <m:r>
+                            <a:rPr lang="en-US" sz="1800" i="1">
+                              <a:effectLst/>
+                              <a:latin typeface="Cambria Math" panose="02040503050406030204" pitchFamily="18" charset="0"/>
+                              <a:ea typeface="Times New Roman" panose="02020603050405020304" pitchFamily="18" charset="0"/>
+                              <a:cs typeface="Calibri" panose="020F0502020204030204" pitchFamily="34" charset="0"/>
+                            </a:rPr>
+                            <m:t>𝑎</m:t>
+                          </m:r>
+                        </m:sub>
+                      </m:sSub>
+                      <m:d>
+                        <m:dPr>
+                          <m:ctrlPr>
+                            <a:rPr lang="ru-RU" sz="1800" i="1">
+                              <a:effectLst/>
+                              <a:latin typeface="Cambria Math" panose="02040503050406030204" pitchFamily="18" charset="0"/>
+                              <a:ea typeface="Times New Roman" panose="02020603050405020304" pitchFamily="18" charset="0"/>
+                              <a:cs typeface="Calibri" panose="020F0502020204030204" pitchFamily="34" charset="0"/>
+                            </a:rPr>
+                          </m:ctrlPr>
+                        </m:dPr>
+                        <m:e>
+                          <m:r>
+                            <a:rPr lang="en-US" sz="1800" i="1">
+                              <a:effectLst/>
+                              <a:latin typeface="Cambria Math" panose="02040503050406030204" pitchFamily="18" charset="0"/>
+                              <a:ea typeface="Times New Roman" panose="02020603050405020304" pitchFamily="18" charset="0"/>
+                              <a:cs typeface="Calibri" panose="020F0502020204030204" pitchFamily="34" charset="0"/>
+                            </a:rPr>
+                            <m:t>h</m:t>
+                          </m:r>
+                        </m:e>
+                      </m:d>
+                      <m:r>
+                        <a:rPr lang="en-US" sz="1800" i="1">
+                          <a:effectLst/>
+                          <a:latin typeface="Cambria Math" panose="02040503050406030204" pitchFamily="18" charset="0"/>
+                          <a:ea typeface="Times New Roman" panose="02020603050405020304" pitchFamily="18" charset="0"/>
+                          <a:cs typeface="Calibri" panose="020F0502020204030204" pitchFamily="34" charset="0"/>
+                        </a:rPr>
+                        <m:t>=</m:t>
+                      </m:r>
+                      <m:sSub>
+                        <m:sSubPr>
+                          <m:ctrlPr>
+                            <a:rPr lang="ru-RU" sz="1800" i="1">
+                              <a:effectLst/>
+                              <a:latin typeface="Cambria Math" panose="02040503050406030204" pitchFamily="18" charset="0"/>
+                              <a:ea typeface="Times New Roman" panose="02020603050405020304" pitchFamily="18" charset="0"/>
+                              <a:cs typeface="Calibri" panose="020F0502020204030204" pitchFamily="34" charset="0"/>
+                            </a:rPr>
+                          </m:ctrlPr>
+                        </m:sSubPr>
+                        <m:e>
+                          <m:r>
+                            <a:rPr lang="en-US" sz="1800" i="1">
+                              <a:effectLst/>
+                              <a:latin typeface="Cambria Math" panose="02040503050406030204" pitchFamily="18" charset="0"/>
+                              <a:ea typeface="Times New Roman" panose="02020603050405020304" pitchFamily="18" charset="0"/>
+                              <a:cs typeface="Calibri" panose="020F0502020204030204" pitchFamily="34" charset="0"/>
+                            </a:rPr>
+                            <m:t>𝑝</m:t>
+                          </m:r>
+                        </m:e>
+                        <m:sub>
+                          <m:r>
+                            <m:rPr>
+                              <m:nor/>
+                            </m:rPr>
+                            <a:rPr lang="en-US" sz="1800">
+                              <a:effectLst/>
+                              <a:latin typeface="Cambria Math" panose="02040503050406030204" pitchFamily="18" charset="0"/>
+                              <a:ea typeface="Times New Roman" panose="02020603050405020304" pitchFamily="18" charset="0"/>
+                              <a:cs typeface="Calibri" panose="020F0502020204030204" pitchFamily="34" charset="0"/>
+                            </a:rPr>
+                            <m:t>sl</m:t>
+                          </m:r>
+                        </m:sub>
+                      </m:sSub>
+                      <m:func>
+                        <m:funcPr>
+                          <m:ctrlPr>
+                            <a:rPr lang="ru-RU" sz="1800" i="1">
+                              <a:effectLst/>
+                              <a:latin typeface="Cambria Math" panose="02040503050406030204" pitchFamily="18" charset="0"/>
+                              <a:ea typeface="Times New Roman" panose="02020603050405020304" pitchFamily="18" charset="0"/>
+                              <a:cs typeface="Calibri" panose="020F0502020204030204" pitchFamily="34" charset="0"/>
+                            </a:rPr>
+                          </m:ctrlPr>
+                        </m:funcPr>
+                        <m:fName>
+                          <m:r>
+                            <m:rPr>
+                              <m:sty m:val="p"/>
+                            </m:rPr>
+                            <a:rPr lang="en-US" sz="1800">
+                              <a:effectLst/>
+                              <a:latin typeface="Cambria Math" panose="02040503050406030204" pitchFamily="18" charset="0"/>
+                              <a:ea typeface="Times New Roman" panose="02020603050405020304" pitchFamily="18" charset="0"/>
+                              <a:cs typeface="Calibri" panose="020F0502020204030204" pitchFamily="34" charset="0"/>
+                            </a:rPr>
+                            <m:t>exp</m:t>
+                          </m:r>
+                        </m:fName>
+                        <m:e>
+                          <m:d>
+                            <m:dPr>
+                              <m:ctrlPr>
+                                <a:rPr lang="ru-RU" sz="1800" i="1">
+                                  <a:effectLst/>
+                                  <a:latin typeface="Cambria Math" panose="02040503050406030204" pitchFamily="18" charset="0"/>
+                                  <a:ea typeface="Times New Roman" panose="02020603050405020304" pitchFamily="18" charset="0"/>
+                                  <a:cs typeface="Calibri" panose="020F0502020204030204" pitchFamily="34" charset="0"/>
+                                </a:rPr>
+                              </m:ctrlPr>
+                            </m:dPr>
+                            <m:e>
+                              <m:r>
+                                <a:rPr lang="en-US" sz="1800" i="1">
+                                  <a:effectLst/>
+                                  <a:latin typeface="Cambria Math" panose="02040503050406030204" pitchFamily="18" charset="0"/>
+                                  <a:ea typeface="Times New Roman" panose="02020603050405020304" pitchFamily="18" charset="0"/>
+                                  <a:cs typeface="Calibri" panose="020F0502020204030204" pitchFamily="34" charset="0"/>
+                                </a:rPr>
+                                <m:t>−</m:t>
+                              </m:r>
+                              <m:f>
+                                <m:fPr>
+                                  <m:ctrlPr>
+                                    <a:rPr lang="ru-RU" sz="1800" i="1">
+                                      <a:effectLst/>
+                                      <a:latin typeface="Cambria Math" panose="02040503050406030204" pitchFamily="18" charset="0"/>
+                                      <a:ea typeface="Times New Roman" panose="02020603050405020304" pitchFamily="18" charset="0"/>
+                                      <a:cs typeface="Calibri" panose="020F0502020204030204" pitchFamily="34" charset="0"/>
+                                    </a:rPr>
+                                  </m:ctrlPr>
+                                </m:fPr>
+                                <m:num>
+                                  <m:r>
+                                    <a:rPr lang="en-US" sz="1800" i="1">
+                                      <a:effectLst/>
+                                      <a:latin typeface="Cambria Math" panose="02040503050406030204" pitchFamily="18" charset="0"/>
+                                      <a:ea typeface="Times New Roman" panose="02020603050405020304" pitchFamily="18" charset="0"/>
+                                      <a:cs typeface="Calibri" panose="020F0502020204030204" pitchFamily="34" charset="0"/>
+                                    </a:rPr>
+                                    <m:t>h</m:t>
+                                  </m:r>
+                                </m:num>
+                                <m:den>
+                                  <m:r>
+                                    <a:rPr lang="en-US" sz="1800" i="1">
+                                      <a:effectLst/>
+                                      <a:latin typeface="Cambria Math" panose="02040503050406030204" pitchFamily="18" charset="0"/>
+                                      <a:ea typeface="Times New Roman" panose="02020603050405020304" pitchFamily="18" charset="0"/>
+                                      <a:cs typeface="Calibri" panose="020F0502020204030204" pitchFamily="34" charset="0"/>
+                                    </a:rPr>
+                                    <m:t>𝐻</m:t>
+                                  </m:r>
+                                </m:den>
+                              </m:f>
+                            </m:e>
+                          </m:d>
+                        </m:e>
+                      </m:func>
+                    </m:oMath>
+                  </m:oMathPara>
+                </a14:m>
+                <a:endParaRPr lang="ru-RU" sz="1800" dirty="0">
+                  <a:effectLst/>
+                  <a:latin typeface="Times New Roman" panose="02020603050405020304" pitchFamily="18" charset="0"/>
+                  <a:ea typeface="Times New Roman" panose="02020603050405020304" pitchFamily="18" charset="0"/>
+                </a:endParaRPr>
+              </a:p>
+              <a:p>
+                <a:pPr>
+                  <a:spcAft>
+                    <a:spcPts val="600"/>
+                  </a:spcAft>
+                </a:pPr>
+                <a:r>
+                  <a:rPr lang="ru-RU" sz="1800" dirty="0">
+                    <a:effectLst/>
+                    <a:latin typeface="Calibri" panose="020F0502020204030204" pitchFamily="34" charset="0"/>
+                    <a:ea typeface="Times New Roman" panose="02020603050405020304" pitchFamily="18" charset="0"/>
+                  </a:rPr>
+                  <a:t>- </a:t>
+                </a:r>
+                <a14:m>
+                  <m:oMath xmlns:m="http://schemas.openxmlformats.org/officeDocument/2006/math">
+                    <m:sSub>
+                      <m:sSubPr>
+                        <m:ctrlPr>
+                          <a:rPr lang="ru-RU" sz="1800" i="1">
+                            <a:effectLst/>
+                            <a:latin typeface="Cambria Math" panose="02040503050406030204" pitchFamily="18" charset="0"/>
+                            <a:ea typeface="Times New Roman" panose="02020603050405020304" pitchFamily="18" charset="0"/>
+                            <a:cs typeface="Calibri" panose="020F0502020204030204" pitchFamily="34" charset="0"/>
+                          </a:rPr>
+                        </m:ctrlPr>
+                      </m:sSubPr>
+                      <m:e>
+                        <m:r>
+                          <a:rPr lang="ru-RU" sz="1800" i="1">
+                            <a:effectLst/>
+                            <a:latin typeface="Cambria Math" panose="02040503050406030204" pitchFamily="18" charset="0"/>
+                            <a:ea typeface="Times New Roman" panose="02020603050405020304" pitchFamily="18" charset="0"/>
+                            <a:cs typeface="Calibri" panose="020F0502020204030204" pitchFamily="34" charset="0"/>
+                          </a:rPr>
+                          <m:t>𝑝</m:t>
+                        </m:r>
+                      </m:e>
+                      <m:sub>
+                        <m:r>
+                          <a:rPr lang="ru-RU" sz="1800" i="1">
+                            <a:effectLst/>
+                            <a:latin typeface="Cambria Math" panose="02040503050406030204" pitchFamily="18" charset="0"/>
+                            <a:ea typeface="Times New Roman" panose="02020603050405020304" pitchFamily="18" charset="0"/>
+                            <a:cs typeface="Calibri" panose="020F0502020204030204" pitchFamily="34" charset="0"/>
+                          </a:rPr>
+                          <m:t>𝑎</m:t>
+                        </m:r>
+                      </m:sub>
+                    </m:sSub>
+                    <m:d>
+                      <m:dPr>
+                        <m:ctrlPr>
+                          <a:rPr lang="ru-RU" sz="1800" i="1">
+                            <a:effectLst/>
+                            <a:latin typeface="Cambria Math" panose="02040503050406030204" pitchFamily="18" charset="0"/>
+                            <a:ea typeface="Times New Roman" panose="02020603050405020304" pitchFamily="18" charset="0"/>
+                            <a:cs typeface="Calibri" panose="020F0502020204030204" pitchFamily="34" charset="0"/>
+                          </a:rPr>
+                        </m:ctrlPr>
+                      </m:dPr>
+                      <m:e>
+                        <m:r>
+                          <a:rPr lang="ru-RU" sz="1800" i="1">
+                            <a:effectLst/>
+                            <a:latin typeface="Cambria Math" panose="02040503050406030204" pitchFamily="18" charset="0"/>
+                            <a:ea typeface="Times New Roman" panose="02020603050405020304" pitchFamily="18" charset="0"/>
+                            <a:cs typeface="Calibri" panose="020F0502020204030204" pitchFamily="34" charset="0"/>
+                          </a:rPr>
+                          <m:t>h</m:t>
+                        </m:r>
+                      </m:e>
+                    </m:d>
+                  </m:oMath>
+                </a14:m>
+                <a:r>
+                  <a:rPr lang="ru-RU" sz="1800" dirty="0">
+                    <a:effectLst/>
+                    <a:latin typeface="Calibri" panose="020F0502020204030204" pitchFamily="34" charset="0"/>
+                    <a:ea typeface="Times New Roman" panose="02020603050405020304" pitchFamily="18" charset="0"/>
+                  </a:rPr>
+                  <a:t> — давление воздуха на высоте (Па)  </a:t>
+                </a:r>
+                <a:endParaRPr lang="ru-RU" sz="1800" dirty="0">
+                  <a:effectLst/>
+                  <a:latin typeface="Times New Roman" panose="02020603050405020304" pitchFamily="18" charset="0"/>
+                  <a:ea typeface="Times New Roman" panose="02020603050405020304" pitchFamily="18" charset="0"/>
+                </a:endParaRPr>
+              </a:p>
+              <a:p>
+                <a:pPr>
+                  <a:spcAft>
+                    <a:spcPts val="600"/>
+                  </a:spcAft>
+                </a:pPr>
+                <a:r>
+                  <a:rPr lang="ru-RU" sz="1800" dirty="0">
+                    <a:effectLst/>
+                    <a:latin typeface="Calibri" panose="020F0502020204030204" pitchFamily="34" charset="0"/>
+                    <a:ea typeface="Times New Roman" panose="02020603050405020304" pitchFamily="18" charset="0"/>
+                  </a:rPr>
+                  <a:t>- </a:t>
+                </a:r>
+                <a14:m>
+                  <m:oMath xmlns:m="http://schemas.openxmlformats.org/officeDocument/2006/math">
+                    <m:sSub>
+                      <m:sSubPr>
+                        <m:ctrlPr>
+                          <a:rPr lang="ru-RU" sz="1800" i="1">
+                            <a:effectLst/>
+                            <a:latin typeface="Cambria Math" panose="02040503050406030204" pitchFamily="18" charset="0"/>
+                            <a:ea typeface="Times New Roman" panose="02020603050405020304" pitchFamily="18" charset="0"/>
+                            <a:cs typeface="Calibri" panose="020F0502020204030204" pitchFamily="34" charset="0"/>
+                          </a:rPr>
+                        </m:ctrlPr>
+                      </m:sSubPr>
+                      <m:e>
+                        <m:r>
+                          <a:rPr lang="ru-RU" sz="1800" i="1">
+                            <a:effectLst/>
+                            <a:latin typeface="Cambria Math" panose="02040503050406030204" pitchFamily="18" charset="0"/>
+                            <a:ea typeface="Times New Roman" panose="02020603050405020304" pitchFamily="18" charset="0"/>
+                            <a:cs typeface="Calibri" panose="020F0502020204030204" pitchFamily="34" charset="0"/>
+                          </a:rPr>
+                          <m:t>𝑝</m:t>
+                        </m:r>
+                      </m:e>
+                      <m:sub>
+                        <m:r>
+                          <m:rPr>
+                            <m:nor/>
+                          </m:rPr>
+                          <a:rPr lang="ru-RU" sz="1800">
+                            <a:effectLst/>
+                            <a:latin typeface="Cambria Math" panose="02040503050406030204" pitchFamily="18" charset="0"/>
+                            <a:ea typeface="Times New Roman" panose="02020603050405020304" pitchFamily="18" charset="0"/>
+                            <a:cs typeface="Calibri" panose="020F0502020204030204" pitchFamily="34" charset="0"/>
+                          </a:rPr>
+                          <m:t>sl</m:t>
+                        </m:r>
+                      </m:sub>
+                    </m:sSub>
+                  </m:oMath>
+                </a14:m>
+                <a:r>
+                  <a:rPr lang="ru-RU" sz="1800" dirty="0">
+                    <a:effectLst/>
+                    <a:latin typeface="Calibri" panose="020F0502020204030204" pitchFamily="34" charset="0"/>
+                    <a:ea typeface="Times New Roman" panose="02020603050405020304" pitchFamily="18" charset="0"/>
+                  </a:rPr>
+                  <a:t> — давление на уровне моря (101325 Па)  </a:t>
+                </a:r>
+                <a:endParaRPr lang="ru-RU" sz="1800" dirty="0">
+                  <a:effectLst/>
+                  <a:latin typeface="Times New Roman" panose="02020603050405020304" pitchFamily="18" charset="0"/>
+                  <a:ea typeface="Times New Roman" panose="02020603050405020304" pitchFamily="18" charset="0"/>
+                </a:endParaRPr>
+              </a:p>
+              <a:p>
+                <a:pPr>
+                  <a:spcAft>
+                    <a:spcPts val="600"/>
+                  </a:spcAft>
+                </a:pPr>
+                <a:r>
+                  <a:rPr lang="ru-RU" sz="1800" dirty="0">
+                    <a:effectLst/>
+                    <a:latin typeface="Calibri" panose="020F0502020204030204" pitchFamily="34" charset="0"/>
+                    <a:ea typeface="Times New Roman" panose="02020603050405020304" pitchFamily="18" charset="0"/>
+                  </a:rPr>
+                  <a:t>- </a:t>
+                </a:r>
+                <a14:m>
+                  <m:oMath xmlns:m="http://schemas.openxmlformats.org/officeDocument/2006/math">
+                    <m:r>
+                      <a:rPr lang="ru-RU" sz="1800" i="1">
+                        <a:effectLst/>
+                        <a:latin typeface="Cambria Math" panose="02040503050406030204" pitchFamily="18" charset="0"/>
+                        <a:ea typeface="Times New Roman" panose="02020603050405020304" pitchFamily="18" charset="0"/>
+                        <a:cs typeface="Calibri" panose="020F0502020204030204" pitchFamily="34" charset="0"/>
+                      </a:rPr>
+                      <m:t>𝐻</m:t>
+                    </m:r>
+                  </m:oMath>
+                </a14:m>
+                <a:r>
+                  <a:rPr lang="ru-RU" sz="1800" dirty="0">
+                    <a:effectLst/>
+                    <a:latin typeface="Calibri" panose="020F0502020204030204" pitchFamily="34" charset="0"/>
+                    <a:ea typeface="Times New Roman" panose="02020603050405020304" pitchFamily="18" charset="0"/>
+                  </a:rPr>
+                  <a:t> — высота масштаба атмосферы (8500 м)  </a:t>
+                </a:r>
+                <a:endParaRPr lang="ru-RU" sz="1800" dirty="0">
+                  <a:effectLst/>
+                  <a:latin typeface="Times New Roman" panose="02020603050405020304" pitchFamily="18" charset="0"/>
+                  <a:ea typeface="Times New Roman" panose="02020603050405020304" pitchFamily="18" charset="0"/>
+                </a:endParaRPr>
+              </a:p>
+              <a:p>
+                <a:pPr>
+                  <a:spcAft>
+                    <a:spcPts val="600"/>
+                  </a:spcAft>
+                </a:pPr>
+                <a:r>
+                  <a:rPr lang="ru-RU" sz="1800" dirty="0">
+                    <a:effectLst/>
+                    <a:latin typeface="Calibri" panose="020F0502020204030204" pitchFamily="34" charset="0"/>
+                    <a:ea typeface="Times New Roman" panose="02020603050405020304" pitchFamily="18" charset="0"/>
+                  </a:rPr>
+                  <a:t>- </a:t>
+                </a:r>
+                <a14:m>
+                  <m:oMath xmlns:m="http://schemas.openxmlformats.org/officeDocument/2006/math">
+                    <m:r>
+                      <a:rPr lang="ru-RU" sz="1800" i="1">
+                        <a:effectLst/>
+                        <a:latin typeface="Cambria Math" panose="02040503050406030204" pitchFamily="18" charset="0"/>
+                        <a:ea typeface="Times New Roman" panose="02020603050405020304" pitchFamily="18" charset="0"/>
+                        <a:cs typeface="Calibri" panose="020F0502020204030204" pitchFamily="34" charset="0"/>
+                      </a:rPr>
+                      <m:t>h</m:t>
+                    </m:r>
+                  </m:oMath>
+                </a14:m>
+                <a:r>
+                  <a:rPr lang="ru-RU" sz="1800" dirty="0">
+                    <a:effectLst/>
+                    <a:latin typeface="Calibri" panose="020F0502020204030204" pitchFamily="34" charset="0"/>
+                    <a:ea typeface="Times New Roman" panose="02020603050405020304" pitchFamily="18" charset="0"/>
+                  </a:rPr>
+                  <a:t> — высота над поверхностью (м)  </a:t>
+                </a:r>
+                <a:endParaRPr lang="ru-RU" sz="1800" dirty="0">
+                  <a:effectLst/>
+                  <a:latin typeface="Times New Roman" panose="02020603050405020304" pitchFamily="18" charset="0"/>
+                  <a:ea typeface="Times New Roman" panose="02020603050405020304" pitchFamily="18" charset="0"/>
+                </a:endParaRPr>
+              </a:p>
+            </p:txBody>
+          </p:sp>
+        </mc:Choice>
+        <mc:Fallback>
+          <p:sp>
+            <p:nvSpPr>
+              <p:cNvPr id="18" name="TextBox 17">
+                <a:extLst>
+                  <a:ext uri="{FF2B5EF4-FFF2-40B4-BE49-F238E27FC236}">
+                    <a16:creationId xmlns:a16="http://schemas.microsoft.com/office/drawing/2014/main" id="{C75A51CD-19C6-4245-9DF8-AB74A7B8D3EF}"/>
+                  </a:ext>
+                </a:extLst>
+              </p:cNvPr>
+              <p:cNvSpPr txBox="1">
+                <a:spLocks noRot="1" noChangeAspect="1" noMove="1" noResize="1" noEditPoints="1" noAdjustHandles="1" noChangeArrowheads="1" noChangeShapeType="1" noTextEdit="1"/>
+              </p:cNvSpPr>
+              <p:nvPr/>
+            </p:nvSpPr>
+            <p:spPr>
+              <a:xfrm>
+                <a:off x="362107" y="4024719"/>
+                <a:ext cx="4491246" cy="2781146"/>
+              </a:xfrm>
+              <a:prstGeom prst="rect">
+                <a:avLst/>
+              </a:prstGeom>
+              <a:blipFill>
+                <a:blip r:embed="rId4"/>
+                <a:stretch>
+                  <a:fillRect l="-947" t="-873" r="-3248" b="-2402"/>
+                </a:stretch>
+              </a:blipFill>
+              <a:ln>
+                <a:solidFill>
+                  <a:schemeClr val="tx1">
+                    <a:lumMod val="50000"/>
+                    <a:lumOff val="50000"/>
+                  </a:schemeClr>
+                </a:solidFill>
+              </a:ln>
+            </p:spPr>
+            <p:txBody>
+              <a:bodyPr/>
+              <a:lstStyle/>
+              <a:p>
+                <a:r>
+                  <a:rPr lang="ru-RU">
+                    <a:noFill/>
+                  </a:rPr>
+                  <a:t> </a:t>
+                </a:r>
+              </a:p>
+            </p:txBody>
+          </p:sp>
+        </mc:Fallback>
+      </mc:AlternateContent>
+    </p:spTree>
+    <p:extLst>
+      <p:ext uri="{BB962C8B-B14F-4D97-AF65-F5344CB8AC3E}">
+        <p14:creationId xmlns:p14="http://schemas.microsoft.com/office/powerpoint/2010/main" val="2210473670"/>
+      </p:ext>
+    </p:extLst>
+  </p:cSld>
+  <p:clrMapOvr>
+    <a:masterClrMapping/>
+  </p:clrMapOvr>
+</p:sld>
+</file>
+
+<file path=ppt/slides/slide5.xml><?xml version="1.0" encoding="utf-8"?>
+<p:sld xmlns:a="http://schemas.openxmlformats.org/drawingml/2006/main" xmlns:r="http://schemas.openxmlformats.org/officeDocument/2006/relationships" xmlns:p="http://schemas.openxmlformats.org/presentationml/2006/main">
+  <p:cSld>
+    <p:spTree>
+      <p:nvGrpSpPr>
+        <p:cNvPr id="1" name=""/>
+        <p:cNvGrpSpPr/>
+        <p:nvPr/>
+      </p:nvGrpSpPr>
+      <p:grpSpPr>
+        <a:xfrm>
+          <a:off x="0" y="0"/>
+          <a:ext cx="0" cy="0"/>
+          <a:chOff x="0" y="0"/>
+          <a:chExt cx="0" cy="0"/>
+        </a:xfrm>
+      </p:grpSpPr>
       <p:sp>
         <p:nvSpPr>
           <p:cNvPr id="2" name="Заголовок 1">
@@ -9358,7 +13920,7 @@
 </p:sld>
 </file>
 
-<file path=ppt/slides/slide5.xml><?xml version="1.0" encoding="utf-8"?>
+<file path=ppt/slides/slide6.xml><?xml version="1.0" encoding="utf-8"?>
 <p:sld xmlns:a="http://schemas.openxmlformats.org/drawingml/2006/main" xmlns:r="http://schemas.openxmlformats.org/officeDocument/2006/relationships" xmlns:p="http://schemas.openxmlformats.org/presentationml/2006/main">
   <p:cSld>
     <p:spTree>
